--- a/sandisk/SanDisk-SNDK-FY2026.pptx
+++ b/sandisk/SanDisk-SNDK-FY2026.pptx
@@ -2075,7 +2075,7 @@
               <a:rPr lang="en-US" dirty="0"/>
               <a:t>The acceleration is the point: $2.31B → $3.03B → $5.95B → $8.97B.
 Two thirds of the year's revenue arrived in the second half. And Q4 on its own ($8.97B) was larger than the entire prior fiscal year (about $7.4B).
-Cut to: 01-revenue-build.mp4</a:t>
+Cut to: 01-quarterly-revenue.mp4</a:t>
             </a:r>
             <a:endParaRPr lang="en-US" dirty="0"/>
           </a:p>

--- a/sandisk/SanDisk-SNDK-FY2026.pptx
+++ b/sandisk/SanDisk-SNDK-FY2026.pptx
@@ -17,9 +17,12 @@
     <p:sldId id="265" r:id="rId11"/>
     <p:sldId id="266" r:id="rId12"/>
     <p:sldId id="267" r:id="rId13"/>
+    <p:sldId id="268" r:id="rId14"/>
+    <p:sldId id="269" r:id="rId15"/>
+    <p:sldId id="270" r:id="rId16"/>
   </p:sldIdLst>
   <p:notesMasterIdLst>
-    <p:notesMasterId r:id="rId14"/>
+    <p:notesMasterId r:id="rId17"/>
   </p:notesMasterIdLst>
   <p:sldSz cx="12192000" cy="6858000"/>
   <p:notesSz cx="6858000" cy="12192000"/>
@@ -1625,9 +1628,8 @@
           <a:p>
             <a:r>
               <a:rPr lang="en-US" dirty="0"/>
-              <a:t>Forward P/E about 5.9, PEG 0.14, net cash $6.54B ($43.89/share), 149M shares.
-Analyst average target $2,053.50 across 23 analysts, Strong Buy.
-Do not present the low multiple as free money. The right framing is the one on the right-hand card: a mid-single-digit forward multiple is the market pricing peak earnings, not a mispricing everyone else missed.</a:t>
+              <a:t>The segment bridge, animated: Datacenter, then Edge, then Consumer, stacking up to the reported $20.25B.
+Worth saying out loud that these three are the whole company — that is why they add up.</a:t>
             </a:r>
             <a:endParaRPr lang="en-US" dirty="0"/>
           </a:p>
@@ -1715,8 +1717,10 @@
           <a:p>
             <a:r>
               <a:rPr lang="en-US" dirty="0"/>
-              <a:t>Give both sides properly — this is what makes the video worth watching rather than a pump.
-The strongest bear point is the third one: 84.6% gross margin is a cycle peak. Memory margins mean-revert violently. The strongest bull point is the sold-out capacity under multi-year commitments, which is what makes this cycle arguably different from previous ones.</a:t>
+              <a:t>Keep this tight — three reasons, one line each.
+1. Demand: FY2026 enterprise AI storage capacity sold out under long-term agreements.
+2. Technology: BiCS10 1Tb TLC, &gt;29 Gb/mm², bit density up 59%.
+3. HBF: joint standard with SK hynix, OCP spec released August 2026, 512GB and 3TB/s. Sampling to customers in the second half of 2026 — this one is future revenue, not current.</a:t>
             </a:r>
             <a:endParaRPr lang="en-US" dirty="0"/>
           </a:p>
@@ -1804,9 +1808,9 @@
           <a:p>
             <a:r>
               <a:rPr lang="en-US" dirty="0"/>
-              <a:t>Close on the tension rather than on a call.
-The one-line summary: revenue up 175%, margin up 54.7 points, stock down 30% — and the whole argument reduces to whether 84.6% gross margin is a peak or a plateau.
-Standard disclaimer: this is not investment advice.</a:t>
+              <a:t>Guidance: revenue $10.30-10.80B, non-GAAP EPS $44.00-46.00.
+The framing that works: a year ago that same quarter was $2.31B and $1.22 non-GAAP EPS. So ~4.5x the revenue and &gt;30x the earnings.
+Say clearly that this is guidance, not a reported result.</a:t>
             </a:r>
             <a:endParaRPr lang="en-US" dirty="0"/>
           </a:p>
@@ -1830,6 +1834,275 @@
             <a:fld id="{F7021451-1387-4CA6-816F-3879F97B5CBC}" type="slidenum">
               <a:rPr lang="en-US"/>
               <a:t>12</a:t>
+            </a:fld>
+            <a:endParaRPr lang="en-US"/>
+          </a:p>
+        </p:txBody>
+      </p:sp>
+    </p:spTree>
+    <p:extLst>
+      <p:ext uri="{BB962C8B-B14F-4D97-AF65-F5344CB8AC3E}">
+        <p14:creationId xmlns:p14="http://schemas.microsoft.com/office/powerpoint/2010/main" val="1024086991"/>
+      </p:ext>
+    </p:extLst>
+  </p:cSld>
+  <p:clrMapOvr>
+    <a:masterClrMapping/>
+  </p:clrMapOvr>
+</p:notes>
+</file>
+
+<file path=ppt/notesSlides/notesSlide13.xml><?xml version="1.0" encoding="utf-8"?>
+<p:notes xmlns:a="http://schemas.openxmlformats.org/drawingml/2006/main" xmlns:r="http://schemas.openxmlformats.org/officeDocument/2006/relationships" xmlns:p="http://schemas.openxmlformats.org/presentationml/2006/main">
+  <p:cSld>
+    <p:spTree>
+      <p:nvGrpSpPr>
+        <p:cNvPr id="1" name=""/>
+        <p:cNvGrpSpPr/>
+        <p:nvPr/>
+      </p:nvGrpSpPr>
+      <p:grpSpPr>
+        <a:xfrm>
+          <a:off x="0" y="0"/>
+          <a:ext cx="0" cy="0"/>
+          <a:chOff x="0" y="0"/>
+          <a:chExt cx="0" cy="0"/>
+        </a:xfrm>
+      </p:grpSpPr>
+      <p:sp>
+        <p:nvSpPr>
+          <p:cNvPr id="2" name="Slide Image Placeholder 1"/>
+          <p:cNvSpPr>
+            <a:spLocks noGrp="1" noRot="1" noChangeAspect="1"/>
+          </p:cNvSpPr>
+          <p:nvPr>
+            <p:ph type="sldImg"/>
+          </p:nvPr>
+        </p:nvSpPr>
+        <p:spPr/>
+      </p:sp>
+      <p:sp>
+        <p:nvSpPr>
+          <p:cNvPr id="3" name="Notes Placeholder 2"/>
+          <p:cNvSpPr>
+            <a:spLocks noGrp="1"/>
+          </p:cNvSpPr>
+          <p:nvPr>
+            <p:ph type="body" idx="1"/>
+          </p:nvPr>
+        </p:nvSpPr>
+        <p:spPr/>
+        <p:txBody>
+          <a:bodyPr/>
+          <a:lstStyle/>
+          <a:p>
+            <a:r>
+              <a:rPr lang="en-US" dirty="0"/>
+              <a:t>Forward P/E about 5.9, PEG 0.14, net cash $6.54B ($43.89/share), 149M shares.
+Analyst average target $2,053.50 across 23 analysts, Strong Buy.
+Do not present the low multiple as free money. The right framing is the one on the right-hand card: a mid-single-digit forward multiple is the market pricing peak earnings, not a mispricing everyone else missed.</a:t>
+            </a:r>
+            <a:endParaRPr lang="en-US" dirty="0"/>
+          </a:p>
+        </p:txBody>
+      </p:sp>
+      <p:sp>
+        <p:nvSpPr>
+          <p:cNvPr id="4" name="Slide Number Placeholder 3"/>
+          <p:cNvSpPr>
+            <a:spLocks noGrp="1"/>
+          </p:cNvSpPr>
+          <p:nvPr>
+            <p:ph type="sldNum" sz="quarter" idx="10"/>
+          </p:nvPr>
+        </p:nvSpPr>
+        <p:spPr/>
+        <p:txBody>
+          <a:bodyPr/>
+          <a:lstStyle/>
+          <a:p>
+            <a:fld id="{F7021451-1387-4CA6-816F-3879F97B5CBC}" type="slidenum">
+              <a:rPr lang="en-US"/>
+              <a:t>13</a:t>
+            </a:fld>
+            <a:endParaRPr lang="en-US"/>
+          </a:p>
+        </p:txBody>
+      </p:sp>
+    </p:spTree>
+    <p:extLst>
+      <p:ext uri="{BB962C8B-B14F-4D97-AF65-F5344CB8AC3E}">
+        <p14:creationId xmlns:p14="http://schemas.microsoft.com/office/powerpoint/2010/main" val="1024086991"/>
+      </p:ext>
+    </p:extLst>
+  </p:cSld>
+  <p:clrMapOvr>
+    <a:masterClrMapping/>
+  </p:clrMapOvr>
+</p:notes>
+</file>
+
+<file path=ppt/notesSlides/notesSlide14.xml><?xml version="1.0" encoding="utf-8"?>
+<p:notes xmlns:a="http://schemas.openxmlformats.org/drawingml/2006/main" xmlns:r="http://schemas.openxmlformats.org/officeDocument/2006/relationships" xmlns:p="http://schemas.openxmlformats.org/presentationml/2006/main">
+  <p:cSld>
+    <p:spTree>
+      <p:nvGrpSpPr>
+        <p:cNvPr id="1" name=""/>
+        <p:cNvGrpSpPr/>
+        <p:nvPr/>
+      </p:nvGrpSpPr>
+      <p:grpSpPr>
+        <a:xfrm>
+          <a:off x="0" y="0"/>
+          <a:ext cx="0" cy="0"/>
+          <a:chOff x="0" y="0"/>
+          <a:chExt cx="0" cy="0"/>
+        </a:xfrm>
+      </p:grpSpPr>
+      <p:sp>
+        <p:nvSpPr>
+          <p:cNvPr id="2" name="Slide Image Placeholder 1"/>
+          <p:cNvSpPr>
+            <a:spLocks noGrp="1" noRot="1" noChangeAspect="1"/>
+          </p:cNvSpPr>
+          <p:nvPr>
+            <p:ph type="sldImg"/>
+          </p:nvPr>
+        </p:nvSpPr>
+        <p:spPr/>
+      </p:sp>
+      <p:sp>
+        <p:nvSpPr>
+          <p:cNvPr id="3" name="Notes Placeholder 2"/>
+          <p:cNvSpPr>
+            <a:spLocks noGrp="1"/>
+          </p:cNvSpPr>
+          <p:nvPr>
+            <p:ph type="body" idx="1"/>
+          </p:nvPr>
+        </p:nvSpPr>
+        <p:spPr/>
+        <p:txBody>
+          <a:bodyPr/>
+          <a:lstStyle/>
+          <a:p>
+            <a:r>
+              <a:rPr lang="en-US" dirty="0"/>
+              <a:t>Give both sides properly — this is what makes the video worth watching rather than a pump.
+The strongest bear point is the third one: 84.6% gross margin is a cycle peak. Memory margins mean-revert violently. The strongest bull point is the sold-out capacity under multi-year commitments, which is what makes this cycle arguably different from previous ones.</a:t>
+            </a:r>
+            <a:endParaRPr lang="en-US" dirty="0"/>
+          </a:p>
+        </p:txBody>
+      </p:sp>
+      <p:sp>
+        <p:nvSpPr>
+          <p:cNvPr id="4" name="Slide Number Placeholder 3"/>
+          <p:cNvSpPr>
+            <a:spLocks noGrp="1"/>
+          </p:cNvSpPr>
+          <p:nvPr>
+            <p:ph type="sldNum" sz="quarter" idx="10"/>
+          </p:nvPr>
+        </p:nvSpPr>
+        <p:spPr/>
+        <p:txBody>
+          <a:bodyPr/>
+          <a:lstStyle/>
+          <a:p>
+            <a:fld id="{F7021451-1387-4CA6-816F-3879F97B5CBC}" type="slidenum">
+              <a:rPr lang="en-US"/>
+              <a:t>14</a:t>
+            </a:fld>
+            <a:endParaRPr lang="en-US"/>
+          </a:p>
+        </p:txBody>
+      </p:sp>
+    </p:spTree>
+    <p:extLst>
+      <p:ext uri="{BB962C8B-B14F-4D97-AF65-F5344CB8AC3E}">
+        <p14:creationId xmlns:p14="http://schemas.microsoft.com/office/powerpoint/2010/main" val="1024086991"/>
+      </p:ext>
+    </p:extLst>
+  </p:cSld>
+  <p:clrMapOvr>
+    <a:masterClrMapping/>
+  </p:clrMapOvr>
+</p:notes>
+</file>
+
+<file path=ppt/notesSlides/notesSlide15.xml><?xml version="1.0" encoding="utf-8"?>
+<p:notes xmlns:a="http://schemas.openxmlformats.org/drawingml/2006/main" xmlns:r="http://schemas.openxmlformats.org/officeDocument/2006/relationships" xmlns:p="http://schemas.openxmlformats.org/presentationml/2006/main">
+  <p:cSld>
+    <p:spTree>
+      <p:nvGrpSpPr>
+        <p:cNvPr id="1" name=""/>
+        <p:cNvGrpSpPr/>
+        <p:nvPr/>
+      </p:nvGrpSpPr>
+      <p:grpSpPr>
+        <a:xfrm>
+          <a:off x="0" y="0"/>
+          <a:ext cx="0" cy="0"/>
+          <a:chOff x="0" y="0"/>
+          <a:chExt cx="0" cy="0"/>
+        </a:xfrm>
+      </p:grpSpPr>
+      <p:sp>
+        <p:nvSpPr>
+          <p:cNvPr id="2" name="Slide Image Placeholder 1"/>
+          <p:cNvSpPr>
+            <a:spLocks noGrp="1" noRot="1" noChangeAspect="1"/>
+          </p:cNvSpPr>
+          <p:nvPr>
+            <p:ph type="sldImg"/>
+          </p:nvPr>
+        </p:nvSpPr>
+        <p:spPr/>
+      </p:sp>
+      <p:sp>
+        <p:nvSpPr>
+          <p:cNvPr id="3" name="Notes Placeholder 2"/>
+          <p:cNvSpPr>
+            <a:spLocks noGrp="1"/>
+          </p:cNvSpPr>
+          <p:nvPr>
+            <p:ph type="body" idx="1"/>
+          </p:nvPr>
+        </p:nvSpPr>
+        <p:spPr/>
+        <p:txBody>
+          <a:bodyPr/>
+          <a:lstStyle/>
+          <a:p>
+            <a:r>
+              <a:rPr lang="en-US" dirty="0"/>
+              <a:t>Close on the tension rather than on a call.
+The one-line summary: revenue up 175%, margin up 54.7 points, stock down 30% — and the whole argument reduces to whether 84.6% gross margin is a peak or a plateau.
+Standard disclaimer: this is not investment advice.</a:t>
+            </a:r>
+            <a:endParaRPr lang="en-US" dirty="0"/>
+          </a:p>
+        </p:txBody>
+      </p:sp>
+      <p:sp>
+        <p:nvSpPr>
+          <p:cNvPr id="4" name="Slide Number Placeholder 3"/>
+          <p:cNvSpPr>
+            <a:spLocks noGrp="1"/>
+          </p:cNvSpPr>
+          <p:nvPr>
+            <p:ph type="sldNum" sz="quarter" idx="10"/>
+          </p:nvPr>
+        </p:nvSpPr>
+        <p:spPr/>
+        <p:txBody>
+          <a:bodyPr/>
+          <a:lstStyle/>
+          <a:p>
+            <a:fld id="{F7021451-1387-4CA6-816F-3879F97B5CBC}" type="slidenum">
+              <a:rPr lang="en-US"/>
+              <a:t>15</a:t>
             </a:fld>
             <a:endParaRPr lang="en-US"/>
           </a:p>
@@ -2163,9 +2436,8 @@
           <a:p>
             <a:r>
               <a:rPr lang="en-US" dirty="0"/>
-              <a:t>29.9% → 51.1% → 78.4% → 84.6%. That is a 54.7 point expansion in four quarters, which is extraordinary for a memory business.
-This is the single most important slide for explaining why earnings exploded rather than merely grew. Pricing power from multi-year datacenter agreements.
-Cut to: 03-gross-margin.mp4</a:t>
+              <a:t>The animated version of the slide before it. Let it run and talk over it — the bars stagger in over about five seconds and hold for two.
+$2.31B, $3.03B, $5.95B, $8.97B. Q4 alone was bigger than the whole of FY2025.</a:t>
             </a:r>
             <a:endParaRPr lang="en-US" dirty="0"/>
           </a:p>
@@ -2253,9 +2525,9 @@
           <a:p>
             <a:r>
               <a:rPr lang="en-US" dirty="0"/>
-              <a:t>The chart everyone will screenshot. $0.75 → $5.15 → $23.03 → $43.97.
-Q4 non-GAAP EPS of $39.25 beat consensus of about $33.38 by roughly 18%.
-Full year GAAP diluted EPS $73.76, from net income of $11.43B.</a:t>
+              <a:t>29.9% → 51.1% → 78.4% → 84.6%. That is a 54.7 point expansion in four quarters, which is extraordinary for a memory business.
+This is the single most important slide for explaining why earnings exploded rather than merely grew. Pricing power from multi-year datacenter agreements.
+Cut to: 03-gross-margin.mp4</a:t>
             </a:r>
             <a:endParaRPr lang="en-US" dirty="0"/>
           </a:p>
@@ -2343,9 +2615,8 @@
           <a:p>
             <a:r>
               <a:rPr lang="en-US" dirty="0"/>
-              <a:t>Edge $12.16B, Datacenter $5.15B, Consumer $2.94B.
-The mix shift is the real story: datacenter was about 12% of bits a year ago and 38% of the portfolio exiting FY2026. Consumer fell 32% sequentially in Q4 — that is deliberate, capacity being reallocated, not demand collapse.
-Cut to: 02-segment-mix.mp4</a:t>
+              <a:t>Margin expansion, animated. 29.9% to 84.6% across four quarters.
+This is the one to linger on — it is the whole explanation for why earnings went up far faster than revenue did.</a:t>
             </a:r>
             <a:endParaRPr lang="en-US" dirty="0"/>
           </a:p>
@@ -2433,10 +2704,9 @@
           <a:p>
             <a:r>
               <a:rPr lang="en-US" dirty="0"/>
-              <a:t>Keep this tight — three reasons, one line each.
-1. Demand: FY2026 enterprise AI storage capacity sold out under long-term agreements.
-2. Technology: BiCS10 1Tb TLC, &gt;29 Gb/mm², bit density up 59%.
-3. HBF: joint standard with SK hynix, OCP spec released August 2026, 512GB and 3TB/s. Sampling to customers in the second half of 2026 — this one is future revenue, not current.</a:t>
+              <a:t>The chart everyone will screenshot. $0.75 → $5.15 → $23.03 → $43.97.
+Q4 non-GAAP EPS of $39.25 beat consensus of about $33.38 by roughly 18%.
+Full year GAAP diluted EPS $73.76, from net income of $11.43B.</a:t>
             </a:r>
             <a:endParaRPr lang="en-US" dirty="0"/>
           </a:p>
@@ -2524,9 +2794,9 @@
           <a:p>
             <a:r>
               <a:rPr lang="en-US" dirty="0"/>
-              <a:t>Guidance: revenue $10.30-10.80B, non-GAAP EPS $44.00-46.00.
-The framing that works: a year ago that same quarter was $2.31B and $1.22 non-GAAP EPS. So ~4.5x the revenue and &gt;30x the earnings.
-Say clearly that this is guidance, not a reported result.</a:t>
+              <a:t>Edge $12.16B, Datacenter $5.15B, Consumer $2.94B.
+The mix shift is the real story: datacenter was about 12% of bits a year ago and 38% of the portfolio exiting FY2026. Consumer fell 32% sequentially in Q4 — that is deliberate, capacity being reallocated, not demand collapse.
+Cut to: 02-segment-mix.mp4</a:t>
             </a:r>
             <a:endParaRPr lang="en-US" dirty="0"/>
           </a:p>
@@ -3246,6 +3516,9 @@
   <p:clrMapOvr>
     <a:masterClrMapping/>
   </p:clrMapOvr>
+  <p:transition spd="med" advClick="1">
+    <p:fade/>
+  </p:transition>
 </p:sld>
 </file>
 
@@ -3273,800 +3546,47 @@
           <a:chExt cx="0" cy="0"/>
         </a:xfrm>
       </p:grpSpPr>
-      <p:sp>
-        <p:nvSpPr>
-          <p:cNvPr id="2" name="Text 0"/>
-          <p:cNvSpPr/>
-          <p:nvPr/>
-        </p:nvSpPr>
-        <p:spPr>
-          <a:xfrm>
-            <a:off x="566928" y="475488"/>
-            <a:ext cx="11027664" cy="566928"/>
-          </a:xfrm>
-          <a:prstGeom prst="rect">
-            <a:avLst/>
-          </a:prstGeom>
-          <a:noFill/>
-          <a:ln/>
-        </p:spPr>
-        <p:txBody>
-          <a:bodyPr wrap="square" lIns="0" tIns="0" rIns="0" bIns="0" rtlCol="0" anchor="ctr"/>
-          <a:lstStyle/>
-          <a:p>
-            <a:pPr indent="0" marL="0">
-              <a:buNone/>
-            </a:pPr>
-            <a:r>
-              <a:rPr lang="en-US" sz="3400" b="1" dirty="0">
-                <a:solidFill>
-                  <a:srgbClr val="FFFFFF"/>
-                </a:solidFill>
-                <a:latin typeface="Arial" pitchFamily="34" charset="0"/>
-                <a:ea typeface="Arial" pitchFamily="34" charset="-122"/>
-                <a:cs typeface="Arial" pitchFamily="34" charset="-120"/>
-              </a:rPr>
-              <a:t>What it trades at</a:t>
-            </a:r>
-            <a:endParaRPr lang="en-US" sz="3400" dirty="0"/>
-          </a:p>
-        </p:txBody>
-      </p:sp>
-      <p:sp>
-        <p:nvSpPr>
-          <p:cNvPr id="3" name="Text 1"/>
-          <p:cNvSpPr/>
-          <p:nvPr/>
-        </p:nvSpPr>
-        <p:spPr>
-          <a:xfrm>
-            <a:off x="566928" y="1060704"/>
-            <a:ext cx="11027664" cy="365760"/>
-          </a:xfrm>
-          <a:prstGeom prst="rect">
-            <a:avLst/>
-          </a:prstGeom>
-          <a:noFill/>
-          <a:ln/>
-        </p:spPr>
-        <p:txBody>
-          <a:bodyPr wrap="square" lIns="0" tIns="0" rIns="0" bIns="0" rtlCol="0" anchor="ctr"/>
-          <a:lstStyle/>
-          <a:p>
-            <a:pPr indent="0" marL="0">
-              <a:buNone/>
-            </a:pPr>
-            <a:r>
-              <a:rPr lang="en-US" sz="1500" dirty="0">
-                <a:solidFill>
-                  <a:srgbClr val="8B95A9"/>
-                </a:solidFill>
-                <a:latin typeface="Calibri" pitchFamily="34" charset="0"/>
-                <a:ea typeface="Calibri" pitchFamily="34" charset="-122"/>
-                <a:cs typeface="Calibri" pitchFamily="34" charset="-120"/>
-              </a:rPr>
-              <a:t>After a 30% fall from the high</a:t>
-            </a:r>
-            <a:endParaRPr lang="en-US" sz="1500" dirty="0"/>
-          </a:p>
-        </p:txBody>
-      </p:sp>
-      <p:sp>
-        <p:nvSpPr>
-          <p:cNvPr id="4" name="Shape 2"/>
-          <p:cNvSpPr/>
-          <p:nvPr/>
-        </p:nvSpPr>
-        <p:spPr>
-          <a:xfrm>
-            <a:off x="566928" y="1737360"/>
-            <a:ext cx="2564892" cy="1572768"/>
-          </a:xfrm>
-          <a:prstGeom prst="roundRect">
-            <a:avLst>
-              <a:gd name="adj" fmla="val 6977"/>
-            </a:avLst>
-          </a:prstGeom>
-          <a:solidFill>
-            <a:srgbClr val="151C2A"/>
-          </a:solidFill>
-          <a:ln w="12700">
-            <a:solidFill>
-              <a:srgbClr val="151C2A"/>
-            </a:solidFill>
-            <a:prstDash val="solid"/>
-          </a:ln>
-        </p:spPr>
-      </p:sp>
-      <p:sp>
-        <p:nvSpPr>
-          <p:cNvPr id="5" name="Text 3"/>
-          <p:cNvSpPr/>
-          <p:nvPr/>
-        </p:nvSpPr>
-        <p:spPr>
-          <a:xfrm>
-            <a:off x="786384" y="1883664"/>
-            <a:ext cx="2125980" cy="723473"/>
-          </a:xfrm>
-          <a:prstGeom prst="rect">
-            <a:avLst/>
-          </a:prstGeom>
-          <a:noFill/>
-          <a:ln/>
-        </p:spPr>
-        <p:txBody>
-          <a:bodyPr wrap="square" lIns="0" tIns="0" rIns="0" bIns="0" rtlCol="0" anchor="ctr"/>
-          <a:lstStyle/>
-          <a:p>
-            <a:pPr indent="0" marL="0">
-              <a:buNone/>
-            </a:pPr>
-            <a:r>
-              <a:rPr lang="en-US" sz="4000" b="1" dirty="0">
-                <a:solidFill>
-                  <a:srgbClr val="4ADE80"/>
-                </a:solidFill>
-                <a:latin typeface="Arial" pitchFamily="34" charset="0"/>
-                <a:ea typeface="Arial" pitchFamily="34" charset="-122"/>
-                <a:cs typeface="Arial" pitchFamily="34" charset="-120"/>
-              </a:rPr>
-              <a:t>5.9x</a:t>
-            </a:r>
-            <a:endParaRPr lang="en-US" sz="4000" dirty="0"/>
-          </a:p>
-        </p:txBody>
-      </p:sp>
-      <p:sp>
-        <p:nvSpPr>
-          <p:cNvPr id="6" name="Text 4"/>
-          <p:cNvSpPr/>
-          <p:nvPr/>
-        </p:nvSpPr>
-        <p:spPr>
-          <a:xfrm>
-            <a:off x="786384" y="2743932"/>
-            <a:ext cx="2125980" cy="503286"/>
-          </a:xfrm>
-          <a:prstGeom prst="rect">
-            <a:avLst/>
-          </a:prstGeom>
-          <a:noFill/>
-          <a:ln/>
-        </p:spPr>
-        <p:txBody>
-          <a:bodyPr wrap="square" lIns="0" tIns="0" rIns="0" bIns="0" rtlCol="0" anchor="t"/>
-          <a:lstStyle/>
-          <a:p>
-            <a:pPr indent="0" marL="0">
-              <a:buNone/>
-            </a:pPr>
-            <a:r>
-              <a:rPr lang="en-US" sz="1200" dirty="0">
-                <a:solidFill>
-                  <a:srgbClr val="8B95A9"/>
-                </a:solidFill>
-                <a:latin typeface="Calibri" pitchFamily="34" charset="0"/>
-                <a:ea typeface="Calibri" pitchFamily="34" charset="-122"/>
-                <a:cs typeface="Calibri" pitchFamily="34" charset="-120"/>
-              </a:rPr>
-              <a:t>Forward price / earnings</a:t>
-            </a:r>
-            <a:endParaRPr lang="en-US" sz="1200" dirty="0"/>
-          </a:p>
-        </p:txBody>
-      </p:sp>
-      <p:sp>
-        <p:nvSpPr>
-          <p:cNvPr id="7" name="Shape 5"/>
-          <p:cNvSpPr/>
-          <p:nvPr/>
-        </p:nvSpPr>
-        <p:spPr>
-          <a:xfrm>
-            <a:off x="3387852" y="1737360"/>
-            <a:ext cx="2564892" cy="1572768"/>
-          </a:xfrm>
-          <a:prstGeom prst="roundRect">
-            <a:avLst>
-              <a:gd name="adj" fmla="val 6977"/>
-            </a:avLst>
-          </a:prstGeom>
-          <a:solidFill>
-            <a:srgbClr val="151C2A"/>
-          </a:solidFill>
-          <a:ln w="12700">
-            <a:solidFill>
-              <a:srgbClr val="151C2A"/>
-            </a:solidFill>
-            <a:prstDash val="solid"/>
-          </a:ln>
-        </p:spPr>
-      </p:sp>
-      <p:sp>
-        <p:nvSpPr>
-          <p:cNvPr id="8" name="Text 6"/>
-          <p:cNvSpPr/>
-          <p:nvPr/>
-        </p:nvSpPr>
-        <p:spPr>
-          <a:xfrm>
-            <a:off x="3607308" y="1883664"/>
-            <a:ext cx="2125980" cy="723473"/>
-          </a:xfrm>
-          <a:prstGeom prst="rect">
-            <a:avLst/>
-          </a:prstGeom>
-          <a:noFill/>
-          <a:ln/>
-        </p:spPr>
-        <p:txBody>
-          <a:bodyPr wrap="square" lIns="0" tIns="0" rIns="0" bIns="0" rtlCol="0" anchor="ctr"/>
-          <a:lstStyle/>
-          <a:p>
-            <a:pPr indent="0" marL="0">
-              <a:buNone/>
-            </a:pPr>
-            <a:r>
-              <a:rPr lang="en-US" sz="4000" b="1" dirty="0">
-                <a:solidFill>
-                  <a:srgbClr val="4ADE80"/>
-                </a:solidFill>
-                <a:latin typeface="Arial" pitchFamily="34" charset="0"/>
-                <a:ea typeface="Arial" pitchFamily="34" charset="-122"/>
-                <a:cs typeface="Arial" pitchFamily="34" charset="-120"/>
-              </a:rPr>
-              <a:t>0.14</a:t>
-            </a:r>
-            <a:endParaRPr lang="en-US" sz="4000" dirty="0"/>
-          </a:p>
-        </p:txBody>
-      </p:sp>
-      <p:sp>
-        <p:nvSpPr>
-          <p:cNvPr id="9" name="Text 7"/>
-          <p:cNvSpPr/>
-          <p:nvPr/>
-        </p:nvSpPr>
-        <p:spPr>
-          <a:xfrm>
-            <a:off x="3607308" y="2743932"/>
-            <a:ext cx="2125980" cy="503286"/>
-          </a:xfrm>
-          <a:prstGeom prst="rect">
-            <a:avLst/>
-          </a:prstGeom>
-          <a:noFill/>
-          <a:ln/>
-        </p:spPr>
-        <p:txBody>
-          <a:bodyPr wrap="square" lIns="0" tIns="0" rIns="0" bIns="0" rtlCol="0" anchor="t"/>
-          <a:lstStyle/>
-          <a:p>
-            <a:pPr indent="0" marL="0">
-              <a:buNone/>
-            </a:pPr>
-            <a:r>
-              <a:rPr lang="en-US" sz="1200" dirty="0">
-                <a:solidFill>
-                  <a:srgbClr val="8B95A9"/>
-                </a:solidFill>
-                <a:latin typeface="Calibri" pitchFamily="34" charset="0"/>
-                <a:ea typeface="Calibri" pitchFamily="34" charset="-122"/>
-                <a:cs typeface="Calibri" pitchFamily="34" charset="-120"/>
-              </a:rPr>
-              <a:t>PEG ratio</a:t>
-            </a:r>
-            <a:endParaRPr lang="en-US" sz="1200" dirty="0"/>
-          </a:p>
-        </p:txBody>
-      </p:sp>
-      <p:sp>
-        <p:nvSpPr>
-          <p:cNvPr id="10" name="Shape 8"/>
-          <p:cNvSpPr/>
-          <p:nvPr/>
-        </p:nvSpPr>
-        <p:spPr>
-          <a:xfrm>
-            <a:off x="6208776" y="1737360"/>
-            <a:ext cx="2564892" cy="1572768"/>
-          </a:xfrm>
-          <a:prstGeom prst="roundRect">
-            <a:avLst>
-              <a:gd name="adj" fmla="val 6977"/>
-            </a:avLst>
-          </a:prstGeom>
-          <a:solidFill>
-            <a:srgbClr val="151C2A"/>
-          </a:solidFill>
-          <a:ln w="12700">
-            <a:solidFill>
-              <a:srgbClr val="151C2A"/>
-            </a:solidFill>
-            <a:prstDash val="solid"/>
-          </a:ln>
-        </p:spPr>
-      </p:sp>
-      <p:sp>
-        <p:nvSpPr>
-          <p:cNvPr id="11" name="Text 9"/>
-          <p:cNvSpPr/>
-          <p:nvPr/>
-        </p:nvSpPr>
-        <p:spPr>
-          <a:xfrm>
-            <a:off x="6428232" y="1883664"/>
-            <a:ext cx="2125980" cy="723473"/>
-          </a:xfrm>
-          <a:prstGeom prst="rect">
-            <a:avLst/>
-          </a:prstGeom>
-          <a:noFill/>
-          <a:ln/>
-        </p:spPr>
-        <p:txBody>
-          <a:bodyPr wrap="square" lIns="0" tIns="0" rIns="0" bIns="0" rtlCol="0" anchor="ctr"/>
-          <a:lstStyle/>
-          <a:p>
-            <a:pPr indent="0" marL="0">
-              <a:buNone/>
-            </a:pPr>
-            <a:r>
-              <a:rPr lang="en-US" sz="4000" b="1" dirty="0">
-                <a:solidFill>
-                  <a:srgbClr val="3B82F6"/>
-                </a:solidFill>
-                <a:latin typeface="Arial" pitchFamily="34" charset="0"/>
-                <a:ea typeface="Arial" pitchFamily="34" charset="-122"/>
-                <a:cs typeface="Arial" pitchFamily="34" charset="-120"/>
-              </a:rPr>
-              <a:t>$6.54B</a:t>
-            </a:r>
-            <a:endParaRPr lang="en-US" sz="4000" dirty="0"/>
-          </a:p>
-        </p:txBody>
-      </p:sp>
-      <p:sp>
-        <p:nvSpPr>
-          <p:cNvPr id="12" name="Text 10"/>
-          <p:cNvSpPr/>
-          <p:nvPr/>
-        </p:nvSpPr>
-        <p:spPr>
-          <a:xfrm>
-            <a:off x="6428232" y="2743932"/>
-            <a:ext cx="2125980" cy="503286"/>
-          </a:xfrm>
-          <a:prstGeom prst="rect">
-            <a:avLst/>
-          </a:prstGeom>
-          <a:noFill/>
-          <a:ln/>
-        </p:spPr>
-        <p:txBody>
-          <a:bodyPr wrap="square" lIns="0" tIns="0" rIns="0" bIns="0" rtlCol="0" anchor="t"/>
-          <a:lstStyle/>
-          <a:p>
-            <a:pPr indent="0" marL="0">
-              <a:buNone/>
-            </a:pPr>
-            <a:r>
-              <a:rPr lang="en-US" sz="1200" dirty="0">
-                <a:solidFill>
-                  <a:srgbClr val="8B95A9"/>
-                </a:solidFill>
-                <a:latin typeface="Calibri" pitchFamily="34" charset="0"/>
-                <a:ea typeface="Calibri" pitchFamily="34" charset="-122"/>
-                <a:cs typeface="Calibri" pitchFamily="34" charset="-120"/>
-              </a:rPr>
-              <a:t>Net cash — about $43.89 a share</a:t>
-            </a:r>
-            <a:endParaRPr lang="en-US" sz="1200" dirty="0"/>
-          </a:p>
-        </p:txBody>
-      </p:sp>
-      <p:sp>
-        <p:nvSpPr>
-          <p:cNvPr id="13" name="Shape 11"/>
-          <p:cNvSpPr/>
-          <p:nvPr/>
-        </p:nvSpPr>
-        <p:spPr>
-          <a:xfrm>
-            <a:off x="9029700" y="1737360"/>
-            <a:ext cx="2564892" cy="1572768"/>
-          </a:xfrm>
-          <a:prstGeom prst="roundRect">
-            <a:avLst>
-              <a:gd name="adj" fmla="val 6977"/>
-            </a:avLst>
-          </a:prstGeom>
-          <a:solidFill>
-            <a:srgbClr val="151C2A"/>
-          </a:solidFill>
-          <a:ln w="12700">
-            <a:solidFill>
-              <a:srgbClr val="151C2A"/>
-            </a:solidFill>
-            <a:prstDash val="solid"/>
-          </a:ln>
-        </p:spPr>
-      </p:sp>
-      <p:sp>
-        <p:nvSpPr>
-          <p:cNvPr id="14" name="Text 12"/>
-          <p:cNvSpPr/>
-          <p:nvPr/>
-        </p:nvSpPr>
-        <p:spPr>
-          <a:xfrm>
-            <a:off x="9249156" y="1883664"/>
-            <a:ext cx="2125980" cy="723473"/>
-          </a:xfrm>
-          <a:prstGeom prst="rect">
-            <a:avLst/>
-          </a:prstGeom>
-          <a:noFill/>
-          <a:ln/>
-        </p:spPr>
-        <p:txBody>
-          <a:bodyPr wrap="square" lIns="0" tIns="0" rIns="0" bIns="0" rtlCol="0" anchor="ctr"/>
-          <a:lstStyle/>
-          <a:p>
-            <a:pPr indent="0" marL="0">
-              <a:buNone/>
-            </a:pPr>
-            <a:r>
-              <a:rPr lang="en-US" sz="4000" b="1" dirty="0">
-                <a:solidFill>
-                  <a:srgbClr val="E8ECF4"/>
-                </a:solidFill>
-                <a:latin typeface="Arial" pitchFamily="34" charset="0"/>
-                <a:ea typeface="Arial" pitchFamily="34" charset="-122"/>
-                <a:cs typeface="Arial" pitchFamily="34" charset="-120"/>
-              </a:rPr>
-              <a:t>149M</a:t>
-            </a:r>
-            <a:endParaRPr lang="en-US" sz="4000" dirty="0"/>
-          </a:p>
-        </p:txBody>
-      </p:sp>
-      <p:sp>
-        <p:nvSpPr>
-          <p:cNvPr id="15" name="Text 13"/>
-          <p:cNvSpPr/>
-          <p:nvPr/>
-        </p:nvSpPr>
-        <p:spPr>
-          <a:xfrm>
-            <a:off x="9249156" y="2743932"/>
-            <a:ext cx="2125980" cy="503286"/>
-          </a:xfrm>
-          <a:prstGeom prst="rect">
-            <a:avLst/>
-          </a:prstGeom>
-          <a:noFill/>
-          <a:ln/>
-        </p:spPr>
-        <p:txBody>
-          <a:bodyPr wrap="square" lIns="0" tIns="0" rIns="0" bIns="0" rtlCol="0" anchor="t"/>
-          <a:lstStyle/>
-          <a:p>
-            <a:pPr indent="0" marL="0">
-              <a:buNone/>
-            </a:pPr>
-            <a:r>
-              <a:rPr lang="en-US" sz="1200" dirty="0">
-                <a:solidFill>
-                  <a:srgbClr val="8B95A9"/>
-                </a:solidFill>
-                <a:latin typeface="Calibri" pitchFamily="34" charset="0"/>
-                <a:ea typeface="Calibri" pitchFamily="34" charset="-122"/>
-                <a:cs typeface="Calibri" pitchFamily="34" charset="-120"/>
-              </a:rPr>
-              <a:t>Shares outstanding</a:t>
-            </a:r>
-            <a:endParaRPr lang="en-US" sz="1200" dirty="0"/>
-          </a:p>
-        </p:txBody>
-      </p:sp>
-      <p:sp>
-        <p:nvSpPr>
-          <p:cNvPr id="16" name="Shape 14"/>
-          <p:cNvSpPr/>
-          <p:nvPr/>
-        </p:nvSpPr>
-        <p:spPr>
-          <a:xfrm>
-            <a:off x="566928" y="3401568"/>
-            <a:ext cx="5486400" cy="2212848"/>
-          </a:xfrm>
-          <a:prstGeom prst="roundRect">
-            <a:avLst>
-              <a:gd name="adj" fmla="val 4959"/>
-            </a:avLst>
-          </a:prstGeom>
-          <a:solidFill>
-            <a:srgbClr val="151C2A"/>
-          </a:solidFill>
-          <a:ln w="12700">
-            <a:solidFill>
-              <a:srgbClr val="151C2A"/>
-            </a:solidFill>
-            <a:prstDash val="solid"/>
-          </a:ln>
-        </p:spPr>
-      </p:sp>
-      <p:sp>
-        <p:nvSpPr>
-          <p:cNvPr id="17" name="Text 15"/>
-          <p:cNvSpPr/>
-          <p:nvPr/>
-        </p:nvSpPr>
-        <p:spPr>
-          <a:xfrm>
-            <a:off x="859536" y="3621024"/>
-            <a:ext cx="4901184" cy="365760"/>
-          </a:xfrm>
-          <a:prstGeom prst="rect">
-            <a:avLst/>
-          </a:prstGeom>
-          <a:noFill/>
-          <a:ln/>
-        </p:spPr>
-        <p:txBody>
-          <a:bodyPr wrap="square" lIns="0" tIns="0" rIns="0" bIns="0" rtlCol="0" anchor="t"/>
-          <a:lstStyle/>
-          <a:p>
-            <a:pPr indent="0" marL="0">
-              <a:buNone/>
-            </a:pPr>
-            <a:r>
-              <a:rPr lang="en-US" sz="1600" b="1" dirty="0">
-                <a:solidFill>
-                  <a:srgbClr val="FFFFFF"/>
-                </a:solidFill>
-                <a:latin typeface="Arial" pitchFamily="34" charset="0"/>
-                <a:ea typeface="Arial" pitchFamily="34" charset="-122"/>
-                <a:cs typeface="Arial" pitchFamily="34" charset="-120"/>
-              </a:rPr>
-              <a:t>What the sell side says</a:t>
-            </a:r>
-            <a:endParaRPr lang="en-US" sz="1600" dirty="0"/>
-          </a:p>
-        </p:txBody>
-      </p:sp>
-      <p:sp>
-        <p:nvSpPr>
-          <p:cNvPr id="18" name="Text 16"/>
-          <p:cNvSpPr/>
-          <p:nvPr/>
-        </p:nvSpPr>
-        <p:spPr>
-          <a:xfrm>
-            <a:off x="859536" y="4041648"/>
-            <a:ext cx="4901184" cy="658368"/>
-          </a:xfrm>
-          <a:prstGeom prst="rect">
-            <a:avLst/>
-          </a:prstGeom>
-          <a:noFill/>
-          <a:ln/>
-        </p:spPr>
-        <p:txBody>
-          <a:bodyPr wrap="square" lIns="0" tIns="0" rIns="0" bIns="0" rtlCol="0" anchor="ctr"/>
-          <a:lstStyle/>
-          <a:p>
-            <a:pPr indent="0" marL="0">
-              <a:buNone/>
-            </a:pPr>
-            <a:r>
-              <a:rPr lang="en-US" sz="3600" b="1" dirty="0">
-                <a:solidFill>
-                  <a:srgbClr val="4ADE80"/>
-                </a:solidFill>
-                <a:latin typeface="Arial" pitchFamily="34" charset="0"/>
-                <a:ea typeface="Arial" pitchFamily="34" charset="-122"/>
-                <a:cs typeface="Arial" pitchFamily="34" charset="-120"/>
-              </a:rPr>
-              <a:t>$2,053.5</a:t>
-            </a:r>
-            <a:endParaRPr lang="en-US" sz="3600" dirty="0"/>
-          </a:p>
-        </p:txBody>
-      </p:sp>
-      <p:sp>
-        <p:nvSpPr>
-          <p:cNvPr id="19" name="Text 17"/>
-          <p:cNvSpPr/>
-          <p:nvPr/>
-        </p:nvSpPr>
-        <p:spPr>
-          <a:xfrm>
-            <a:off x="859536" y="4791456"/>
-            <a:ext cx="4901184" cy="640080"/>
-          </a:xfrm>
-          <a:prstGeom prst="rect">
-            <a:avLst/>
-          </a:prstGeom>
-          <a:noFill/>
-          <a:ln/>
-        </p:spPr>
-        <p:txBody>
-          <a:bodyPr wrap="square" lIns="0" tIns="0" rIns="0" bIns="0" rtlCol="0" anchor="t"/>
-          <a:lstStyle/>
-          <a:p>
-            <a:pPr indent="0" marL="0">
-              <a:buNone/>
-            </a:pPr>
-            <a:r>
-              <a:rPr lang="en-US" sz="1300" dirty="0">
-                <a:solidFill>
-                  <a:srgbClr val="E8ECF4"/>
-                </a:solidFill>
-                <a:latin typeface="Calibri" pitchFamily="34" charset="0"/>
-                <a:ea typeface="Calibri" pitchFamily="34" charset="-122"/>
-                <a:cs typeface="Calibri" pitchFamily="34" charset="-120"/>
-              </a:rPr>
-              <a:t>Average 12-month target across 23 analysts, consensus rating "Strong Buy".</a:t>
-            </a:r>
-            <a:endParaRPr lang="en-US" sz="1300" dirty="0"/>
-          </a:p>
-        </p:txBody>
-      </p:sp>
-      <p:sp>
-        <p:nvSpPr>
-          <p:cNvPr id="20" name="Shape 18"/>
-          <p:cNvSpPr/>
-          <p:nvPr/>
-        </p:nvSpPr>
-        <p:spPr>
-          <a:xfrm>
-            <a:off x="6382512" y="3401568"/>
-            <a:ext cx="5212080" cy="2212848"/>
-          </a:xfrm>
-          <a:prstGeom prst="roundRect">
-            <a:avLst>
-              <a:gd name="adj" fmla="val 4959"/>
-            </a:avLst>
-          </a:prstGeom>
-          <a:solidFill>
-            <a:srgbClr val="1C2536"/>
-          </a:solidFill>
-          <a:ln w="12700">
-            <a:solidFill>
-              <a:srgbClr val="1C2536"/>
-            </a:solidFill>
-            <a:prstDash val="solid"/>
-          </a:ln>
-        </p:spPr>
-      </p:sp>
-      <p:sp>
-        <p:nvSpPr>
-          <p:cNvPr id="21" name="Text 19"/>
-          <p:cNvSpPr/>
-          <p:nvPr/>
-        </p:nvSpPr>
-        <p:spPr>
-          <a:xfrm>
-            <a:off x="6675120" y="3621024"/>
-            <a:ext cx="4626864" cy="365760"/>
-          </a:xfrm>
-          <a:prstGeom prst="rect">
-            <a:avLst/>
-          </a:prstGeom>
-          <a:noFill/>
-          <a:ln/>
-        </p:spPr>
-        <p:txBody>
-          <a:bodyPr wrap="square" lIns="0" tIns="0" rIns="0" bIns="0" rtlCol="0" anchor="t"/>
-          <a:lstStyle/>
-          <a:p>
-            <a:pPr indent="0" marL="0">
-              <a:buNone/>
-            </a:pPr>
-            <a:r>
-              <a:rPr lang="en-US" sz="1600" b="1" dirty="0">
-                <a:solidFill>
-                  <a:srgbClr val="FFFFFF"/>
-                </a:solidFill>
-                <a:latin typeface="Arial" pitchFamily="34" charset="0"/>
-                <a:ea typeface="Arial" pitchFamily="34" charset="-122"/>
-                <a:cs typeface="Arial" pitchFamily="34" charset="-120"/>
-              </a:rPr>
-              <a:t>The obvious question</a:t>
-            </a:r>
-            <a:endParaRPr lang="en-US" sz="1600" dirty="0"/>
-          </a:p>
-        </p:txBody>
-      </p:sp>
-      <p:sp>
-        <p:nvSpPr>
-          <p:cNvPr id="22" name="Text 20"/>
-          <p:cNvSpPr/>
-          <p:nvPr/>
-        </p:nvSpPr>
-        <p:spPr>
-          <a:xfrm>
-            <a:off x="6675120" y="4078224"/>
-            <a:ext cx="4626864" cy="1371600"/>
-          </a:xfrm>
-          <a:prstGeom prst="rect">
-            <a:avLst/>
-          </a:prstGeom>
-          <a:noFill/>
-          <a:ln/>
-        </p:spPr>
-        <p:txBody>
-          <a:bodyPr wrap="square" lIns="0" tIns="0" rIns="0" bIns="0" rtlCol="0" anchor="t"/>
-          <a:lstStyle/>
-          <a:p>
-            <a:pPr indent="0" marL="0">
-              <a:lnSpc>
-                <a:spcPts val="1800"/>
-              </a:lnSpc>
-              <a:buNone/>
-            </a:pPr>
-            <a:r>
-              <a:rPr lang="en-US" sz="1350" dirty="0">
-                <a:solidFill>
-                  <a:srgbClr val="E8ECF4"/>
-                </a:solidFill>
-                <a:latin typeface="Calibri" pitchFamily="34" charset="0"/>
-                <a:ea typeface="Calibri" pitchFamily="34" charset="-122"/>
-                <a:cs typeface="Calibri" pitchFamily="34" charset="-120"/>
-              </a:rPr>
-              <a:t>A single-digit forward multiple usually means the market does not believe the earnings are repeatable. For a memory company at a cyclical peak, that is a reasonable thing for the market to think — and the thing to argue about.</a:t>
-            </a:r>
-            <a:endParaRPr lang="en-US" sz="1350" dirty="0"/>
-          </a:p>
-        </p:txBody>
-      </p:sp>
-      <p:sp>
-        <p:nvSpPr>
-          <p:cNvPr id="23" name="Text 21"/>
-          <p:cNvSpPr/>
-          <p:nvPr/>
-        </p:nvSpPr>
-        <p:spPr>
-          <a:xfrm>
-            <a:off x="566928" y="6382512"/>
-            <a:ext cx="11027664" cy="274320"/>
-          </a:xfrm>
-          <a:prstGeom prst="rect">
-            <a:avLst/>
-          </a:prstGeom>
-          <a:noFill/>
-          <a:ln/>
-        </p:spPr>
-        <p:txBody>
-          <a:bodyPr wrap="square" lIns="0" tIns="0" rIns="0" bIns="0" rtlCol="0" anchor="ctr"/>
-          <a:lstStyle/>
-          <a:p>
-            <a:pPr indent="0" marL="0">
-              <a:buNone/>
-            </a:pPr>
-            <a:r>
-              <a:rPr lang="en-US" sz="950" dirty="0">
-                <a:solidFill>
-                  <a:srgbClr val="5B657A"/>
-                </a:solidFill>
-                <a:latin typeface="Calibri" pitchFamily="34" charset="0"/>
-                <a:ea typeface="Calibri" pitchFamily="34" charset="-122"/>
-                <a:cs typeface="Calibri" pitchFamily="34" charset="-120"/>
-              </a:rPr>
-              <a:t>Valuation metrics as reported in mid-August 2026; market capitalisation was quoted between $180B and $188B.</a:t>
-            </a:r>
-            <a:endParaRPr lang="en-US" sz="950" dirty="0"/>
-          </a:p>
-        </p:txBody>
-      </p:sp>
+      <p:pic>
+        <p:nvPicPr>
+          <p:cNvPr id="3" name="Media 0">
+            <a:hlinkClick r:id="" action="ppaction://media"/>
+          </p:cNvPr>
+          <p:cNvPicPr>
+            <a:picLocks noChangeAspect="1"/>
+          </p:cNvPicPr>
+          <p:nvPr>
+            <a:videoFile r:link="rId1"/>
+            <p:extLst>
+              <p:ext uri="{DAA4B4D4-6D71-4841-9C94-3DE7FCFB9230}">
+                <p14:media xmlns:p14="http://schemas.microsoft.com/office/powerpoint/2010/main" r:embed="rId2"/>
+              </p:ext>
+            </p:extLst>
+          </p:nvPr>
+        </p:nvPicPr>
+        <p:blipFill>
+          <a:blip r:embed="rId3"/>
+          <a:stretch>
+            <a:fillRect/>
+          </a:stretch>
+        </p:blipFill>
+        <p:spPr>
+          <a:xfrm>
+            <a:off x="0" y="0"/>
+            <a:ext cx="12191970" cy="6858000"/>
+          </a:xfrm>
+          <a:prstGeom prst="rect">
+            <a:avLst/>
+          </a:prstGeom>
+        </p:spPr>
+      </p:pic>
     </p:spTree>
   </p:cSld>
   <p:clrMapOvr>
     <a:masterClrMapping/>
   </p:clrMapOvr>
+  <p:transition spd="med" advClick="1">
+    <p:fade/>
+  </p:transition>
 </p:sld>
 </file>
 
@@ -4127,7 +3647,7 @@
                 <a:ea typeface="Arial" pitchFamily="34" charset="-122"/>
                 <a:cs typeface="Arial" pitchFamily="34" charset="-120"/>
               </a:rPr>
-              <a:t>The argument</a:t>
+              <a:t>Why the numbers moved</a:t>
             </a:r>
             <a:endParaRPr lang="en-US" sz="3400" dirty="0"/>
           </a:p>
@@ -4166,7 +3686,7 @@
                 <a:ea typeface="Calibri" pitchFamily="34" charset="-122"/>
                 <a:cs typeface="Calibri" pitchFamily="34" charset="-120"/>
               </a:rPr>
-              <a:t>Both sides, from the same set of numbers</a:t>
+              <a:t>Three things behind the re-rating</a:t>
             </a:r>
             <a:endParaRPr lang="en-US" sz="1500" dirty="0"/>
           </a:p>
@@ -4180,12 +3700,12 @@
         </p:nvSpPr>
         <p:spPr>
           <a:xfrm>
-            <a:off x="566928" y="1737360"/>
-            <a:ext cx="5330952" cy="3520440"/>
+            <a:off x="566928" y="1810512"/>
+            <a:ext cx="3480816" cy="3877056"/>
           </a:xfrm>
           <a:prstGeom prst="roundRect">
             <a:avLst>
-              <a:gd name="adj" fmla="val 3117"/>
+              <a:gd name="adj" fmla="val 3152"/>
             </a:avLst>
           </a:prstGeom>
           <a:solidFill>
@@ -4201,38 +3721,63 @@
       </p:sp>
       <p:sp>
         <p:nvSpPr>
-          <p:cNvPr id="5" name="Text 3"/>
-          <p:cNvSpPr/>
-          <p:nvPr/>
-        </p:nvSpPr>
-        <p:spPr>
-          <a:xfrm>
-            <a:off x="877824" y="1956816"/>
-            <a:ext cx="4709160" cy="411480"/>
-          </a:xfrm>
-          <a:prstGeom prst="rect">
-            <a:avLst/>
-          </a:prstGeom>
-          <a:noFill/>
-          <a:ln/>
-        </p:spPr>
-        <p:txBody>
-          <a:bodyPr wrap="square" lIns="0" tIns="0" rIns="0" bIns="0" rtlCol="0" anchor="t"/>
-          <a:lstStyle/>
-          <a:p>
-            <a:pPr indent="0" marL="0">
+          <p:cNvPr id="5" name="Shape 3"/>
+          <p:cNvSpPr/>
+          <p:nvPr/>
+        </p:nvSpPr>
+        <p:spPr>
+          <a:xfrm>
+            <a:off x="859536" y="2103120"/>
+            <a:ext cx="566928" cy="566928"/>
+          </a:xfrm>
+          <a:prstGeom prst="ellipse">
+            <a:avLst/>
+          </a:prstGeom>
+          <a:solidFill>
+            <a:srgbClr val="3B82F6"/>
+          </a:solidFill>
+          <a:ln w="12700">
+            <a:solidFill>
+              <a:srgbClr val="3B82F6"/>
+            </a:solidFill>
+            <a:prstDash val="solid"/>
+          </a:ln>
+        </p:spPr>
+      </p:sp>
+      <p:sp>
+        <p:nvSpPr>
+          <p:cNvPr id="6" name="Text 4"/>
+          <p:cNvSpPr/>
+          <p:nvPr/>
+        </p:nvSpPr>
+        <p:spPr>
+          <a:xfrm>
+            <a:off x="859536" y="2103120"/>
+            <a:ext cx="566928" cy="566928"/>
+          </a:xfrm>
+          <a:prstGeom prst="rect">
+            <a:avLst/>
+          </a:prstGeom>
+          <a:noFill/>
+          <a:ln/>
+        </p:spPr>
+        <p:txBody>
+          <a:bodyPr wrap="square" lIns="0" tIns="0" rIns="0" bIns="0" rtlCol="0" anchor="ctr"/>
+          <a:lstStyle/>
+          <a:p>
+            <a:pPr algn="ctr" indent="0" marL="0">
               <a:buNone/>
             </a:pPr>
             <a:r>
               <a:rPr lang="en-US" sz="2000" b="1" dirty="0">
                 <a:solidFill>
-                  <a:srgbClr val="4ADE80"/>
+                  <a:srgbClr val="FFFFFF"/>
                 </a:solidFill>
                 <a:latin typeface="Arial" pitchFamily="34" charset="0"/>
                 <a:ea typeface="Arial" pitchFamily="34" charset="-122"/>
                 <a:cs typeface="Arial" pitchFamily="34" charset="-120"/>
               </a:rPr>
-              <a:t>The bull case</a:t>
+              <a:t>1</a:t>
             </a:r>
             <a:endParaRPr lang="en-US" sz="2000" dirty="0"/>
           </a:p>
@@ -4240,14 +3785,14 @@
       </p:sp>
       <p:sp>
         <p:nvSpPr>
-          <p:cNvPr id="6" name="Text 4"/>
-          <p:cNvSpPr/>
-          <p:nvPr/>
-        </p:nvSpPr>
-        <p:spPr>
-          <a:xfrm>
-            <a:off x="877824" y="2523744"/>
-            <a:ext cx="4709160" cy="2606040"/>
+          <p:cNvPr id="7" name="Text 5"/>
+          <p:cNvSpPr/>
+          <p:nvPr/>
+        </p:nvSpPr>
+        <p:spPr>
+          <a:xfrm>
+            <a:off x="859536" y="2871216"/>
+            <a:ext cx="2895600" cy="731520"/>
           </a:xfrm>
           <a:prstGeom prst="rect">
             <a:avLst/>
@@ -4259,18 +3804,53 @@
           <a:bodyPr wrap="square" lIns="0" tIns="0" rIns="0" bIns="0" rtlCol="0" anchor="t"/>
           <a:lstStyle/>
           <a:p>
-            <a:pPr marL="342900" indent="-342900">
+            <a:pPr indent="0" marL="0">
+              <a:buNone/>
+            </a:pPr>
+            <a:r>
+              <a:rPr lang="en-US" sz="1700" b="1" dirty="0">
+                <a:solidFill>
+                  <a:srgbClr val="FFFFFF"/>
+                </a:solidFill>
+                <a:latin typeface="Arial" pitchFamily="34" charset="0"/>
+                <a:ea typeface="Arial" pitchFamily="34" charset="-122"/>
+                <a:cs typeface="Arial" pitchFamily="34" charset="-120"/>
+              </a:rPr>
+              <a:t>AI data centre demand</a:t>
+            </a:r>
+            <a:endParaRPr lang="en-US" sz="1700" dirty="0"/>
+          </a:p>
+        </p:txBody>
+      </p:sp>
+      <p:sp>
+        <p:nvSpPr>
+          <p:cNvPr id="8" name="Text 6"/>
+          <p:cNvSpPr/>
+          <p:nvPr/>
+        </p:nvSpPr>
+        <p:spPr>
+          <a:xfrm>
+            <a:off x="859536" y="3675888"/>
+            <a:ext cx="2895600" cy="1828800"/>
+          </a:xfrm>
+          <a:prstGeom prst="rect">
+            <a:avLst/>
+          </a:prstGeom>
+          <a:noFill/>
+          <a:ln/>
+        </p:spPr>
+        <p:txBody>
+          <a:bodyPr wrap="square" lIns="0" tIns="0" rIns="0" bIns="0" rtlCol="0" anchor="t"/>
+          <a:lstStyle/>
+          <a:p>
+            <a:pPr indent="0" marL="0">
               <a:lnSpc>
-                <a:spcPts val="2300"/>
+                <a:spcPts val="1700"/>
               </a:lnSpc>
-              <a:spcAft>
-                <a:spcPts val="1300"/>
-              </a:spcAft>
-              <a:buSzPct val="100000"/>
-              <a:buChar char="•"/>
-            </a:pPr>
-            <a:r>
-              <a:rPr lang="en-US" sz="1500" dirty="0">
+              <a:buNone/>
+            </a:pPr>
+            <a:r>
+              <a:rPr lang="en-US" sz="1250" dirty="0">
                 <a:solidFill>
                   <a:srgbClr val="E8ECF4"/>
                 </a:solidFill>
@@ -4278,122 +3858,26 @@
                 <a:ea typeface="Calibri" pitchFamily="34" charset="-122"/>
                 <a:cs typeface="Calibri" pitchFamily="34" charset="-120"/>
               </a:rPr>
-              <a:t>FY2026 enterprise AI storage capacity sold out under long-term agreements</a:t>
-            </a:r>
-            <a:endParaRPr lang="en-US" sz="1500" dirty="0"/>
-          </a:p>
-          <a:p>
-            <a:pPr marL="342900" indent="-342900">
-              <a:lnSpc>
-                <a:spcPts val="2300"/>
-              </a:lnSpc>
-              <a:spcAft>
-                <a:spcPts val="1300"/>
-              </a:spcAft>
-              <a:buSzPct val="100000"/>
-              <a:buChar char="•"/>
-            </a:pPr>
-            <a:r>
-              <a:rPr lang="en-US" sz="1500" dirty="0">
-                <a:solidFill>
-                  <a:srgbClr val="E8ECF4"/>
-                </a:solidFill>
-                <a:latin typeface="Calibri" pitchFamily="34" charset="0"/>
-                <a:ea typeface="Calibri" pitchFamily="34" charset="-122"/>
-                <a:cs typeface="Calibri" pitchFamily="34" charset="-120"/>
-              </a:rPr>
-              <a:t>Gross margin up 54.7 points in four quarters</a:t>
-            </a:r>
-            <a:endParaRPr lang="en-US" sz="1500" dirty="0"/>
-          </a:p>
-          <a:p>
-            <a:pPr marL="342900" indent="-342900">
-              <a:lnSpc>
-                <a:spcPts val="2300"/>
-              </a:lnSpc>
-              <a:spcAft>
-                <a:spcPts val="1300"/>
-              </a:spcAft>
-              <a:buSzPct val="100000"/>
-              <a:buChar char="•"/>
-            </a:pPr>
-            <a:r>
-              <a:rPr lang="en-US" sz="1500" dirty="0">
-                <a:solidFill>
-                  <a:srgbClr val="E8ECF4"/>
-                </a:solidFill>
-                <a:latin typeface="Calibri" pitchFamily="34" charset="0"/>
-                <a:ea typeface="Calibri" pitchFamily="34" charset="-122"/>
-                <a:cs typeface="Calibri" pitchFamily="34" charset="-120"/>
-              </a:rPr>
-              <a:t>Datacenter revenue up 437% year over year</a:t>
-            </a:r>
-            <a:endParaRPr lang="en-US" sz="1500" dirty="0"/>
-          </a:p>
-          <a:p>
-            <a:pPr marL="342900" indent="-342900">
-              <a:lnSpc>
-                <a:spcPts val="2300"/>
-              </a:lnSpc>
-              <a:spcAft>
-                <a:spcPts val="1300"/>
-              </a:spcAft>
-              <a:buSzPct val="100000"/>
-              <a:buChar char="•"/>
-            </a:pPr>
-            <a:r>
-              <a:rPr lang="en-US" sz="1500" dirty="0">
-                <a:solidFill>
-                  <a:srgbClr val="E8ECF4"/>
-                </a:solidFill>
-                <a:latin typeface="Calibri" pitchFamily="34" charset="0"/>
-                <a:ea typeface="Calibri" pitchFamily="34" charset="-122"/>
-                <a:cs typeface="Calibri" pitchFamily="34" charset="-120"/>
-              </a:rPr>
-              <a:t>Net cash of $6.54B and no debt</a:t>
-            </a:r>
-            <a:endParaRPr lang="en-US" sz="1500" dirty="0"/>
-          </a:p>
-          <a:p>
-            <a:pPr marL="342900" indent="-342900">
-              <a:lnSpc>
-                <a:spcPts val="2300"/>
-              </a:lnSpc>
-              <a:spcAft>
-                <a:spcPts val="1300"/>
-              </a:spcAft>
-              <a:buSzPct val="100000"/>
-              <a:buChar char="•"/>
-            </a:pPr>
-            <a:r>
-              <a:rPr lang="en-US" sz="1500" dirty="0">
-                <a:solidFill>
-                  <a:srgbClr val="E8ECF4"/>
-                </a:solidFill>
-                <a:latin typeface="Calibri" pitchFamily="34" charset="0"/>
-                <a:ea typeface="Calibri" pitchFamily="34" charset="-122"/>
-                <a:cs typeface="Calibri" pitchFamily="34" charset="-120"/>
-              </a:rPr>
-              <a:t>Guidance implies the acceleration continues into FY2027</a:t>
-            </a:r>
-            <a:endParaRPr lang="en-US" sz="1500" dirty="0"/>
-          </a:p>
-        </p:txBody>
-      </p:sp>
-      <p:sp>
-        <p:nvSpPr>
-          <p:cNvPr id="7" name="Shape 5"/>
-          <p:cNvSpPr/>
-          <p:nvPr/>
-        </p:nvSpPr>
-        <p:spPr>
-          <a:xfrm>
-            <a:off x="6263640" y="1737360"/>
-            <a:ext cx="5330952" cy="3520440"/>
+              <a:t>Enterprise AI storage capacity sold out under long-term agreements, with multi-year customer commitments behind it rather than spot orders.</a:t>
+            </a:r>
+            <a:endParaRPr lang="en-US" sz="1250" dirty="0"/>
+          </a:p>
+        </p:txBody>
+      </p:sp>
+      <p:sp>
+        <p:nvSpPr>
+          <p:cNvPr id="9" name="Shape 7"/>
+          <p:cNvSpPr/>
+          <p:nvPr/>
+        </p:nvSpPr>
+        <p:spPr>
+          <a:xfrm>
+            <a:off x="4340352" y="1810512"/>
+            <a:ext cx="3480816" cy="3877056"/>
           </a:xfrm>
           <a:prstGeom prst="roundRect">
             <a:avLst>
-              <a:gd name="adj" fmla="val 3117"/>
+              <a:gd name="adj" fmla="val 3152"/>
             </a:avLst>
           </a:prstGeom>
           <a:solidFill>
@@ -4409,38 +3893,63 @@
       </p:sp>
       <p:sp>
         <p:nvSpPr>
-          <p:cNvPr id="8" name="Text 6"/>
-          <p:cNvSpPr/>
-          <p:nvPr/>
-        </p:nvSpPr>
-        <p:spPr>
-          <a:xfrm>
-            <a:off x="6574536" y="1956816"/>
-            <a:ext cx="4709160" cy="411480"/>
-          </a:xfrm>
-          <a:prstGeom prst="rect">
-            <a:avLst/>
-          </a:prstGeom>
-          <a:noFill/>
-          <a:ln/>
-        </p:spPr>
-        <p:txBody>
-          <a:bodyPr wrap="square" lIns="0" tIns="0" rIns="0" bIns="0" rtlCol="0" anchor="t"/>
-          <a:lstStyle/>
-          <a:p>
-            <a:pPr indent="0" marL="0">
+          <p:cNvPr id="10" name="Shape 8"/>
+          <p:cNvSpPr/>
+          <p:nvPr/>
+        </p:nvSpPr>
+        <p:spPr>
+          <a:xfrm>
+            <a:off x="4632960" y="2103120"/>
+            <a:ext cx="566928" cy="566928"/>
+          </a:xfrm>
+          <a:prstGeom prst="ellipse">
+            <a:avLst/>
+          </a:prstGeom>
+          <a:solidFill>
+            <a:srgbClr val="0D9488"/>
+          </a:solidFill>
+          <a:ln w="12700">
+            <a:solidFill>
+              <a:srgbClr val="0D9488"/>
+            </a:solidFill>
+            <a:prstDash val="solid"/>
+          </a:ln>
+        </p:spPr>
+      </p:sp>
+      <p:sp>
+        <p:nvSpPr>
+          <p:cNvPr id="11" name="Text 9"/>
+          <p:cNvSpPr/>
+          <p:nvPr/>
+        </p:nvSpPr>
+        <p:spPr>
+          <a:xfrm>
+            <a:off x="4632960" y="2103120"/>
+            <a:ext cx="566928" cy="566928"/>
+          </a:xfrm>
+          <a:prstGeom prst="rect">
+            <a:avLst/>
+          </a:prstGeom>
+          <a:noFill/>
+          <a:ln/>
+        </p:spPr>
+        <p:txBody>
+          <a:bodyPr wrap="square" lIns="0" tIns="0" rIns="0" bIns="0" rtlCol="0" anchor="ctr"/>
+          <a:lstStyle/>
+          <a:p>
+            <a:pPr algn="ctr" indent="0" marL="0">
               <a:buNone/>
             </a:pPr>
             <a:r>
               <a:rPr lang="en-US" sz="2000" b="1" dirty="0">
                 <a:solidFill>
-                  <a:srgbClr val="F87171"/>
+                  <a:srgbClr val="FFFFFF"/>
                 </a:solidFill>
                 <a:latin typeface="Arial" pitchFamily="34" charset="0"/>
                 <a:ea typeface="Arial" pitchFamily="34" charset="-122"/>
                 <a:cs typeface="Arial" pitchFamily="34" charset="-120"/>
               </a:rPr>
-              <a:t>The bear case</a:t>
+              <a:t>2</a:t>
             </a:r>
             <a:endParaRPr lang="en-US" sz="2000" dirty="0"/>
           </a:p>
@@ -4448,14 +3957,14 @@
       </p:sp>
       <p:sp>
         <p:nvSpPr>
-          <p:cNvPr id="9" name="Text 7"/>
-          <p:cNvSpPr/>
-          <p:nvPr/>
-        </p:nvSpPr>
-        <p:spPr>
-          <a:xfrm>
-            <a:off x="6574536" y="2523744"/>
-            <a:ext cx="4709160" cy="2606040"/>
+          <p:cNvPr id="12" name="Text 10"/>
+          <p:cNvSpPr/>
+          <p:nvPr/>
+        </p:nvSpPr>
+        <p:spPr>
+          <a:xfrm>
+            <a:off x="4632960" y="2871216"/>
+            <a:ext cx="2895600" cy="731520"/>
           </a:xfrm>
           <a:prstGeom prst="rect">
             <a:avLst/>
@@ -4467,18 +3976,53 @@
           <a:bodyPr wrap="square" lIns="0" tIns="0" rIns="0" bIns="0" rtlCol="0" anchor="t"/>
           <a:lstStyle/>
           <a:p>
-            <a:pPr marL="342900" indent="-342900">
+            <a:pPr indent="0" marL="0">
+              <a:buNone/>
+            </a:pPr>
+            <a:r>
+              <a:rPr lang="en-US" sz="1700" b="1" dirty="0">
+                <a:solidFill>
+                  <a:srgbClr val="FFFFFF"/>
+                </a:solidFill>
+                <a:latin typeface="Arial" pitchFamily="34" charset="0"/>
+                <a:ea typeface="Arial" pitchFamily="34" charset="-122"/>
+                <a:cs typeface="Arial" pitchFamily="34" charset="-120"/>
+              </a:rPr>
+              <a:t>BiCS10, the tenth-generation NAND</a:t>
+            </a:r>
+            <a:endParaRPr lang="en-US" sz="1700" dirty="0"/>
+          </a:p>
+        </p:txBody>
+      </p:sp>
+      <p:sp>
+        <p:nvSpPr>
+          <p:cNvPr id="13" name="Text 11"/>
+          <p:cNvSpPr/>
+          <p:nvPr/>
+        </p:nvSpPr>
+        <p:spPr>
+          <a:xfrm>
+            <a:off x="4632960" y="3675888"/>
+            <a:ext cx="2895600" cy="1828800"/>
+          </a:xfrm>
+          <a:prstGeom prst="rect">
+            <a:avLst/>
+          </a:prstGeom>
+          <a:noFill/>
+          <a:ln/>
+        </p:spPr>
+        <p:txBody>
+          <a:bodyPr wrap="square" lIns="0" tIns="0" rIns="0" bIns="0" rtlCol="0" anchor="t"/>
+          <a:lstStyle/>
+          <a:p>
+            <a:pPr indent="0" marL="0">
               <a:lnSpc>
-                <a:spcPts val="2300"/>
+                <a:spcPts val="1700"/>
               </a:lnSpc>
-              <a:spcAft>
-                <a:spcPts val="1300"/>
-              </a:spcAft>
-              <a:buSzPct val="100000"/>
-              <a:buChar char="•"/>
-            </a:pPr>
-            <a:r>
-              <a:rPr lang="en-US" sz="1500" dirty="0">
+              <a:buNone/>
+            </a:pPr>
+            <a:r>
+              <a:rPr lang="en-US" sz="1250" dirty="0">
                 <a:solidFill>
                   <a:srgbClr val="E8ECF4"/>
                 </a:solidFill>
@@ -4486,23 +4030,171 @@
                 <a:ea typeface="Calibri" pitchFamily="34" charset="-122"/>
                 <a:cs typeface="Calibri" pitchFamily="34" charset="-120"/>
               </a:rPr>
-              <a:t>Memory is historically the most cyclical business in semiconductors</a:t>
-            </a:r>
-            <a:endParaRPr lang="en-US" sz="1500" dirty="0"/>
-          </a:p>
-          <a:p>
-            <a:pPr marL="342900" indent="-342900">
+              <a:t>1Tb TLC sampling at more than 29 Gb/mm², a 59% improvement in bit density — more capacity from the same wafer.</a:t>
+            </a:r>
+            <a:endParaRPr lang="en-US" sz="1250" dirty="0"/>
+          </a:p>
+        </p:txBody>
+      </p:sp>
+      <p:sp>
+        <p:nvSpPr>
+          <p:cNvPr id="14" name="Shape 12"/>
+          <p:cNvSpPr/>
+          <p:nvPr/>
+        </p:nvSpPr>
+        <p:spPr>
+          <a:xfrm>
+            <a:off x="8113776" y="1810512"/>
+            <a:ext cx="3480816" cy="3877056"/>
+          </a:xfrm>
+          <a:prstGeom prst="roundRect">
+            <a:avLst>
+              <a:gd name="adj" fmla="val 3152"/>
+            </a:avLst>
+          </a:prstGeom>
+          <a:solidFill>
+            <a:srgbClr val="151C2A"/>
+          </a:solidFill>
+          <a:ln w="12700">
+            <a:solidFill>
+              <a:srgbClr val="151C2A"/>
+            </a:solidFill>
+            <a:prstDash val="solid"/>
+          </a:ln>
+        </p:spPr>
+      </p:sp>
+      <p:sp>
+        <p:nvSpPr>
+          <p:cNvPr id="15" name="Shape 13"/>
+          <p:cNvSpPr/>
+          <p:nvPr/>
+        </p:nvSpPr>
+        <p:spPr>
+          <a:xfrm>
+            <a:off x="8406384" y="2103120"/>
+            <a:ext cx="566928" cy="566928"/>
+          </a:xfrm>
+          <a:prstGeom prst="ellipse">
+            <a:avLst/>
+          </a:prstGeom>
+          <a:solidFill>
+            <a:srgbClr val="EA580C"/>
+          </a:solidFill>
+          <a:ln w="12700">
+            <a:solidFill>
+              <a:srgbClr val="EA580C"/>
+            </a:solidFill>
+            <a:prstDash val="solid"/>
+          </a:ln>
+        </p:spPr>
+      </p:sp>
+      <p:sp>
+        <p:nvSpPr>
+          <p:cNvPr id="16" name="Text 14"/>
+          <p:cNvSpPr/>
+          <p:nvPr/>
+        </p:nvSpPr>
+        <p:spPr>
+          <a:xfrm>
+            <a:off x="8406384" y="2103120"/>
+            <a:ext cx="566928" cy="566928"/>
+          </a:xfrm>
+          <a:prstGeom prst="rect">
+            <a:avLst/>
+          </a:prstGeom>
+          <a:noFill/>
+          <a:ln/>
+        </p:spPr>
+        <p:txBody>
+          <a:bodyPr wrap="square" lIns="0" tIns="0" rIns="0" bIns="0" rtlCol="0" anchor="ctr"/>
+          <a:lstStyle/>
+          <a:p>
+            <a:pPr algn="ctr" indent="0" marL="0">
+              <a:buNone/>
+            </a:pPr>
+            <a:r>
+              <a:rPr lang="en-US" sz="2000" b="1" dirty="0">
+                <a:solidFill>
+                  <a:srgbClr val="FFFFFF"/>
+                </a:solidFill>
+                <a:latin typeface="Arial" pitchFamily="34" charset="0"/>
+                <a:ea typeface="Arial" pitchFamily="34" charset="-122"/>
+                <a:cs typeface="Arial" pitchFamily="34" charset="-120"/>
+              </a:rPr>
+              <a:t>3</a:t>
+            </a:r>
+            <a:endParaRPr lang="en-US" sz="2000" dirty="0"/>
+          </a:p>
+        </p:txBody>
+      </p:sp>
+      <p:sp>
+        <p:nvSpPr>
+          <p:cNvPr id="17" name="Text 15"/>
+          <p:cNvSpPr/>
+          <p:nvPr/>
+        </p:nvSpPr>
+        <p:spPr>
+          <a:xfrm>
+            <a:off x="8406384" y="2871216"/>
+            <a:ext cx="2895600" cy="731520"/>
+          </a:xfrm>
+          <a:prstGeom prst="rect">
+            <a:avLst/>
+          </a:prstGeom>
+          <a:noFill/>
+          <a:ln/>
+        </p:spPr>
+        <p:txBody>
+          <a:bodyPr wrap="square" lIns="0" tIns="0" rIns="0" bIns="0" rtlCol="0" anchor="t"/>
+          <a:lstStyle/>
+          <a:p>
+            <a:pPr indent="0" marL="0">
+              <a:buNone/>
+            </a:pPr>
+            <a:r>
+              <a:rPr lang="en-US" sz="1700" b="1" dirty="0">
+                <a:solidFill>
+                  <a:srgbClr val="FFFFFF"/>
+                </a:solidFill>
+                <a:latin typeface="Arial" pitchFamily="34" charset="0"/>
+                <a:ea typeface="Arial" pitchFamily="34" charset="-122"/>
+                <a:cs typeface="Arial" pitchFamily="34" charset="-120"/>
+              </a:rPr>
+              <a:t>High Bandwidth Flash, with SK hynix</a:t>
+            </a:r>
+            <a:endParaRPr lang="en-US" sz="1700" dirty="0"/>
+          </a:p>
+        </p:txBody>
+      </p:sp>
+      <p:sp>
+        <p:nvSpPr>
+          <p:cNvPr id="18" name="Text 16"/>
+          <p:cNvSpPr/>
+          <p:nvPr/>
+        </p:nvSpPr>
+        <p:spPr>
+          <a:xfrm>
+            <a:off x="8406384" y="3675888"/>
+            <a:ext cx="2895600" cy="1828800"/>
+          </a:xfrm>
+          <a:prstGeom prst="rect">
+            <a:avLst/>
+          </a:prstGeom>
+          <a:noFill/>
+          <a:ln/>
+        </p:spPr>
+        <p:txBody>
+          <a:bodyPr wrap="square" lIns="0" tIns="0" rIns="0" bIns="0" rtlCol="0" anchor="t"/>
+          <a:lstStyle/>
+          <a:p>
+            <a:pPr indent="0" marL="0">
               <a:lnSpc>
-                <a:spcPts val="2300"/>
+                <a:spcPts val="1700"/>
               </a:lnSpc>
-              <a:spcAft>
-                <a:spcPts val="1300"/>
-              </a:spcAft>
-              <a:buSzPct val="100000"/>
-              <a:buChar char="•"/>
-            </a:pPr>
-            <a:r>
-              <a:rPr lang="en-US" sz="1500" dirty="0">
+              <a:buNone/>
+            </a:pPr>
+            <a:r>
+              <a:rPr lang="en-US" sz="1250" dirty="0">
                 <a:solidFill>
                   <a:srgbClr val="E8ECF4"/>
                 </a:solidFill>
@@ -4510,118 +4202,46 @@
                 <a:ea typeface="Calibri" pitchFamily="34" charset="-122"/>
                 <a:cs typeface="Calibri" pitchFamily="34" charset="-120"/>
               </a:rPr>
-              <a:t>84.6% gross margin is a peak, not a baseline</a:t>
-            </a:r>
-            <a:endParaRPr lang="en-US" sz="1500" dirty="0"/>
-          </a:p>
-          <a:p>
-            <a:pPr marL="342900" indent="-342900">
-              <a:lnSpc>
-                <a:spcPts val="2300"/>
-              </a:lnSpc>
-              <a:spcAft>
-                <a:spcPts val="1300"/>
-              </a:spcAft>
-              <a:buSzPct val="100000"/>
-              <a:buChar char="•"/>
-            </a:pPr>
-            <a:r>
-              <a:rPr lang="en-US" sz="1500" dirty="0">
-                <a:solidFill>
-                  <a:srgbClr val="E8ECF4"/>
+              <a:t>First OCP technical specification published August 2026: up to 512GB per stack and up to 3TB/s, aimed at the AI inference bottleneck.</a:t>
+            </a:r>
+            <a:endParaRPr lang="en-US" sz="1250" dirty="0"/>
+          </a:p>
+        </p:txBody>
+      </p:sp>
+      <p:sp>
+        <p:nvSpPr>
+          <p:cNvPr id="19" name="Text 17"/>
+          <p:cNvSpPr/>
+          <p:nvPr/>
+        </p:nvSpPr>
+        <p:spPr>
+          <a:xfrm>
+            <a:off x="566928" y="6382512"/>
+            <a:ext cx="11027664" cy="274320"/>
+          </a:xfrm>
+          <a:prstGeom prst="rect">
+            <a:avLst/>
+          </a:prstGeom>
+          <a:noFill/>
+          <a:ln/>
+        </p:spPr>
+        <p:txBody>
+          <a:bodyPr wrap="square" lIns="0" tIns="0" rIns="0" bIns="0" rtlCol="0" anchor="ctr"/>
+          <a:lstStyle/>
+          <a:p>
+            <a:pPr indent="0" marL="0">
+              <a:buNone/>
+            </a:pPr>
+            <a:r>
+              <a:rPr lang="en-US" sz="950" dirty="0">
+                <a:solidFill>
+                  <a:srgbClr val="5B657A"/>
                 </a:solidFill>
                 <a:latin typeface="Calibri" pitchFamily="34" charset="0"/>
                 <a:ea typeface="Calibri" pitchFamily="34" charset="-122"/>
                 <a:cs typeface="Calibri" pitchFamily="34" charset="-120"/>
               </a:rPr>
-              <a:t>Consumer revenue fell 32% sequentially in Q4</a:t>
-            </a:r>
-            <a:endParaRPr lang="en-US" sz="1500" dirty="0"/>
-          </a:p>
-          <a:p>
-            <a:pPr marL="342900" indent="-342900">
-              <a:lnSpc>
-                <a:spcPts val="2300"/>
-              </a:lnSpc>
-              <a:spcAft>
-                <a:spcPts val="1300"/>
-              </a:spcAft>
-              <a:buSzPct val="100000"/>
-              <a:buChar char="•"/>
-            </a:pPr>
-            <a:r>
-              <a:rPr lang="en-US" sz="1500" dirty="0">
-                <a:solidFill>
-                  <a:srgbClr val="E8ECF4"/>
-                </a:solidFill>
-                <a:latin typeface="Calibri" pitchFamily="34" charset="0"/>
-                <a:ea typeface="Calibri" pitchFamily="34" charset="-122"/>
-                <a:cs typeface="Calibri" pitchFamily="34" charset="-120"/>
-              </a:rPr>
-              <a:t>Revenue is concentrated in a few very large hyperscale customers</a:t>
-            </a:r>
-            <a:endParaRPr lang="en-US" sz="1500" dirty="0"/>
-          </a:p>
-          <a:p>
-            <a:pPr marL="342900" indent="-342900">
-              <a:lnSpc>
-                <a:spcPts val="2300"/>
-              </a:lnSpc>
-              <a:spcAft>
-                <a:spcPts val="1300"/>
-              </a:spcAft>
-              <a:buSzPct val="100000"/>
-              <a:buChar char="•"/>
-            </a:pPr>
-            <a:r>
-              <a:rPr lang="en-US" sz="1500" dirty="0">
-                <a:solidFill>
-                  <a:srgbClr val="E8ECF4"/>
-                </a:solidFill>
-                <a:latin typeface="Calibri" pitchFamily="34" charset="0"/>
-                <a:ea typeface="Calibri" pitchFamily="34" charset="-122"/>
-                <a:cs typeface="Calibri" pitchFamily="34" charset="-120"/>
-              </a:rPr>
-              <a:t>The stock has already fallen more than 30% from its June high</a:t>
-            </a:r>
-            <a:endParaRPr lang="en-US" sz="1500" dirty="0"/>
-          </a:p>
-        </p:txBody>
-      </p:sp>
-      <p:sp>
-        <p:nvSpPr>
-          <p:cNvPr id="10" name="Text 8"/>
-          <p:cNvSpPr/>
-          <p:nvPr/>
-        </p:nvSpPr>
-        <p:spPr>
-          <a:xfrm>
-            <a:off x="566928" y="6382512"/>
-            <a:ext cx="11027664" cy="274320"/>
-          </a:xfrm>
-          <a:prstGeom prst="rect">
-            <a:avLst/>
-          </a:prstGeom>
-          <a:noFill/>
-          <a:ln/>
-        </p:spPr>
-        <p:txBody>
-          <a:bodyPr wrap="square" lIns="0" tIns="0" rIns="0" bIns="0" rtlCol="0" anchor="ctr"/>
-          <a:lstStyle/>
-          <a:p>
-            <a:pPr indent="0" marL="0">
-              <a:buNone/>
-            </a:pPr>
-            <a:r>
-              <a:rPr lang="en-US" sz="950" dirty="0">
-                <a:solidFill>
-                  <a:srgbClr val="5B657A"/>
-                </a:solidFill>
-                <a:latin typeface="Calibri" pitchFamily="34" charset="0"/>
-                <a:ea typeface="Calibri" pitchFamily="34" charset="-122"/>
-                <a:cs typeface="Calibri" pitchFamily="34" charset="-120"/>
-              </a:rPr>
-              <a:t>Both columns are drawn from the same reported FY2026 figures.</a:t>
+              <a:t>Sandisk product announcements and FY2026 results commentary.</a:t>
             </a:r>
             <a:endParaRPr lang="en-US" sz="950" dirty="0"/>
           </a:p>
@@ -4632,6 +4252,9 @@
   <p:clrMapOvr>
     <a:masterClrMapping/>
   </p:clrMapOvr>
+  <p:transition spd="med" advClick="1">
+    <p:fade/>
+  </p:transition>
 </p:sld>
 </file>
 
@@ -4667,8 +4290,8 @@
         </p:nvSpPr>
         <p:spPr>
           <a:xfrm>
-            <a:off x="566928" y="1234440"/>
-            <a:ext cx="11027664" cy="685800"/>
+            <a:off x="566928" y="475488"/>
+            <a:ext cx="11027664" cy="566928"/>
           </a:xfrm>
           <a:prstGeom prst="rect">
             <a:avLst/>
@@ -4684,7 +4307,7 @@
               <a:buNone/>
             </a:pPr>
             <a:r>
-              <a:rPr lang="en-US" sz="3600" b="1" dirty="0">
+              <a:rPr lang="en-US" sz="3400" b="1" dirty="0">
                 <a:solidFill>
                   <a:srgbClr val="FFFFFF"/>
                 </a:solidFill>
@@ -4692,26 +4315,65 @@
                 <a:ea typeface="Arial" pitchFamily="34" charset="-122"/>
                 <a:cs typeface="Arial" pitchFamily="34" charset="-120"/>
               </a:rPr>
-              <a:t>Three numbers to remember</a:t>
-            </a:r>
-            <a:endParaRPr lang="en-US" sz="3600" dirty="0"/>
-          </a:p>
-        </p:txBody>
-      </p:sp>
-      <p:sp>
-        <p:nvSpPr>
-          <p:cNvPr id="3" name="Shape 1"/>
-          <p:cNvSpPr/>
-          <p:nvPr/>
-        </p:nvSpPr>
-        <p:spPr>
-          <a:xfrm>
-            <a:off x="566928" y="2331720"/>
-            <a:ext cx="3480816" cy="2011680"/>
+              <a:t>What management guided to</a:t>
+            </a:r>
+            <a:endParaRPr lang="en-US" sz="3400" dirty="0"/>
+          </a:p>
+        </p:txBody>
+      </p:sp>
+      <p:sp>
+        <p:nvSpPr>
+          <p:cNvPr id="3" name="Text 1"/>
+          <p:cNvSpPr/>
+          <p:nvPr/>
+        </p:nvSpPr>
+        <p:spPr>
+          <a:xfrm>
+            <a:off x="566928" y="1060704"/>
+            <a:ext cx="11027664" cy="365760"/>
+          </a:xfrm>
+          <a:prstGeom prst="rect">
+            <a:avLst/>
+          </a:prstGeom>
+          <a:noFill/>
+          <a:ln/>
+        </p:spPr>
+        <p:txBody>
+          <a:bodyPr wrap="square" lIns="0" tIns="0" rIns="0" bIns="0" rtlCol="0" anchor="ctr"/>
+          <a:lstStyle/>
+          <a:p>
+            <a:pPr indent="0" marL="0">
+              <a:buNone/>
+            </a:pPr>
+            <a:r>
+              <a:rPr lang="en-US" sz="1500" dirty="0">
+                <a:solidFill>
+                  <a:srgbClr val="8B95A9"/>
+                </a:solidFill>
+                <a:latin typeface="Calibri" pitchFamily="34" charset="0"/>
+                <a:ea typeface="Calibri" pitchFamily="34" charset="-122"/>
+                <a:cs typeface="Calibri" pitchFamily="34" charset="-120"/>
+              </a:rPr>
+              <a:t>First quarter of fiscal 2027</a:t>
+            </a:r>
+            <a:endParaRPr lang="en-US" sz="1500" dirty="0"/>
+          </a:p>
+        </p:txBody>
+      </p:sp>
+      <p:sp>
+        <p:nvSpPr>
+          <p:cNvPr id="4" name="Shape 2"/>
+          <p:cNvSpPr/>
+          <p:nvPr/>
+        </p:nvSpPr>
+        <p:spPr>
+          <a:xfrm>
+            <a:off x="566928" y="1874520"/>
+            <a:ext cx="5394960" cy="1874520"/>
           </a:xfrm>
           <a:prstGeom prst="roundRect">
             <a:avLst>
-              <a:gd name="adj" fmla="val 5455"/>
+              <a:gd name="adj" fmla="val 5854"/>
             </a:avLst>
           </a:prstGeom>
           <a:solidFill>
@@ -4727,14 +4389,14 @@
       </p:sp>
       <p:sp>
         <p:nvSpPr>
-          <p:cNvPr id="4" name="Text 2"/>
-          <p:cNvSpPr/>
-          <p:nvPr/>
-        </p:nvSpPr>
-        <p:spPr>
-          <a:xfrm>
-            <a:off x="786384" y="2478024"/>
-            <a:ext cx="3041904" cy="925373"/>
+          <p:cNvPr id="5" name="Text 3"/>
+          <p:cNvSpPr/>
+          <p:nvPr/>
+        </p:nvSpPr>
+        <p:spPr>
+          <a:xfrm>
+            <a:off x="786384" y="2020824"/>
+            <a:ext cx="4956048" cy="862279"/>
           </a:xfrm>
           <a:prstGeom prst="rect">
             <a:avLst/>
@@ -4750,7 +4412,7 @@
               <a:buNone/>
             </a:pPr>
             <a:r>
-              <a:rPr lang="en-US" sz="4000" b="1" dirty="0">
+              <a:rPr lang="en-US" sz="3800" b="1" dirty="0">
                 <a:solidFill>
                   <a:srgbClr val="3B82F6"/>
                 </a:solidFill>
@@ -4758,22 +4420,22 @@
                 <a:ea typeface="Arial" pitchFamily="34" charset="-122"/>
                 <a:cs typeface="Arial" pitchFamily="34" charset="-120"/>
               </a:rPr>
-              <a:t>$20.2B</a:t>
-            </a:r>
-            <a:endParaRPr lang="en-US" sz="4000" dirty="0"/>
-          </a:p>
-        </p:txBody>
-      </p:sp>
-      <p:sp>
-        <p:nvSpPr>
-          <p:cNvPr id="5" name="Text 3"/>
-          <p:cNvSpPr/>
-          <p:nvPr/>
-        </p:nvSpPr>
-        <p:spPr>
-          <a:xfrm>
-            <a:off x="786384" y="3619195"/>
-            <a:ext cx="3041904" cy="643738"/>
+              <a:t>$10.30–10.80B</a:t>
+            </a:r>
+            <a:endParaRPr lang="en-US" sz="3800" dirty="0"/>
+          </a:p>
+        </p:txBody>
+      </p:sp>
+      <p:sp>
+        <p:nvSpPr>
+          <p:cNvPr id="6" name="Text 4"/>
+          <p:cNvSpPr/>
+          <p:nvPr/>
+        </p:nvSpPr>
+        <p:spPr>
+          <a:xfrm>
+            <a:off x="786384" y="3074213"/>
+            <a:ext cx="4956048" cy="599846"/>
           </a:xfrm>
           <a:prstGeom prst="rect">
             <a:avLst/>
@@ -4797,7 +4459,7 @@
                 <a:ea typeface="Calibri" pitchFamily="34" charset="-122"/>
                 <a:cs typeface="Calibri" pitchFamily="34" charset="-120"/>
               </a:rPr>
-              <a:t>FY2026 revenue, up 175% on the prior year</a:t>
+              <a:t>Q1 FY2027 revenue guidance</a:t>
             </a:r>
             <a:endParaRPr lang="en-US" sz="1200" dirty="0"/>
           </a:p>
@@ -4805,18 +4467,18 @@
       </p:sp>
       <p:sp>
         <p:nvSpPr>
-          <p:cNvPr id="6" name="Shape 4"/>
-          <p:cNvSpPr/>
-          <p:nvPr/>
-        </p:nvSpPr>
-        <p:spPr>
-          <a:xfrm>
-            <a:off x="4340352" y="2331720"/>
-            <a:ext cx="3480816" cy="2011680"/>
+          <p:cNvPr id="7" name="Shape 5"/>
+          <p:cNvSpPr/>
+          <p:nvPr/>
+        </p:nvSpPr>
+        <p:spPr>
+          <a:xfrm>
+            <a:off x="6291072" y="1874520"/>
+            <a:ext cx="5394960" cy="1874520"/>
           </a:xfrm>
           <a:prstGeom prst="roundRect">
             <a:avLst>
-              <a:gd name="adj" fmla="val 5455"/>
+              <a:gd name="adj" fmla="val 5854"/>
             </a:avLst>
           </a:prstGeom>
           <a:solidFill>
@@ -4832,14 +4494,14 @@
       </p:sp>
       <p:sp>
         <p:nvSpPr>
-          <p:cNvPr id="7" name="Text 5"/>
-          <p:cNvSpPr/>
-          <p:nvPr/>
-        </p:nvSpPr>
-        <p:spPr>
-          <a:xfrm>
-            <a:off x="4559808" y="2478024"/>
-            <a:ext cx="3041904" cy="925373"/>
+          <p:cNvPr id="8" name="Text 6"/>
+          <p:cNvSpPr/>
+          <p:nvPr/>
+        </p:nvSpPr>
+        <p:spPr>
+          <a:xfrm>
+            <a:off x="6510528" y="2020824"/>
+            <a:ext cx="4956048" cy="862279"/>
           </a:xfrm>
           <a:prstGeom prst="rect">
             <a:avLst/>
@@ -4855,30 +4517,30 @@
               <a:buNone/>
             </a:pPr>
             <a:r>
-              <a:rPr lang="en-US" sz="4000" b="1" dirty="0">
-                <a:solidFill>
-                  <a:srgbClr val="0D9488"/>
+              <a:rPr lang="en-US" sz="3800" b="1" dirty="0">
+                <a:solidFill>
+                  <a:srgbClr val="4ADE80"/>
                 </a:solidFill>
                 <a:latin typeface="Arial" pitchFamily="34" charset="0"/>
                 <a:ea typeface="Arial" pitchFamily="34" charset="-122"/>
                 <a:cs typeface="Arial" pitchFamily="34" charset="-120"/>
               </a:rPr>
-              <a:t>84.6%</a:t>
-            </a:r>
-            <a:endParaRPr lang="en-US" sz="4000" dirty="0"/>
-          </a:p>
-        </p:txBody>
-      </p:sp>
-      <p:sp>
-        <p:nvSpPr>
-          <p:cNvPr id="8" name="Text 6"/>
-          <p:cNvSpPr/>
-          <p:nvPr/>
-        </p:nvSpPr>
-        <p:spPr>
-          <a:xfrm>
-            <a:off x="4559808" y="3619195"/>
-            <a:ext cx="3041904" cy="643738"/>
+              <a:t>$44.00–46.00</a:t>
+            </a:r>
+            <a:endParaRPr lang="en-US" sz="3800" dirty="0"/>
+          </a:p>
+        </p:txBody>
+      </p:sp>
+      <p:sp>
+        <p:nvSpPr>
+          <p:cNvPr id="9" name="Text 7"/>
+          <p:cNvSpPr/>
+          <p:nvPr/>
+        </p:nvSpPr>
+        <p:spPr>
+          <a:xfrm>
+            <a:off x="6510528" y="3074213"/>
+            <a:ext cx="4956048" cy="599846"/>
           </a:xfrm>
           <a:prstGeom prst="rect">
             <a:avLst/>
@@ -4902,7 +4564,7 @@
                 <a:ea typeface="Calibri" pitchFamily="34" charset="-122"/>
                 <a:cs typeface="Calibri" pitchFamily="34" charset="-120"/>
               </a:rPr>
-              <a:t>Q4 non-GAAP gross margin, from 29.9% in Q1</a:t>
+              <a:t>Q1 FY2027 non-GAAP diluted EPS guidance</a:t>
             </a:r>
             <a:endParaRPr lang="en-US" sz="1200" dirty="0"/>
           </a:p>
@@ -4910,18 +4572,275 @@
       </p:sp>
       <p:sp>
         <p:nvSpPr>
-          <p:cNvPr id="9" name="Shape 7"/>
-          <p:cNvSpPr/>
-          <p:nvPr/>
-        </p:nvSpPr>
-        <p:spPr>
-          <a:xfrm>
-            <a:off x="8113776" y="2331720"/>
-            <a:ext cx="3480816" cy="2011680"/>
+          <p:cNvPr id="10" name="Shape 8"/>
+          <p:cNvSpPr/>
+          <p:nvPr/>
+        </p:nvSpPr>
+        <p:spPr>
+          <a:xfrm>
+            <a:off x="566928" y="4041648"/>
+            <a:ext cx="11027664" cy="1572768"/>
           </a:xfrm>
           <a:prstGeom prst="roundRect">
             <a:avLst>
-              <a:gd name="adj" fmla="val 5455"/>
+              <a:gd name="adj" fmla="val 6977"/>
+            </a:avLst>
+          </a:prstGeom>
+          <a:solidFill>
+            <a:srgbClr val="1C2536"/>
+          </a:solidFill>
+          <a:ln w="12700">
+            <a:solidFill>
+              <a:srgbClr val="1C2536"/>
+            </a:solidFill>
+            <a:prstDash val="solid"/>
+          </a:ln>
+        </p:spPr>
+      </p:sp>
+      <p:sp>
+        <p:nvSpPr>
+          <p:cNvPr id="11" name="Text 9"/>
+          <p:cNvSpPr/>
+          <p:nvPr/>
+        </p:nvSpPr>
+        <p:spPr>
+          <a:xfrm>
+            <a:off x="896112" y="4224528"/>
+            <a:ext cx="10369296" cy="365760"/>
+          </a:xfrm>
+          <a:prstGeom prst="rect">
+            <a:avLst/>
+          </a:prstGeom>
+          <a:noFill/>
+          <a:ln/>
+        </p:spPr>
+        <p:txBody>
+          <a:bodyPr wrap="square" lIns="0" tIns="0" rIns="0" bIns="0" rtlCol="0" anchor="t"/>
+          <a:lstStyle/>
+          <a:p>
+            <a:pPr indent="0" marL="0">
+              <a:buNone/>
+            </a:pPr>
+            <a:r>
+              <a:rPr lang="en-US" sz="1500" b="1" dirty="0">
+                <a:solidFill>
+                  <a:srgbClr val="FFFFFF"/>
+                </a:solidFill>
+                <a:latin typeface="Arial" pitchFamily="34" charset="0"/>
+                <a:ea typeface="Arial" pitchFamily="34" charset="-122"/>
+                <a:cs typeface="Arial" pitchFamily="34" charset="-120"/>
+              </a:rPr>
+              <a:t>The comparison that makes it land</a:t>
+            </a:r>
+            <a:endParaRPr lang="en-US" sz="1500" dirty="0"/>
+          </a:p>
+        </p:txBody>
+      </p:sp>
+      <p:sp>
+        <p:nvSpPr>
+          <p:cNvPr id="12" name="Text 10"/>
+          <p:cNvSpPr/>
+          <p:nvPr/>
+        </p:nvSpPr>
+        <p:spPr>
+          <a:xfrm>
+            <a:off x="896112" y="4645152"/>
+            <a:ext cx="10369296" cy="868680"/>
+          </a:xfrm>
+          <a:prstGeom prst="rect">
+            <a:avLst/>
+          </a:prstGeom>
+          <a:noFill/>
+          <a:ln/>
+        </p:spPr>
+        <p:txBody>
+          <a:bodyPr wrap="square" lIns="0" tIns="0" rIns="0" bIns="0" rtlCol="0" anchor="t"/>
+          <a:lstStyle/>
+          <a:p>
+            <a:pPr indent="0" marL="0">
+              <a:buNone/>
+            </a:pPr>
+            <a:r>
+              <a:rPr lang="en-US" sz="1450" dirty="0">
+                <a:solidFill>
+                  <a:srgbClr val="E8ECF4"/>
+                </a:solidFill>
+                <a:latin typeface="Calibri" pitchFamily="34" charset="0"/>
+                <a:ea typeface="Calibri" pitchFamily="34" charset="-122"/>
+                <a:cs typeface="Calibri" pitchFamily="34" charset="-120"/>
+              </a:rPr>
+              <a:t>A year earlier, Q1 FY2026 brought in $2.31B and earned $1.22 a share on a non-GAAP basis. The guided quarter is roughly four and a half times the revenue — and more than thirty times the earnings.</a:t>
+            </a:r>
+            <a:endParaRPr lang="en-US" sz="1450" dirty="0"/>
+          </a:p>
+        </p:txBody>
+      </p:sp>
+      <p:sp>
+        <p:nvSpPr>
+          <p:cNvPr id="13" name="Text 11"/>
+          <p:cNvSpPr/>
+          <p:nvPr/>
+        </p:nvSpPr>
+        <p:spPr>
+          <a:xfrm>
+            <a:off x="566928" y="6382512"/>
+            <a:ext cx="11027664" cy="274320"/>
+          </a:xfrm>
+          <a:prstGeom prst="rect">
+            <a:avLst/>
+          </a:prstGeom>
+          <a:noFill/>
+          <a:ln/>
+        </p:spPr>
+        <p:txBody>
+          <a:bodyPr wrap="square" lIns="0" tIns="0" rIns="0" bIns="0" rtlCol="0" anchor="ctr"/>
+          <a:lstStyle/>
+          <a:p>
+            <a:pPr indent="0" marL="0">
+              <a:buNone/>
+            </a:pPr>
+            <a:r>
+              <a:rPr lang="en-US" sz="950" dirty="0">
+                <a:solidFill>
+                  <a:srgbClr val="5B657A"/>
+                </a:solidFill>
+                <a:latin typeface="Calibri" pitchFamily="34" charset="0"/>
+                <a:ea typeface="Calibri" pitchFamily="34" charset="-122"/>
+                <a:cs typeface="Calibri" pitchFamily="34" charset="-120"/>
+              </a:rPr>
+              <a:t>Guidance issued with Q4 FY2026 results, 5 August 2026. Guidance is management's estimate, not a result.</a:t>
+            </a:r>
+            <a:endParaRPr lang="en-US" sz="950" dirty="0"/>
+          </a:p>
+        </p:txBody>
+      </p:sp>
+    </p:spTree>
+  </p:cSld>
+  <p:clrMapOvr>
+    <a:masterClrMapping/>
+  </p:clrMapOvr>
+  <p:transition spd="med" advClick="1">
+    <p:fade/>
+  </p:transition>
+</p:sld>
+</file>
+
+<file path=ppt/slides/slide13.xml><?xml version="1.0" encoding="utf-8"?>
+<p:sld xmlns:a="http://schemas.openxmlformats.org/drawingml/2006/main" xmlns:r="http://schemas.openxmlformats.org/officeDocument/2006/relationships" xmlns:p="http://schemas.openxmlformats.org/presentationml/2006/main">
+  <p:cSld name="Slide 13">
+    <p:bg>
+      <p:bgPr>
+        <a:solidFill>
+          <a:srgbClr val="0B0E14"/>
+        </a:solidFill>
+      </p:bgPr>
+    </p:bg>
+    <p:spTree>
+      <p:nvGrpSpPr>
+        <p:cNvPr id="1" name=""/>
+        <p:cNvGrpSpPr/>
+        <p:nvPr/>
+      </p:nvGrpSpPr>
+      <p:grpSpPr>
+        <a:xfrm>
+          <a:off x="0" y="0"/>
+          <a:ext cx="0" cy="0"/>
+          <a:chOff x="0" y="0"/>
+          <a:chExt cx="0" cy="0"/>
+        </a:xfrm>
+      </p:grpSpPr>
+      <p:sp>
+        <p:nvSpPr>
+          <p:cNvPr id="2" name="Text 0"/>
+          <p:cNvSpPr/>
+          <p:nvPr/>
+        </p:nvSpPr>
+        <p:spPr>
+          <a:xfrm>
+            <a:off x="566928" y="475488"/>
+            <a:ext cx="11027664" cy="566928"/>
+          </a:xfrm>
+          <a:prstGeom prst="rect">
+            <a:avLst/>
+          </a:prstGeom>
+          <a:noFill/>
+          <a:ln/>
+        </p:spPr>
+        <p:txBody>
+          <a:bodyPr wrap="square" lIns="0" tIns="0" rIns="0" bIns="0" rtlCol="0" anchor="ctr"/>
+          <a:lstStyle/>
+          <a:p>
+            <a:pPr indent="0" marL="0">
+              <a:buNone/>
+            </a:pPr>
+            <a:r>
+              <a:rPr lang="en-US" sz="3400" b="1" dirty="0">
+                <a:solidFill>
+                  <a:srgbClr val="FFFFFF"/>
+                </a:solidFill>
+                <a:latin typeface="Arial" pitchFamily="34" charset="0"/>
+                <a:ea typeface="Arial" pitchFamily="34" charset="-122"/>
+                <a:cs typeface="Arial" pitchFamily="34" charset="-120"/>
+              </a:rPr>
+              <a:t>What it trades at</a:t>
+            </a:r>
+            <a:endParaRPr lang="en-US" sz="3400" dirty="0"/>
+          </a:p>
+        </p:txBody>
+      </p:sp>
+      <p:sp>
+        <p:nvSpPr>
+          <p:cNvPr id="3" name="Text 1"/>
+          <p:cNvSpPr/>
+          <p:nvPr/>
+        </p:nvSpPr>
+        <p:spPr>
+          <a:xfrm>
+            <a:off x="566928" y="1060704"/>
+            <a:ext cx="11027664" cy="365760"/>
+          </a:xfrm>
+          <a:prstGeom prst="rect">
+            <a:avLst/>
+          </a:prstGeom>
+          <a:noFill/>
+          <a:ln/>
+        </p:spPr>
+        <p:txBody>
+          <a:bodyPr wrap="square" lIns="0" tIns="0" rIns="0" bIns="0" rtlCol="0" anchor="ctr"/>
+          <a:lstStyle/>
+          <a:p>
+            <a:pPr indent="0" marL="0">
+              <a:buNone/>
+            </a:pPr>
+            <a:r>
+              <a:rPr lang="en-US" sz="1500" dirty="0">
+                <a:solidFill>
+                  <a:srgbClr val="8B95A9"/>
+                </a:solidFill>
+                <a:latin typeface="Calibri" pitchFamily="34" charset="0"/>
+                <a:ea typeface="Calibri" pitchFamily="34" charset="-122"/>
+                <a:cs typeface="Calibri" pitchFamily="34" charset="-120"/>
+              </a:rPr>
+              <a:t>After a 30% fall from the high</a:t>
+            </a:r>
+            <a:endParaRPr lang="en-US" sz="1500" dirty="0"/>
+          </a:p>
+        </p:txBody>
+      </p:sp>
+      <p:sp>
+        <p:nvSpPr>
+          <p:cNvPr id="4" name="Shape 2"/>
+          <p:cNvSpPr/>
+          <p:nvPr/>
+        </p:nvSpPr>
+        <p:spPr>
+          <a:xfrm>
+            <a:off x="566928" y="1737360"/>
+            <a:ext cx="2564892" cy="1572768"/>
+          </a:xfrm>
+          <a:prstGeom prst="roundRect">
+            <a:avLst>
+              <a:gd name="adj" fmla="val 6977"/>
             </a:avLst>
           </a:prstGeom>
           <a:solidFill>
@@ -4937,14 +4856,14 @@
       </p:sp>
       <p:sp>
         <p:nvSpPr>
-          <p:cNvPr id="10" name="Text 8"/>
-          <p:cNvSpPr/>
-          <p:nvPr/>
-        </p:nvSpPr>
-        <p:spPr>
-          <a:xfrm>
-            <a:off x="8333232" y="2478024"/>
-            <a:ext cx="3041904" cy="925373"/>
+          <p:cNvPr id="5" name="Text 3"/>
+          <p:cNvSpPr/>
+          <p:nvPr/>
+        </p:nvSpPr>
+        <p:spPr>
+          <a:xfrm>
+            <a:off x="786384" y="1883664"/>
+            <a:ext cx="2125980" cy="723473"/>
           </a:xfrm>
           <a:prstGeom prst="rect">
             <a:avLst/>
@@ -4962,13 +4881,13 @@
             <a:r>
               <a:rPr lang="en-US" sz="4000" b="1" dirty="0">
                 <a:solidFill>
-                  <a:srgbClr val="F87171"/>
+                  <a:srgbClr val="4ADE80"/>
                 </a:solidFill>
                 <a:latin typeface="Arial" pitchFamily="34" charset="0"/>
                 <a:ea typeface="Arial" pitchFamily="34" charset="-122"/>
                 <a:cs typeface="Arial" pitchFamily="34" charset="-120"/>
               </a:rPr>
-              <a:t>−30%</a:t>
+              <a:t>5.9x</a:t>
             </a:r>
             <a:endParaRPr lang="en-US" sz="4000" dirty="0"/>
           </a:p>
@@ -4976,14 +4895,14 @@
       </p:sp>
       <p:sp>
         <p:nvSpPr>
-          <p:cNvPr id="11" name="Text 9"/>
-          <p:cNvSpPr/>
-          <p:nvPr/>
-        </p:nvSpPr>
-        <p:spPr>
-          <a:xfrm>
-            <a:off x="8333232" y="3619195"/>
-            <a:ext cx="3041904" cy="643738"/>
+          <p:cNvPr id="6" name="Text 4"/>
+          <p:cNvSpPr/>
+          <p:nvPr/>
+        </p:nvSpPr>
+        <p:spPr>
+          <a:xfrm>
+            <a:off x="786384" y="2743932"/>
+            <a:ext cx="2125980" cy="503286"/>
           </a:xfrm>
           <a:prstGeom prst="rect">
             <a:avLst/>
@@ -5007,7 +4926,7 @@
                 <a:ea typeface="Calibri" pitchFamily="34" charset="-122"/>
                 <a:cs typeface="Calibri" pitchFamily="34" charset="-120"/>
               </a:rPr>
-              <a:t>The share price, from its June high</a:t>
+              <a:t>Forward price / earnings</a:t>
             </a:r>
             <a:endParaRPr lang="en-US" sz="1200" dirty="0"/>
           </a:p>
@@ -5015,14 +4934,41 @@
       </p:sp>
       <p:sp>
         <p:nvSpPr>
-          <p:cNvPr id="12" name="Text 10"/>
-          <p:cNvSpPr/>
-          <p:nvPr/>
-        </p:nvSpPr>
-        <p:spPr>
-          <a:xfrm>
-            <a:off x="566928" y="4709160"/>
-            <a:ext cx="11027664" cy="914400"/>
+          <p:cNvPr id="7" name="Shape 5"/>
+          <p:cNvSpPr/>
+          <p:nvPr/>
+        </p:nvSpPr>
+        <p:spPr>
+          <a:xfrm>
+            <a:off x="3387852" y="1737360"/>
+            <a:ext cx="2564892" cy="1572768"/>
+          </a:xfrm>
+          <a:prstGeom prst="roundRect">
+            <a:avLst>
+              <a:gd name="adj" fmla="val 6977"/>
+            </a:avLst>
+          </a:prstGeom>
+          <a:solidFill>
+            <a:srgbClr val="151C2A"/>
+          </a:solidFill>
+          <a:ln w="12700">
+            <a:solidFill>
+              <a:srgbClr val="151C2A"/>
+            </a:solidFill>
+            <a:prstDash val="solid"/>
+          </a:ln>
+        </p:spPr>
+      </p:sp>
+      <p:sp>
+        <p:nvSpPr>
+          <p:cNvPr id="8" name="Text 6"/>
+          <p:cNvSpPr/>
+          <p:nvPr/>
+        </p:nvSpPr>
+        <p:spPr>
+          <a:xfrm>
+            <a:off x="3607308" y="1883664"/>
+            <a:ext cx="2125980" cy="723473"/>
           </a:xfrm>
           <a:prstGeom prst="rect">
             <a:avLst/>
@@ -5038,30 +4984,96 @@
               <a:buNone/>
             </a:pPr>
             <a:r>
-              <a:rPr lang="en-US" sz="1700" dirty="0">
-                <a:solidFill>
-                  <a:srgbClr val="E8ECF4"/>
+              <a:rPr lang="en-US" sz="4000" b="1" dirty="0">
+                <a:solidFill>
+                  <a:srgbClr val="4ADE80"/>
+                </a:solidFill>
+                <a:latin typeface="Arial" pitchFamily="34" charset="0"/>
+                <a:ea typeface="Arial" pitchFamily="34" charset="-122"/>
+                <a:cs typeface="Arial" pitchFamily="34" charset="-120"/>
+              </a:rPr>
+              <a:t>0.14</a:t>
+            </a:r>
+            <a:endParaRPr lang="en-US" sz="4000" dirty="0"/>
+          </a:p>
+        </p:txBody>
+      </p:sp>
+      <p:sp>
+        <p:nvSpPr>
+          <p:cNvPr id="9" name="Text 7"/>
+          <p:cNvSpPr/>
+          <p:nvPr/>
+        </p:nvSpPr>
+        <p:spPr>
+          <a:xfrm>
+            <a:off x="3607308" y="2743932"/>
+            <a:ext cx="2125980" cy="503286"/>
+          </a:xfrm>
+          <a:prstGeom prst="rect">
+            <a:avLst/>
+          </a:prstGeom>
+          <a:noFill/>
+          <a:ln/>
+        </p:spPr>
+        <p:txBody>
+          <a:bodyPr wrap="square" lIns="0" tIns="0" rIns="0" bIns="0" rtlCol="0" anchor="t"/>
+          <a:lstStyle/>
+          <a:p>
+            <a:pPr indent="0" marL="0">
+              <a:buNone/>
+            </a:pPr>
+            <a:r>
+              <a:rPr lang="en-US" sz="1200" dirty="0">
+                <a:solidFill>
+                  <a:srgbClr val="8B95A9"/>
                 </a:solidFill>
                 <a:latin typeface="Calibri" pitchFamily="34" charset="0"/>
                 <a:ea typeface="Calibri" pitchFamily="34" charset="-122"/>
                 <a:cs typeface="Calibri" pitchFamily="34" charset="-120"/>
               </a:rPr>
-              <a:t>The business and the share price have been telling different stories since June. Which one turns out to be right depends entirely on whether 84.6% is a new normal or a peak.</a:t>
-            </a:r>
-            <a:endParaRPr lang="en-US" sz="1700" dirty="0"/>
-          </a:p>
-        </p:txBody>
-      </p:sp>
-      <p:sp>
-        <p:nvSpPr>
-          <p:cNvPr id="13" name="Text 11"/>
-          <p:cNvSpPr/>
-          <p:nvPr/>
-        </p:nvSpPr>
-        <p:spPr>
-          <a:xfrm>
-            <a:off x="566928" y="6382512"/>
-            <a:ext cx="11027664" cy="274320"/>
+              <a:t>PEG ratio</a:t>
+            </a:r>
+            <a:endParaRPr lang="en-US" sz="1200" dirty="0"/>
+          </a:p>
+        </p:txBody>
+      </p:sp>
+      <p:sp>
+        <p:nvSpPr>
+          <p:cNvPr id="10" name="Shape 8"/>
+          <p:cNvSpPr/>
+          <p:nvPr/>
+        </p:nvSpPr>
+        <p:spPr>
+          <a:xfrm>
+            <a:off x="6208776" y="1737360"/>
+            <a:ext cx="2564892" cy="1572768"/>
+          </a:xfrm>
+          <a:prstGeom prst="roundRect">
+            <a:avLst>
+              <a:gd name="adj" fmla="val 6977"/>
+            </a:avLst>
+          </a:prstGeom>
+          <a:solidFill>
+            <a:srgbClr val="151C2A"/>
+          </a:solidFill>
+          <a:ln w="12700">
+            <a:solidFill>
+              <a:srgbClr val="151C2A"/>
+            </a:solidFill>
+            <a:prstDash val="solid"/>
+          </a:ln>
+        </p:spPr>
+      </p:sp>
+      <p:sp>
+        <p:nvSpPr>
+          <p:cNvPr id="11" name="Text 9"/>
+          <p:cNvSpPr/>
+          <p:nvPr/>
+        </p:nvSpPr>
+        <p:spPr>
+          <a:xfrm>
+            <a:off x="6428232" y="1883664"/>
+            <a:ext cx="2125980" cy="723473"/>
           </a:xfrm>
           <a:prstGeom prst="rect">
             <a:avLst/>
@@ -5077,15 +5089,450 @@
               <a:buNone/>
             </a:pPr>
             <a:r>
-              <a:rPr lang="en-US" sz="950" dirty="0">
-                <a:solidFill>
-                  <a:srgbClr val="5B657A"/>
+              <a:rPr lang="en-US" sz="4000" b="1" dirty="0">
+                <a:solidFill>
+                  <a:srgbClr val="3B82F6"/>
+                </a:solidFill>
+                <a:latin typeface="Arial" pitchFamily="34" charset="0"/>
+                <a:ea typeface="Arial" pitchFamily="34" charset="-122"/>
+                <a:cs typeface="Arial" pitchFamily="34" charset="-120"/>
+              </a:rPr>
+              <a:t>$6.54B</a:t>
+            </a:r>
+            <a:endParaRPr lang="en-US" sz="4000" dirty="0"/>
+          </a:p>
+        </p:txBody>
+      </p:sp>
+      <p:sp>
+        <p:nvSpPr>
+          <p:cNvPr id="12" name="Text 10"/>
+          <p:cNvSpPr/>
+          <p:nvPr/>
+        </p:nvSpPr>
+        <p:spPr>
+          <a:xfrm>
+            <a:off x="6428232" y="2743932"/>
+            <a:ext cx="2125980" cy="503286"/>
+          </a:xfrm>
+          <a:prstGeom prst="rect">
+            <a:avLst/>
+          </a:prstGeom>
+          <a:noFill/>
+          <a:ln/>
+        </p:spPr>
+        <p:txBody>
+          <a:bodyPr wrap="square" lIns="0" tIns="0" rIns="0" bIns="0" rtlCol="0" anchor="t"/>
+          <a:lstStyle/>
+          <a:p>
+            <a:pPr indent="0" marL="0">
+              <a:buNone/>
+            </a:pPr>
+            <a:r>
+              <a:rPr lang="en-US" sz="1200" dirty="0">
+                <a:solidFill>
+                  <a:srgbClr val="8B95A9"/>
                 </a:solidFill>
                 <a:latin typeface="Calibri" pitchFamily="34" charset="0"/>
                 <a:ea typeface="Calibri" pitchFamily="34" charset="-122"/>
                 <a:cs typeface="Calibri" pitchFamily="34" charset="-120"/>
               </a:rPr>
-              <a:t>Sandisk FY2026 results, reported 5 August 2026. Not investment advice.</a:t>
+              <a:t>Net cash — about $43.89 a share</a:t>
+            </a:r>
+            <a:endParaRPr lang="en-US" sz="1200" dirty="0"/>
+          </a:p>
+        </p:txBody>
+      </p:sp>
+      <p:sp>
+        <p:nvSpPr>
+          <p:cNvPr id="13" name="Shape 11"/>
+          <p:cNvSpPr/>
+          <p:nvPr/>
+        </p:nvSpPr>
+        <p:spPr>
+          <a:xfrm>
+            <a:off x="9029700" y="1737360"/>
+            <a:ext cx="2564892" cy="1572768"/>
+          </a:xfrm>
+          <a:prstGeom prst="roundRect">
+            <a:avLst>
+              <a:gd name="adj" fmla="val 6977"/>
+            </a:avLst>
+          </a:prstGeom>
+          <a:solidFill>
+            <a:srgbClr val="151C2A"/>
+          </a:solidFill>
+          <a:ln w="12700">
+            <a:solidFill>
+              <a:srgbClr val="151C2A"/>
+            </a:solidFill>
+            <a:prstDash val="solid"/>
+          </a:ln>
+        </p:spPr>
+      </p:sp>
+      <p:sp>
+        <p:nvSpPr>
+          <p:cNvPr id="14" name="Text 12"/>
+          <p:cNvSpPr/>
+          <p:nvPr/>
+        </p:nvSpPr>
+        <p:spPr>
+          <a:xfrm>
+            <a:off x="9249156" y="1883664"/>
+            <a:ext cx="2125980" cy="723473"/>
+          </a:xfrm>
+          <a:prstGeom prst="rect">
+            <a:avLst/>
+          </a:prstGeom>
+          <a:noFill/>
+          <a:ln/>
+        </p:spPr>
+        <p:txBody>
+          <a:bodyPr wrap="square" lIns="0" tIns="0" rIns="0" bIns="0" rtlCol="0" anchor="ctr"/>
+          <a:lstStyle/>
+          <a:p>
+            <a:pPr indent="0" marL="0">
+              <a:buNone/>
+            </a:pPr>
+            <a:r>
+              <a:rPr lang="en-US" sz="4000" b="1" dirty="0">
+                <a:solidFill>
+                  <a:srgbClr val="E8ECF4"/>
+                </a:solidFill>
+                <a:latin typeface="Arial" pitchFamily="34" charset="0"/>
+                <a:ea typeface="Arial" pitchFamily="34" charset="-122"/>
+                <a:cs typeface="Arial" pitchFamily="34" charset="-120"/>
+              </a:rPr>
+              <a:t>149M</a:t>
+            </a:r>
+            <a:endParaRPr lang="en-US" sz="4000" dirty="0"/>
+          </a:p>
+        </p:txBody>
+      </p:sp>
+      <p:sp>
+        <p:nvSpPr>
+          <p:cNvPr id="15" name="Text 13"/>
+          <p:cNvSpPr/>
+          <p:nvPr/>
+        </p:nvSpPr>
+        <p:spPr>
+          <a:xfrm>
+            <a:off x="9249156" y="2743932"/>
+            <a:ext cx="2125980" cy="503286"/>
+          </a:xfrm>
+          <a:prstGeom prst="rect">
+            <a:avLst/>
+          </a:prstGeom>
+          <a:noFill/>
+          <a:ln/>
+        </p:spPr>
+        <p:txBody>
+          <a:bodyPr wrap="square" lIns="0" tIns="0" rIns="0" bIns="0" rtlCol="0" anchor="t"/>
+          <a:lstStyle/>
+          <a:p>
+            <a:pPr indent="0" marL="0">
+              <a:buNone/>
+            </a:pPr>
+            <a:r>
+              <a:rPr lang="en-US" sz="1200" dirty="0">
+                <a:solidFill>
+                  <a:srgbClr val="8B95A9"/>
+                </a:solidFill>
+                <a:latin typeface="Calibri" pitchFamily="34" charset="0"/>
+                <a:ea typeface="Calibri" pitchFamily="34" charset="-122"/>
+                <a:cs typeface="Calibri" pitchFamily="34" charset="-120"/>
+              </a:rPr>
+              <a:t>Shares outstanding</a:t>
+            </a:r>
+            <a:endParaRPr lang="en-US" sz="1200" dirty="0"/>
+          </a:p>
+        </p:txBody>
+      </p:sp>
+      <p:sp>
+        <p:nvSpPr>
+          <p:cNvPr id="16" name="Shape 14"/>
+          <p:cNvSpPr/>
+          <p:nvPr/>
+        </p:nvSpPr>
+        <p:spPr>
+          <a:xfrm>
+            <a:off x="566928" y="3401568"/>
+            <a:ext cx="5486400" cy="2212848"/>
+          </a:xfrm>
+          <a:prstGeom prst="roundRect">
+            <a:avLst>
+              <a:gd name="adj" fmla="val 4959"/>
+            </a:avLst>
+          </a:prstGeom>
+          <a:solidFill>
+            <a:srgbClr val="151C2A"/>
+          </a:solidFill>
+          <a:ln w="12700">
+            <a:solidFill>
+              <a:srgbClr val="151C2A"/>
+            </a:solidFill>
+            <a:prstDash val="solid"/>
+          </a:ln>
+        </p:spPr>
+      </p:sp>
+      <p:sp>
+        <p:nvSpPr>
+          <p:cNvPr id="17" name="Text 15"/>
+          <p:cNvSpPr/>
+          <p:nvPr/>
+        </p:nvSpPr>
+        <p:spPr>
+          <a:xfrm>
+            <a:off x="859536" y="3621024"/>
+            <a:ext cx="4901184" cy="365760"/>
+          </a:xfrm>
+          <a:prstGeom prst="rect">
+            <a:avLst/>
+          </a:prstGeom>
+          <a:noFill/>
+          <a:ln/>
+        </p:spPr>
+        <p:txBody>
+          <a:bodyPr wrap="square" lIns="0" tIns="0" rIns="0" bIns="0" rtlCol="0" anchor="t"/>
+          <a:lstStyle/>
+          <a:p>
+            <a:pPr indent="0" marL="0">
+              <a:buNone/>
+            </a:pPr>
+            <a:r>
+              <a:rPr lang="en-US" sz="1600" b="1" dirty="0">
+                <a:solidFill>
+                  <a:srgbClr val="FFFFFF"/>
+                </a:solidFill>
+                <a:latin typeface="Arial" pitchFamily="34" charset="0"/>
+                <a:ea typeface="Arial" pitchFamily="34" charset="-122"/>
+                <a:cs typeface="Arial" pitchFamily="34" charset="-120"/>
+              </a:rPr>
+              <a:t>What the sell side says</a:t>
+            </a:r>
+            <a:endParaRPr lang="en-US" sz="1600" dirty="0"/>
+          </a:p>
+        </p:txBody>
+      </p:sp>
+      <p:sp>
+        <p:nvSpPr>
+          <p:cNvPr id="18" name="Text 16"/>
+          <p:cNvSpPr/>
+          <p:nvPr/>
+        </p:nvSpPr>
+        <p:spPr>
+          <a:xfrm>
+            <a:off x="859536" y="4041648"/>
+            <a:ext cx="4901184" cy="658368"/>
+          </a:xfrm>
+          <a:prstGeom prst="rect">
+            <a:avLst/>
+          </a:prstGeom>
+          <a:noFill/>
+          <a:ln/>
+        </p:spPr>
+        <p:txBody>
+          <a:bodyPr wrap="square" lIns="0" tIns="0" rIns="0" bIns="0" rtlCol="0" anchor="ctr"/>
+          <a:lstStyle/>
+          <a:p>
+            <a:pPr indent="0" marL="0">
+              <a:buNone/>
+            </a:pPr>
+            <a:r>
+              <a:rPr lang="en-US" sz="3600" b="1" dirty="0">
+                <a:solidFill>
+                  <a:srgbClr val="4ADE80"/>
+                </a:solidFill>
+                <a:latin typeface="Arial" pitchFamily="34" charset="0"/>
+                <a:ea typeface="Arial" pitchFamily="34" charset="-122"/>
+                <a:cs typeface="Arial" pitchFamily="34" charset="-120"/>
+              </a:rPr>
+              <a:t>$2,053.5</a:t>
+            </a:r>
+            <a:endParaRPr lang="en-US" sz="3600" dirty="0"/>
+          </a:p>
+        </p:txBody>
+      </p:sp>
+      <p:sp>
+        <p:nvSpPr>
+          <p:cNvPr id="19" name="Text 17"/>
+          <p:cNvSpPr/>
+          <p:nvPr/>
+        </p:nvSpPr>
+        <p:spPr>
+          <a:xfrm>
+            <a:off x="859536" y="4791456"/>
+            <a:ext cx="4901184" cy="640080"/>
+          </a:xfrm>
+          <a:prstGeom prst="rect">
+            <a:avLst/>
+          </a:prstGeom>
+          <a:noFill/>
+          <a:ln/>
+        </p:spPr>
+        <p:txBody>
+          <a:bodyPr wrap="square" lIns="0" tIns="0" rIns="0" bIns="0" rtlCol="0" anchor="t"/>
+          <a:lstStyle/>
+          <a:p>
+            <a:pPr indent="0" marL="0">
+              <a:buNone/>
+            </a:pPr>
+            <a:r>
+              <a:rPr lang="en-US" sz="1300" dirty="0">
+                <a:solidFill>
+                  <a:srgbClr val="E8ECF4"/>
+                </a:solidFill>
+                <a:latin typeface="Calibri" pitchFamily="34" charset="0"/>
+                <a:ea typeface="Calibri" pitchFamily="34" charset="-122"/>
+                <a:cs typeface="Calibri" pitchFamily="34" charset="-120"/>
+              </a:rPr>
+              <a:t>Average 12-month target across 23 analysts, consensus rating "Strong Buy".</a:t>
+            </a:r>
+            <a:endParaRPr lang="en-US" sz="1300" dirty="0"/>
+          </a:p>
+        </p:txBody>
+      </p:sp>
+      <p:sp>
+        <p:nvSpPr>
+          <p:cNvPr id="20" name="Shape 18"/>
+          <p:cNvSpPr/>
+          <p:nvPr/>
+        </p:nvSpPr>
+        <p:spPr>
+          <a:xfrm>
+            <a:off x="6382512" y="3401568"/>
+            <a:ext cx="5212080" cy="2212848"/>
+          </a:xfrm>
+          <a:prstGeom prst="roundRect">
+            <a:avLst>
+              <a:gd name="adj" fmla="val 4959"/>
+            </a:avLst>
+          </a:prstGeom>
+          <a:solidFill>
+            <a:srgbClr val="1C2536"/>
+          </a:solidFill>
+          <a:ln w="12700">
+            <a:solidFill>
+              <a:srgbClr val="1C2536"/>
+            </a:solidFill>
+            <a:prstDash val="solid"/>
+          </a:ln>
+        </p:spPr>
+      </p:sp>
+      <p:sp>
+        <p:nvSpPr>
+          <p:cNvPr id="21" name="Text 19"/>
+          <p:cNvSpPr/>
+          <p:nvPr/>
+        </p:nvSpPr>
+        <p:spPr>
+          <a:xfrm>
+            <a:off x="6675120" y="3621024"/>
+            <a:ext cx="4626864" cy="365760"/>
+          </a:xfrm>
+          <a:prstGeom prst="rect">
+            <a:avLst/>
+          </a:prstGeom>
+          <a:noFill/>
+          <a:ln/>
+        </p:spPr>
+        <p:txBody>
+          <a:bodyPr wrap="square" lIns="0" tIns="0" rIns="0" bIns="0" rtlCol="0" anchor="t"/>
+          <a:lstStyle/>
+          <a:p>
+            <a:pPr indent="0" marL="0">
+              <a:buNone/>
+            </a:pPr>
+            <a:r>
+              <a:rPr lang="en-US" sz="1600" b="1" dirty="0">
+                <a:solidFill>
+                  <a:srgbClr val="FFFFFF"/>
+                </a:solidFill>
+                <a:latin typeface="Arial" pitchFamily="34" charset="0"/>
+                <a:ea typeface="Arial" pitchFamily="34" charset="-122"/>
+                <a:cs typeface="Arial" pitchFamily="34" charset="-120"/>
+              </a:rPr>
+              <a:t>The obvious question</a:t>
+            </a:r>
+            <a:endParaRPr lang="en-US" sz="1600" dirty="0"/>
+          </a:p>
+        </p:txBody>
+      </p:sp>
+      <p:sp>
+        <p:nvSpPr>
+          <p:cNvPr id="22" name="Text 20"/>
+          <p:cNvSpPr/>
+          <p:nvPr/>
+        </p:nvSpPr>
+        <p:spPr>
+          <a:xfrm>
+            <a:off x="6675120" y="4078224"/>
+            <a:ext cx="4626864" cy="1371600"/>
+          </a:xfrm>
+          <a:prstGeom prst="rect">
+            <a:avLst/>
+          </a:prstGeom>
+          <a:noFill/>
+          <a:ln/>
+        </p:spPr>
+        <p:txBody>
+          <a:bodyPr wrap="square" lIns="0" tIns="0" rIns="0" bIns="0" rtlCol="0" anchor="t"/>
+          <a:lstStyle/>
+          <a:p>
+            <a:pPr indent="0" marL="0">
+              <a:lnSpc>
+                <a:spcPts val="1800"/>
+              </a:lnSpc>
+              <a:buNone/>
+            </a:pPr>
+            <a:r>
+              <a:rPr lang="en-US" sz="1350" dirty="0">
+                <a:solidFill>
+                  <a:srgbClr val="E8ECF4"/>
+                </a:solidFill>
+                <a:latin typeface="Calibri" pitchFamily="34" charset="0"/>
+                <a:ea typeface="Calibri" pitchFamily="34" charset="-122"/>
+                <a:cs typeface="Calibri" pitchFamily="34" charset="-120"/>
+              </a:rPr>
+              <a:t>A single-digit forward multiple usually means the market does not believe the earnings are repeatable. For a memory company at a cyclical peak, that is a reasonable thing for the market to think — and the thing to argue about.</a:t>
+            </a:r>
+            <a:endParaRPr lang="en-US" sz="1350" dirty="0"/>
+          </a:p>
+        </p:txBody>
+      </p:sp>
+      <p:sp>
+        <p:nvSpPr>
+          <p:cNvPr id="23" name="Text 21"/>
+          <p:cNvSpPr/>
+          <p:nvPr/>
+        </p:nvSpPr>
+        <p:spPr>
+          <a:xfrm>
+            <a:off x="566928" y="6382512"/>
+            <a:ext cx="11027664" cy="274320"/>
+          </a:xfrm>
+          <a:prstGeom prst="rect">
+            <a:avLst/>
+          </a:prstGeom>
+          <a:noFill/>
+          <a:ln/>
+        </p:spPr>
+        <p:txBody>
+          <a:bodyPr wrap="square" lIns="0" tIns="0" rIns="0" bIns="0" rtlCol="0" anchor="ctr"/>
+          <a:lstStyle/>
+          <a:p>
+            <a:pPr indent="0" marL="0">
+              <a:buNone/>
+            </a:pPr>
+            <a:r>
+              <a:rPr lang="en-US" sz="950" dirty="0">
+                <a:solidFill>
+                  <a:srgbClr val="5B657A"/>
+                </a:solidFill>
+                <a:latin typeface="Calibri" pitchFamily="34" charset="0"/>
+                <a:ea typeface="Calibri" pitchFamily="34" charset="-122"/>
+                <a:cs typeface="Calibri" pitchFamily="34" charset="-120"/>
+              </a:rPr>
+              <a:t>Valuation metrics as reported in mid-August 2026; market capitalisation was quoted between $180B and $188B.</a:t>
             </a:r>
             <a:endParaRPr lang="en-US" sz="950" dirty="0"/>
           </a:p>
@@ -5096,6 +5543,1044 @@
   <p:clrMapOvr>
     <a:masterClrMapping/>
   </p:clrMapOvr>
+  <p:transition spd="med" advClick="1">
+    <p:fade/>
+  </p:transition>
+</p:sld>
+</file>
+
+<file path=ppt/slides/slide14.xml><?xml version="1.0" encoding="utf-8"?>
+<p:sld xmlns:a="http://schemas.openxmlformats.org/drawingml/2006/main" xmlns:r="http://schemas.openxmlformats.org/officeDocument/2006/relationships" xmlns:p="http://schemas.openxmlformats.org/presentationml/2006/main">
+  <p:cSld name="Slide 14">
+    <p:bg>
+      <p:bgPr>
+        <a:solidFill>
+          <a:srgbClr val="0B0E14"/>
+        </a:solidFill>
+      </p:bgPr>
+    </p:bg>
+    <p:spTree>
+      <p:nvGrpSpPr>
+        <p:cNvPr id="1" name=""/>
+        <p:cNvGrpSpPr/>
+        <p:nvPr/>
+      </p:nvGrpSpPr>
+      <p:grpSpPr>
+        <a:xfrm>
+          <a:off x="0" y="0"/>
+          <a:ext cx="0" cy="0"/>
+          <a:chOff x="0" y="0"/>
+          <a:chExt cx="0" cy="0"/>
+        </a:xfrm>
+      </p:grpSpPr>
+      <p:sp>
+        <p:nvSpPr>
+          <p:cNvPr id="2" name="Text 0"/>
+          <p:cNvSpPr/>
+          <p:nvPr/>
+        </p:nvSpPr>
+        <p:spPr>
+          <a:xfrm>
+            <a:off x="566928" y="475488"/>
+            <a:ext cx="11027664" cy="566928"/>
+          </a:xfrm>
+          <a:prstGeom prst="rect">
+            <a:avLst/>
+          </a:prstGeom>
+          <a:noFill/>
+          <a:ln/>
+        </p:spPr>
+        <p:txBody>
+          <a:bodyPr wrap="square" lIns="0" tIns="0" rIns="0" bIns="0" rtlCol="0" anchor="ctr"/>
+          <a:lstStyle/>
+          <a:p>
+            <a:pPr indent="0" marL="0">
+              <a:buNone/>
+            </a:pPr>
+            <a:r>
+              <a:rPr lang="en-US" sz="3400" b="1" dirty="0">
+                <a:solidFill>
+                  <a:srgbClr val="FFFFFF"/>
+                </a:solidFill>
+                <a:latin typeface="Arial" pitchFamily="34" charset="0"/>
+                <a:ea typeface="Arial" pitchFamily="34" charset="-122"/>
+                <a:cs typeface="Arial" pitchFamily="34" charset="-120"/>
+              </a:rPr>
+              <a:t>The argument</a:t>
+            </a:r>
+            <a:endParaRPr lang="en-US" sz="3400" dirty="0"/>
+          </a:p>
+        </p:txBody>
+      </p:sp>
+      <p:sp>
+        <p:nvSpPr>
+          <p:cNvPr id="3" name="Text 1"/>
+          <p:cNvSpPr/>
+          <p:nvPr/>
+        </p:nvSpPr>
+        <p:spPr>
+          <a:xfrm>
+            <a:off x="566928" y="1060704"/>
+            <a:ext cx="11027664" cy="365760"/>
+          </a:xfrm>
+          <a:prstGeom prst="rect">
+            <a:avLst/>
+          </a:prstGeom>
+          <a:noFill/>
+          <a:ln/>
+        </p:spPr>
+        <p:txBody>
+          <a:bodyPr wrap="square" lIns="0" tIns="0" rIns="0" bIns="0" rtlCol="0" anchor="ctr"/>
+          <a:lstStyle/>
+          <a:p>
+            <a:pPr indent="0" marL="0">
+              <a:buNone/>
+            </a:pPr>
+            <a:r>
+              <a:rPr lang="en-US" sz="1500" dirty="0">
+                <a:solidFill>
+                  <a:srgbClr val="8B95A9"/>
+                </a:solidFill>
+                <a:latin typeface="Calibri" pitchFamily="34" charset="0"/>
+                <a:ea typeface="Calibri" pitchFamily="34" charset="-122"/>
+                <a:cs typeface="Calibri" pitchFamily="34" charset="-120"/>
+              </a:rPr>
+              <a:t>Both sides, from the same set of numbers</a:t>
+            </a:r>
+            <a:endParaRPr lang="en-US" sz="1500" dirty="0"/>
+          </a:p>
+        </p:txBody>
+      </p:sp>
+      <p:sp>
+        <p:nvSpPr>
+          <p:cNvPr id="4" name="Shape 2"/>
+          <p:cNvSpPr/>
+          <p:nvPr/>
+        </p:nvSpPr>
+        <p:spPr>
+          <a:xfrm>
+            <a:off x="566928" y="1737360"/>
+            <a:ext cx="5330952" cy="3520440"/>
+          </a:xfrm>
+          <a:prstGeom prst="roundRect">
+            <a:avLst>
+              <a:gd name="adj" fmla="val 3117"/>
+            </a:avLst>
+          </a:prstGeom>
+          <a:solidFill>
+            <a:srgbClr val="151C2A"/>
+          </a:solidFill>
+          <a:ln w="12700">
+            <a:solidFill>
+              <a:srgbClr val="151C2A"/>
+            </a:solidFill>
+            <a:prstDash val="solid"/>
+          </a:ln>
+        </p:spPr>
+      </p:sp>
+      <p:sp>
+        <p:nvSpPr>
+          <p:cNvPr id="5" name="Text 3"/>
+          <p:cNvSpPr/>
+          <p:nvPr/>
+        </p:nvSpPr>
+        <p:spPr>
+          <a:xfrm>
+            <a:off x="877824" y="1956816"/>
+            <a:ext cx="4709160" cy="411480"/>
+          </a:xfrm>
+          <a:prstGeom prst="rect">
+            <a:avLst/>
+          </a:prstGeom>
+          <a:noFill/>
+          <a:ln/>
+        </p:spPr>
+        <p:txBody>
+          <a:bodyPr wrap="square" lIns="0" tIns="0" rIns="0" bIns="0" rtlCol="0" anchor="t"/>
+          <a:lstStyle/>
+          <a:p>
+            <a:pPr indent="0" marL="0">
+              <a:buNone/>
+            </a:pPr>
+            <a:r>
+              <a:rPr lang="en-US" sz="2000" b="1" dirty="0">
+                <a:solidFill>
+                  <a:srgbClr val="4ADE80"/>
+                </a:solidFill>
+                <a:latin typeface="Arial" pitchFamily="34" charset="0"/>
+                <a:ea typeface="Arial" pitchFamily="34" charset="-122"/>
+                <a:cs typeface="Arial" pitchFamily="34" charset="-120"/>
+              </a:rPr>
+              <a:t>The bull case</a:t>
+            </a:r>
+            <a:endParaRPr lang="en-US" sz="2000" dirty="0"/>
+          </a:p>
+        </p:txBody>
+      </p:sp>
+      <p:sp>
+        <p:nvSpPr>
+          <p:cNvPr id="6" name="Text 4"/>
+          <p:cNvSpPr/>
+          <p:nvPr/>
+        </p:nvSpPr>
+        <p:spPr>
+          <a:xfrm>
+            <a:off x="877824" y="2523744"/>
+            <a:ext cx="4709160" cy="2606040"/>
+          </a:xfrm>
+          <a:prstGeom prst="rect">
+            <a:avLst/>
+          </a:prstGeom>
+          <a:noFill/>
+          <a:ln/>
+        </p:spPr>
+        <p:txBody>
+          <a:bodyPr wrap="square" lIns="0" tIns="0" rIns="0" bIns="0" rtlCol="0" anchor="t"/>
+          <a:lstStyle/>
+          <a:p>
+            <a:pPr marL="342900" indent="-342900">
+              <a:lnSpc>
+                <a:spcPts val="2300"/>
+              </a:lnSpc>
+              <a:spcAft>
+                <a:spcPts val="1300"/>
+              </a:spcAft>
+              <a:buSzPct val="100000"/>
+              <a:buChar char="•"/>
+            </a:pPr>
+            <a:r>
+              <a:rPr lang="en-US" sz="1500" dirty="0">
+                <a:solidFill>
+                  <a:srgbClr val="E8ECF4"/>
+                </a:solidFill>
+                <a:latin typeface="Calibri" pitchFamily="34" charset="0"/>
+                <a:ea typeface="Calibri" pitchFamily="34" charset="-122"/>
+                <a:cs typeface="Calibri" pitchFamily="34" charset="-120"/>
+              </a:rPr>
+              <a:t>FY2026 enterprise AI storage capacity sold out under long-term agreements</a:t>
+            </a:r>
+            <a:endParaRPr lang="en-US" sz="1500" dirty="0"/>
+          </a:p>
+          <a:p>
+            <a:pPr marL="342900" indent="-342900">
+              <a:lnSpc>
+                <a:spcPts val="2300"/>
+              </a:lnSpc>
+              <a:spcAft>
+                <a:spcPts val="1300"/>
+              </a:spcAft>
+              <a:buSzPct val="100000"/>
+              <a:buChar char="•"/>
+            </a:pPr>
+            <a:r>
+              <a:rPr lang="en-US" sz="1500" dirty="0">
+                <a:solidFill>
+                  <a:srgbClr val="E8ECF4"/>
+                </a:solidFill>
+                <a:latin typeface="Calibri" pitchFamily="34" charset="0"/>
+                <a:ea typeface="Calibri" pitchFamily="34" charset="-122"/>
+                <a:cs typeface="Calibri" pitchFamily="34" charset="-120"/>
+              </a:rPr>
+              <a:t>Gross margin up 54.7 points in four quarters</a:t>
+            </a:r>
+            <a:endParaRPr lang="en-US" sz="1500" dirty="0"/>
+          </a:p>
+          <a:p>
+            <a:pPr marL="342900" indent="-342900">
+              <a:lnSpc>
+                <a:spcPts val="2300"/>
+              </a:lnSpc>
+              <a:spcAft>
+                <a:spcPts val="1300"/>
+              </a:spcAft>
+              <a:buSzPct val="100000"/>
+              <a:buChar char="•"/>
+            </a:pPr>
+            <a:r>
+              <a:rPr lang="en-US" sz="1500" dirty="0">
+                <a:solidFill>
+                  <a:srgbClr val="E8ECF4"/>
+                </a:solidFill>
+                <a:latin typeface="Calibri" pitchFamily="34" charset="0"/>
+                <a:ea typeface="Calibri" pitchFamily="34" charset="-122"/>
+                <a:cs typeface="Calibri" pitchFamily="34" charset="-120"/>
+              </a:rPr>
+              <a:t>Datacenter revenue up 437% year over year</a:t>
+            </a:r>
+            <a:endParaRPr lang="en-US" sz="1500" dirty="0"/>
+          </a:p>
+          <a:p>
+            <a:pPr marL="342900" indent="-342900">
+              <a:lnSpc>
+                <a:spcPts val="2300"/>
+              </a:lnSpc>
+              <a:spcAft>
+                <a:spcPts val="1300"/>
+              </a:spcAft>
+              <a:buSzPct val="100000"/>
+              <a:buChar char="•"/>
+            </a:pPr>
+            <a:r>
+              <a:rPr lang="en-US" sz="1500" dirty="0">
+                <a:solidFill>
+                  <a:srgbClr val="E8ECF4"/>
+                </a:solidFill>
+                <a:latin typeface="Calibri" pitchFamily="34" charset="0"/>
+                <a:ea typeface="Calibri" pitchFamily="34" charset="-122"/>
+                <a:cs typeface="Calibri" pitchFamily="34" charset="-120"/>
+              </a:rPr>
+              <a:t>Net cash of $6.54B and no debt</a:t>
+            </a:r>
+            <a:endParaRPr lang="en-US" sz="1500" dirty="0"/>
+          </a:p>
+          <a:p>
+            <a:pPr marL="342900" indent="-342900">
+              <a:lnSpc>
+                <a:spcPts val="2300"/>
+              </a:lnSpc>
+              <a:spcAft>
+                <a:spcPts val="1300"/>
+              </a:spcAft>
+              <a:buSzPct val="100000"/>
+              <a:buChar char="•"/>
+            </a:pPr>
+            <a:r>
+              <a:rPr lang="en-US" sz="1500" dirty="0">
+                <a:solidFill>
+                  <a:srgbClr val="E8ECF4"/>
+                </a:solidFill>
+                <a:latin typeface="Calibri" pitchFamily="34" charset="0"/>
+                <a:ea typeface="Calibri" pitchFamily="34" charset="-122"/>
+                <a:cs typeface="Calibri" pitchFamily="34" charset="-120"/>
+              </a:rPr>
+              <a:t>Guidance implies the acceleration continues into FY2027</a:t>
+            </a:r>
+            <a:endParaRPr lang="en-US" sz="1500" dirty="0"/>
+          </a:p>
+        </p:txBody>
+      </p:sp>
+      <p:sp>
+        <p:nvSpPr>
+          <p:cNvPr id="7" name="Shape 5"/>
+          <p:cNvSpPr/>
+          <p:nvPr/>
+        </p:nvSpPr>
+        <p:spPr>
+          <a:xfrm>
+            <a:off x="6263640" y="1737360"/>
+            <a:ext cx="5330952" cy="3520440"/>
+          </a:xfrm>
+          <a:prstGeom prst="roundRect">
+            <a:avLst>
+              <a:gd name="adj" fmla="val 3117"/>
+            </a:avLst>
+          </a:prstGeom>
+          <a:solidFill>
+            <a:srgbClr val="151C2A"/>
+          </a:solidFill>
+          <a:ln w="12700">
+            <a:solidFill>
+              <a:srgbClr val="151C2A"/>
+            </a:solidFill>
+            <a:prstDash val="solid"/>
+          </a:ln>
+        </p:spPr>
+      </p:sp>
+      <p:sp>
+        <p:nvSpPr>
+          <p:cNvPr id="8" name="Text 6"/>
+          <p:cNvSpPr/>
+          <p:nvPr/>
+        </p:nvSpPr>
+        <p:spPr>
+          <a:xfrm>
+            <a:off x="6574536" y="1956816"/>
+            <a:ext cx="4709160" cy="411480"/>
+          </a:xfrm>
+          <a:prstGeom prst="rect">
+            <a:avLst/>
+          </a:prstGeom>
+          <a:noFill/>
+          <a:ln/>
+        </p:spPr>
+        <p:txBody>
+          <a:bodyPr wrap="square" lIns="0" tIns="0" rIns="0" bIns="0" rtlCol="0" anchor="t"/>
+          <a:lstStyle/>
+          <a:p>
+            <a:pPr indent="0" marL="0">
+              <a:buNone/>
+            </a:pPr>
+            <a:r>
+              <a:rPr lang="en-US" sz="2000" b="1" dirty="0">
+                <a:solidFill>
+                  <a:srgbClr val="F87171"/>
+                </a:solidFill>
+                <a:latin typeface="Arial" pitchFamily="34" charset="0"/>
+                <a:ea typeface="Arial" pitchFamily="34" charset="-122"/>
+                <a:cs typeface="Arial" pitchFamily="34" charset="-120"/>
+              </a:rPr>
+              <a:t>The bear case</a:t>
+            </a:r>
+            <a:endParaRPr lang="en-US" sz="2000" dirty="0"/>
+          </a:p>
+        </p:txBody>
+      </p:sp>
+      <p:sp>
+        <p:nvSpPr>
+          <p:cNvPr id="9" name="Text 7"/>
+          <p:cNvSpPr/>
+          <p:nvPr/>
+        </p:nvSpPr>
+        <p:spPr>
+          <a:xfrm>
+            <a:off x="6574536" y="2523744"/>
+            <a:ext cx="4709160" cy="2606040"/>
+          </a:xfrm>
+          <a:prstGeom prst="rect">
+            <a:avLst/>
+          </a:prstGeom>
+          <a:noFill/>
+          <a:ln/>
+        </p:spPr>
+        <p:txBody>
+          <a:bodyPr wrap="square" lIns="0" tIns="0" rIns="0" bIns="0" rtlCol="0" anchor="t"/>
+          <a:lstStyle/>
+          <a:p>
+            <a:pPr marL="342900" indent="-342900">
+              <a:lnSpc>
+                <a:spcPts val="2300"/>
+              </a:lnSpc>
+              <a:spcAft>
+                <a:spcPts val="1300"/>
+              </a:spcAft>
+              <a:buSzPct val="100000"/>
+              <a:buChar char="•"/>
+            </a:pPr>
+            <a:r>
+              <a:rPr lang="en-US" sz="1500" dirty="0">
+                <a:solidFill>
+                  <a:srgbClr val="E8ECF4"/>
+                </a:solidFill>
+                <a:latin typeface="Calibri" pitchFamily="34" charset="0"/>
+                <a:ea typeface="Calibri" pitchFamily="34" charset="-122"/>
+                <a:cs typeface="Calibri" pitchFamily="34" charset="-120"/>
+              </a:rPr>
+              <a:t>Memory is historically the most cyclical business in semiconductors</a:t>
+            </a:r>
+            <a:endParaRPr lang="en-US" sz="1500" dirty="0"/>
+          </a:p>
+          <a:p>
+            <a:pPr marL="342900" indent="-342900">
+              <a:lnSpc>
+                <a:spcPts val="2300"/>
+              </a:lnSpc>
+              <a:spcAft>
+                <a:spcPts val="1300"/>
+              </a:spcAft>
+              <a:buSzPct val="100000"/>
+              <a:buChar char="•"/>
+            </a:pPr>
+            <a:r>
+              <a:rPr lang="en-US" sz="1500" dirty="0">
+                <a:solidFill>
+                  <a:srgbClr val="E8ECF4"/>
+                </a:solidFill>
+                <a:latin typeface="Calibri" pitchFamily="34" charset="0"/>
+                <a:ea typeface="Calibri" pitchFamily="34" charset="-122"/>
+                <a:cs typeface="Calibri" pitchFamily="34" charset="-120"/>
+              </a:rPr>
+              <a:t>84.6% gross margin is a peak, not a baseline</a:t>
+            </a:r>
+            <a:endParaRPr lang="en-US" sz="1500" dirty="0"/>
+          </a:p>
+          <a:p>
+            <a:pPr marL="342900" indent="-342900">
+              <a:lnSpc>
+                <a:spcPts val="2300"/>
+              </a:lnSpc>
+              <a:spcAft>
+                <a:spcPts val="1300"/>
+              </a:spcAft>
+              <a:buSzPct val="100000"/>
+              <a:buChar char="•"/>
+            </a:pPr>
+            <a:r>
+              <a:rPr lang="en-US" sz="1500" dirty="0">
+                <a:solidFill>
+                  <a:srgbClr val="E8ECF4"/>
+                </a:solidFill>
+                <a:latin typeface="Calibri" pitchFamily="34" charset="0"/>
+                <a:ea typeface="Calibri" pitchFamily="34" charset="-122"/>
+                <a:cs typeface="Calibri" pitchFamily="34" charset="-120"/>
+              </a:rPr>
+              <a:t>Consumer revenue fell 32% sequentially in Q4</a:t>
+            </a:r>
+            <a:endParaRPr lang="en-US" sz="1500" dirty="0"/>
+          </a:p>
+          <a:p>
+            <a:pPr marL="342900" indent="-342900">
+              <a:lnSpc>
+                <a:spcPts val="2300"/>
+              </a:lnSpc>
+              <a:spcAft>
+                <a:spcPts val="1300"/>
+              </a:spcAft>
+              <a:buSzPct val="100000"/>
+              <a:buChar char="•"/>
+            </a:pPr>
+            <a:r>
+              <a:rPr lang="en-US" sz="1500" dirty="0">
+                <a:solidFill>
+                  <a:srgbClr val="E8ECF4"/>
+                </a:solidFill>
+                <a:latin typeface="Calibri" pitchFamily="34" charset="0"/>
+                <a:ea typeface="Calibri" pitchFamily="34" charset="-122"/>
+                <a:cs typeface="Calibri" pitchFamily="34" charset="-120"/>
+              </a:rPr>
+              <a:t>Revenue is concentrated in a few very large hyperscale customers</a:t>
+            </a:r>
+            <a:endParaRPr lang="en-US" sz="1500" dirty="0"/>
+          </a:p>
+          <a:p>
+            <a:pPr marL="342900" indent="-342900">
+              <a:lnSpc>
+                <a:spcPts val="2300"/>
+              </a:lnSpc>
+              <a:spcAft>
+                <a:spcPts val="1300"/>
+              </a:spcAft>
+              <a:buSzPct val="100000"/>
+              <a:buChar char="•"/>
+            </a:pPr>
+            <a:r>
+              <a:rPr lang="en-US" sz="1500" dirty="0">
+                <a:solidFill>
+                  <a:srgbClr val="E8ECF4"/>
+                </a:solidFill>
+                <a:latin typeface="Calibri" pitchFamily="34" charset="0"/>
+                <a:ea typeface="Calibri" pitchFamily="34" charset="-122"/>
+                <a:cs typeface="Calibri" pitchFamily="34" charset="-120"/>
+              </a:rPr>
+              <a:t>The stock has already fallen more than 30% from its June high</a:t>
+            </a:r>
+            <a:endParaRPr lang="en-US" sz="1500" dirty="0"/>
+          </a:p>
+        </p:txBody>
+      </p:sp>
+      <p:sp>
+        <p:nvSpPr>
+          <p:cNvPr id="10" name="Text 8"/>
+          <p:cNvSpPr/>
+          <p:nvPr/>
+        </p:nvSpPr>
+        <p:spPr>
+          <a:xfrm>
+            <a:off x="566928" y="6382512"/>
+            <a:ext cx="11027664" cy="274320"/>
+          </a:xfrm>
+          <a:prstGeom prst="rect">
+            <a:avLst/>
+          </a:prstGeom>
+          <a:noFill/>
+          <a:ln/>
+        </p:spPr>
+        <p:txBody>
+          <a:bodyPr wrap="square" lIns="0" tIns="0" rIns="0" bIns="0" rtlCol="0" anchor="ctr"/>
+          <a:lstStyle/>
+          <a:p>
+            <a:pPr indent="0" marL="0">
+              <a:buNone/>
+            </a:pPr>
+            <a:r>
+              <a:rPr lang="en-US" sz="950" dirty="0">
+                <a:solidFill>
+                  <a:srgbClr val="5B657A"/>
+                </a:solidFill>
+                <a:latin typeface="Calibri" pitchFamily="34" charset="0"/>
+                <a:ea typeface="Calibri" pitchFamily="34" charset="-122"/>
+                <a:cs typeface="Calibri" pitchFamily="34" charset="-120"/>
+              </a:rPr>
+              <a:t>Both columns are drawn from the same reported FY2026 figures.</a:t>
+            </a:r>
+            <a:endParaRPr lang="en-US" sz="950" dirty="0"/>
+          </a:p>
+        </p:txBody>
+      </p:sp>
+    </p:spTree>
+  </p:cSld>
+  <p:clrMapOvr>
+    <a:masterClrMapping/>
+  </p:clrMapOvr>
+  <p:transition spd="med" advClick="1">
+    <p:fade/>
+  </p:transition>
+</p:sld>
+</file>
+
+<file path=ppt/slides/slide15.xml><?xml version="1.0" encoding="utf-8"?>
+<p:sld xmlns:a="http://schemas.openxmlformats.org/drawingml/2006/main" xmlns:r="http://schemas.openxmlformats.org/officeDocument/2006/relationships" xmlns:p="http://schemas.openxmlformats.org/presentationml/2006/main">
+  <p:cSld name="Slide 15">
+    <p:bg>
+      <p:bgPr>
+        <a:solidFill>
+          <a:srgbClr val="0B0E14"/>
+        </a:solidFill>
+      </p:bgPr>
+    </p:bg>
+    <p:spTree>
+      <p:nvGrpSpPr>
+        <p:cNvPr id="1" name=""/>
+        <p:cNvGrpSpPr/>
+        <p:nvPr/>
+      </p:nvGrpSpPr>
+      <p:grpSpPr>
+        <a:xfrm>
+          <a:off x="0" y="0"/>
+          <a:ext cx="0" cy="0"/>
+          <a:chOff x="0" y="0"/>
+          <a:chExt cx="0" cy="0"/>
+        </a:xfrm>
+      </p:grpSpPr>
+      <p:sp>
+        <p:nvSpPr>
+          <p:cNvPr id="2" name="Text 0"/>
+          <p:cNvSpPr/>
+          <p:nvPr/>
+        </p:nvSpPr>
+        <p:spPr>
+          <a:xfrm>
+            <a:off x="566928" y="1234440"/>
+            <a:ext cx="11027664" cy="685800"/>
+          </a:xfrm>
+          <a:prstGeom prst="rect">
+            <a:avLst/>
+          </a:prstGeom>
+          <a:noFill/>
+          <a:ln/>
+        </p:spPr>
+        <p:txBody>
+          <a:bodyPr wrap="square" lIns="0" tIns="0" rIns="0" bIns="0" rtlCol="0" anchor="ctr"/>
+          <a:lstStyle/>
+          <a:p>
+            <a:pPr indent="0" marL="0">
+              <a:buNone/>
+            </a:pPr>
+            <a:r>
+              <a:rPr lang="en-US" sz="3600" b="1" dirty="0">
+                <a:solidFill>
+                  <a:srgbClr val="FFFFFF"/>
+                </a:solidFill>
+                <a:latin typeface="Arial" pitchFamily="34" charset="0"/>
+                <a:ea typeface="Arial" pitchFamily="34" charset="-122"/>
+                <a:cs typeface="Arial" pitchFamily="34" charset="-120"/>
+              </a:rPr>
+              <a:t>Three numbers to remember</a:t>
+            </a:r>
+            <a:endParaRPr lang="en-US" sz="3600" dirty="0"/>
+          </a:p>
+        </p:txBody>
+      </p:sp>
+      <p:sp>
+        <p:nvSpPr>
+          <p:cNvPr id="3" name="Shape 1"/>
+          <p:cNvSpPr/>
+          <p:nvPr/>
+        </p:nvSpPr>
+        <p:spPr>
+          <a:xfrm>
+            <a:off x="566928" y="2331720"/>
+            <a:ext cx="3480816" cy="2011680"/>
+          </a:xfrm>
+          <a:prstGeom prst="roundRect">
+            <a:avLst>
+              <a:gd name="adj" fmla="val 5455"/>
+            </a:avLst>
+          </a:prstGeom>
+          <a:solidFill>
+            <a:srgbClr val="151C2A"/>
+          </a:solidFill>
+          <a:ln w="12700">
+            <a:solidFill>
+              <a:srgbClr val="151C2A"/>
+            </a:solidFill>
+            <a:prstDash val="solid"/>
+          </a:ln>
+        </p:spPr>
+      </p:sp>
+      <p:sp>
+        <p:nvSpPr>
+          <p:cNvPr id="4" name="Text 2"/>
+          <p:cNvSpPr/>
+          <p:nvPr/>
+        </p:nvSpPr>
+        <p:spPr>
+          <a:xfrm>
+            <a:off x="786384" y="2478024"/>
+            <a:ext cx="3041904" cy="925373"/>
+          </a:xfrm>
+          <a:prstGeom prst="rect">
+            <a:avLst/>
+          </a:prstGeom>
+          <a:noFill/>
+          <a:ln/>
+        </p:spPr>
+        <p:txBody>
+          <a:bodyPr wrap="square" lIns="0" tIns="0" rIns="0" bIns="0" rtlCol="0" anchor="ctr"/>
+          <a:lstStyle/>
+          <a:p>
+            <a:pPr indent="0" marL="0">
+              <a:buNone/>
+            </a:pPr>
+            <a:r>
+              <a:rPr lang="en-US" sz="4000" b="1" dirty="0">
+                <a:solidFill>
+                  <a:srgbClr val="3B82F6"/>
+                </a:solidFill>
+                <a:latin typeface="Arial" pitchFamily="34" charset="0"/>
+                <a:ea typeface="Arial" pitchFamily="34" charset="-122"/>
+                <a:cs typeface="Arial" pitchFamily="34" charset="-120"/>
+              </a:rPr>
+              <a:t>$20.2B</a:t>
+            </a:r>
+            <a:endParaRPr lang="en-US" sz="4000" dirty="0"/>
+          </a:p>
+        </p:txBody>
+      </p:sp>
+      <p:sp>
+        <p:nvSpPr>
+          <p:cNvPr id="5" name="Text 3"/>
+          <p:cNvSpPr/>
+          <p:nvPr/>
+        </p:nvSpPr>
+        <p:spPr>
+          <a:xfrm>
+            <a:off x="786384" y="3619195"/>
+            <a:ext cx="3041904" cy="643738"/>
+          </a:xfrm>
+          <a:prstGeom prst="rect">
+            <a:avLst/>
+          </a:prstGeom>
+          <a:noFill/>
+          <a:ln/>
+        </p:spPr>
+        <p:txBody>
+          <a:bodyPr wrap="square" lIns="0" tIns="0" rIns="0" bIns="0" rtlCol="0" anchor="t"/>
+          <a:lstStyle/>
+          <a:p>
+            <a:pPr indent="0" marL="0">
+              <a:buNone/>
+            </a:pPr>
+            <a:r>
+              <a:rPr lang="en-US" sz="1200" dirty="0">
+                <a:solidFill>
+                  <a:srgbClr val="8B95A9"/>
+                </a:solidFill>
+                <a:latin typeface="Calibri" pitchFamily="34" charset="0"/>
+                <a:ea typeface="Calibri" pitchFamily="34" charset="-122"/>
+                <a:cs typeface="Calibri" pitchFamily="34" charset="-120"/>
+              </a:rPr>
+              <a:t>FY2026 revenue, up 175% on the prior year</a:t>
+            </a:r>
+            <a:endParaRPr lang="en-US" sz="1200" dirty="0"/>
+          </a:p>
+        </p:txBody>
+      </p:sp>
+      <p:sp>
+        <p:nvSpPr>
+          <p:cNvPr id="6" name="Shape 4"/>
+          <p:cNvSpPr/>
+          <p:nvPr/>
+        </p:nvSpPr>
+        <p:spPr>
+          <a:xfrm>
+            <a:off x="4340352" y="2331720"/>
+            <a:ext cx="3480816" cy="2011680"/>
+          </a:xfrm>
+          <a:prstGeom prst="roundRect">
+            <a:avLst>
+              <a:gd name="adj" fmla="val 5455"/>
+            </a:avLst>
+          </a:prstGeom>
+          <a:solidFill>
+            <a:srgbClr val="151C2A"/>
+          </a:solidFill>
+          <a:ln w="12700">
+            <a:solidFill>
+              <a:srgbClr val="151C2A"/>
+            </a:solidFill>
+            <a:prstDash val="solid"/>
+          </a:ln>
+        </p:spPr>
+      </p:sp>
+      <p:sp>
+        <p:nvSpPr>
+          <p:cNvPr id="7" name="Text 5"/>
+          <p:cNvSpPr/>
+          <p:nvPr/>
+        </p:nvSpPr>
+        <p:spPr>
+          <a:xfrm>
+            <a:off x="4559808" y="2478024"/>
+            <a:ext cx="3041904" cy="925373"/>
+          </a:xfrm>
+          <a:prstGeom prst="rect">
+            <a:avLst/>
+          </a:prstGeom>
+          <a:noFill/>
+          <a:ln/>
+        </p:spPr>
+        <p:txBody>
+          <a:bodyPr wrap="square" lIns="0" tIns="0" rIns="0" bIns="0" rtlCol="0" anchor="ctr"/>
+          <a:lstStyle/>
+          <a:p>
+            <a:pPr indent="0" marL="0">
+              <a:buNone/>
+            </a:pPr>
+            <a:r>
+              <a:rPr lang="en-US" sz="4000" b="1" dirty="0">
+                <a:solidFill>
+                  <a:srgbClr val="0D9488"/>
+                </a:solidFill>
+                <a:latin typeface="Arial" pitchFamily="34" charset="0"/>
+                <a:ea typeface="Arial" pitchFamily="34" charset="-122"/>
+                <a:cs typeface="Arial" pitchFamily="34" charset="-120"/>
+              </a:rPr>
+              <a:t>84.6%</a:t>
+            </a:r>
+            <a:endParaRPr lang="en-US" sz="4000" dirty="0"/>
+          </a:p>
+        </p:txBody>
+      </p:sp>
+      <p:sp>
+        <p:nvSpPr>
+          <p:cNvPr id="8" name="Text 6"/>
+          <p:cNvSpPr/>
+          <p:nvPr/>
+        </p:nvSpPr>
+        <p:spPr>
+          <a:xfrm>
+            <a:off x="4559808" y="3619195"/>
+            <a:ext cx="3041904" cy="643738"/>
+          </a:xfrm>
+          <a:prstGeom prst="rect">
+            <a:avLst/>
+          </a:prstGeom>
+          <a:noFill/>
+          <a:ln/>
+        </p:spPr>
+        <p:txBody>
+          <a:bodyPr wrap="square" lIns="0" tIns="0" rIns="0" bIns="0" rtlCol="0" anchor="t"/>
+          <a:lstStyle/>
+          <a:p>
+            <a:pPr indent="0" marL="0">
+              <a:buNone/>
+            </a:pPr>
+            <a:r>
+              <a:rPr lang="en-US" sz="1200" dirty="0">
+                <a:solidFill>
+                  <a:srgbClr val="8B95A9"/>
+                </a:solidFill>
+                <a:latin typeface="Calibri" pitchFamily="34" charset="0"/>
+                <a:ea typeface="Calibri" pitchFamily="34" charset="-122"/>
+                <a:cs typeface="Calibri" pitchFamily="34" charset="-120"/>
+              </a:rPr>
+              <a:t>Q4 non-GAAP gross margin, from 29.9% in Q1</a:t>
+            </a:r>
+            <a:endParaRPr lang="en-US" sz="1200" dirty="0"/>
+          </a:p>
+        </p:txBody>
+      </p:sp>
+      <p:sp>
+        <p:nvSpPr>
+          <p:cNvPr id="9" name="Shape 7"/>
+          <p:cNvSpPr/>
+          <p:nvPr/>
+        </p:nvSpPr>
+        <p:spPr>
+          <a:xfrm>
+            <a:off x="8113776" y="2331720"/>
+            <a:ext cx="3480816" cy="2011680"/>
+          </a:xfrm>
+          <a:prstGeom prst="roundRect">
+            <a:avLst>
+              <a:gd name="adj" fmla="val 5455"/>
+            </a:avLst>
+          </a:prstGeom>
+          <a:solidFill>
+            <a:srgbClr val="151C2A"/>
+          </a:solidFill>
+          <a:ln w="12700">
+            <a:solidFill>
+              <a:srgbClr val="151C2A"/>
+            </a:solidFill>
+            <a:prstDash val="solid"/>
+          </a:ln>
+        </p:spPr>
+      </p:sp>
+      <p:sp>
+        <p:nvSpPr>
+          <p:cNvPr id="10" name="Text 8"/>
+          <p:cNvSpPr/>
+          <p:nvPr/>
+        </p:nvSpPr>
+        <p:spPr>
+          <a:xfrm>
+            <a:off x="8333232" y="2478024"/>
+            <a:ext cx="3041904" cy="925373"/>
+          </a:xfrm>
+          <a:prstGeom prst="rect">
+            <a:avLst/>
+          </a:prstGeom>
+          <a:noFill/>
+          <a:ln/>
+        </p:spPr>
+        <p:txBody>
+          <a:bodyPr wrap="square" lIns="0" tIns="0" rIns="0" bIns="0" rtlCol="0" anchor="ctr"/>
+          <a:lstStyle/>
+          <a:p>
+            <a:pPr indent="0" marL="0">
+              <a:buNone/>
+            </a:pPr>
+            <a:r>
+              <a:rPr lang="en-US" sz="4000" b="1" dirty="0">
+                <a:solidFill>
+                  <a:srgbClr val="F87171"/>
+                </a:solidFill>
+                <a:latin typeface="Arial" pitchFamily="34" charset="0"/>
+                <a:ea typeface="Arial" pitchFamily="34" charset="-122"/>
+                <a:cs typeface="Arial" pitchFamily="34" charset="-120"/>
+              </a:rPr>
+              <a:t>−30%</a:t>
+            </a:r>
+            <a:endParaRPr lang="en-US" sz="4000" dirty="0"/>
+          </a:p>
+        </p:txBody>
+      </p:sp>
+      <p:sp>
+        <p:nvSpPr>
+          <p:cNvPr id="11" name="Text 9"/>
+          <p:cNvSpPr/>
+          <p:nvPr/>
+        </p:nvSpPr>
+        <p:spPr>
+          <a:xfrm>
+            <a:off x="8333232" y="3619195"/>
+            <a:ext cx="3041904" cy="643738"/>
+          </a:xfrm>
+          <a:prstGeom prst="rect">
+            <a:avLst/>
+          </a:prstGeom>
+          <a:noFill/>
+          <a:ln/>
+        </p:spPr>
+        <p:txBody>
+          <a:bodyPr wrap="square" lIns="0" tIns="0" rIns="0" bIns="0" rtlCol="0" anchor="t"/>
+          <a:lstStyle/>
+          <a:p>
+            <a:pPr indent="0" marL="0">
+              <a:buNone/>
+            </a:pPr>
+            <a:r>
+              <a:rPr lang="en-US" sz="1200" dirty="0">
+                <a:solidFill>
+                  <a:srgbClr val="8B95A9"/>
+                </a:solidFill>
+                <a:latin typeface="Calibri" pitchFamily="34" charset="0"/>
+                <a:ea typeface="Calibri" pitchFamily="34" charset="-122"/>
+                <a:cs typeface="Calibri" pitchFamily="34" charset="-120"/>
+              </a:rPr>
+              <a:t>The share price, from its June high</a:t>
+            </a:r>
+            <a:endParaRPr lang="en-US" sz="1200" dirty="0"/>
+          </a:p>
+        </p:txBody>
+      </p:sp>
+      <p:sp>
+        <p:nvSpPr>
+          <p:cNvPr id="12" name="Text 10"/>
+          <p:cNvSpPr/>
+          <p:nvPr/>
+        </p:nvSpPr>
+        <p:spPr>
+          <a:xfrm>
+            <a:off x="566928" y="4709160"/>
+            <a:ext cx="11027664" cy="914400"/>
+          </a:xfrm>
+          <a:prstGeom prst="rect">
+            <a:avLst/>
+          </a:prstGeom>
+          <a:noFill/>
+          <a:ln/>
+        </p:spPr>
+        <p:txBody>
+          <a:bodyPr wrap="square" lIns="0" tIns="0" rIns="0" bIns="0" rtlCol="0" anchor="ctr"/>
+          <a:lstStyle/>
+          <a:p>
+            <a:pPr indent="0" marL="0">
+              <a:buNone/>
+            </a:pPr>
+            <a:r>
+              <a:rPr lang="en-US" sz="1700" dirty="0">
+                <a:solidFill>
+                  <a:srgbClr val="E8ECF4"/>
+                </a:solidFill>
+                <a:latin typeface="Calibri" pitchFamily="34" charset="0"/>
+                <a:ea typeface="Calibri" pitchFamily="34" charset="-122"/>
+                <a:cs typeface="Calibri" pitchFamily="34" charset="-120"/>
+              </a:rPr>
+              <a:t>The business and the share price have been telling different stories since June. Which one turns out to be right depends entirely on whether 84.6% is a new normal or a peak.</a:t>
+            </a:r>
+            <a:endParaRPr lang="en-US" sz="1700" dirty="0"/>
+          </a:p>
+        </p:txBody>
+      </p:sp>
+      <p:sp>
+        <p:nvSpPr>
+          <p:cNvPr id="13" name="Text 11"/>
+          <p:cNvSpPr/>
+          <p:nvPr/>
+        </p:nvSpPr>
+        <p:spPr>
+          <a:xfrm>
+            <a:off x="566928" y="6382512"/>
+            <a:ext cx="11027664" cy="274320"/>
+          </a:xfrm>
+          <a:prstGeom prst="rect">
+            <a:avLst/>
+          </a:prstGeom>
+          <a:noFill/>
+          <a:ln/>
+        </p:spPr>
+        <p:txBody>
+          <a:bodyPr wrap="square" lIns="0" tIns="0" rIns="0" bIns="0" rtlCol="0" anchor="ctr"/>
+          <a:lstStyle/>
+          <a:p>
+            <a:pPr indent="0" marL="0">
+              <a:buNone/>
+            </a:pPr>
+            <a:r>
+              <a:rPr lang="en-US" sz="950" dirty="0">
+                <a:solidFill>
+                  <a:srgbClr val="5B657A"/>
+                </a:solidFill>
+                <a:latin typeface="Calibri" pitchFamily="34" charset="0"/>
+                <a:ea typeface="Calibri" pitchFamily="34" charset="-122"/>
+                <a:cs typeface="Calibri" pitchFamily="34" charset="-120"/>
+              </a:rPr>
+              <a:t>Sandisk FY2026 results, reported 5 August 2026. Not investment advice.</a:t>
+            </a:r>
+            <a:endParaRPr lang="en-US" sz="950" dirty="0"/>
+          </a:p>
+        </p:txBody>
+      </p:sp>
+    </p:spTree>
+  </p:cSld>
+  <p:clrMapOvr>
+    <a:masterClrMapping/>
+  </p:clrMapOvr>
+  <p:transition spd="med" advClick="1">
+    <p:fade/>
+  </p:transition>
 </p:sld>
 </file>
 
@@ -5845,6 +7330,9 @@
   <p:clrMapOvr>
     <a:masterClrMapping/>
   </p:clrMapOvr>
+  <p:transition spd="med" advClick="1">
+    <p:fade/>
+  </p:transition>
 </p:sld>
 </file>
 
@@ -6375,6 +7863,9 @@
   <p:clrMapOvr>
     <a:masterClrMapping/>
   </p:clrMapOvr>
+  <p:transition spd="med" advClick="1">
+    <p:fade/>
+  </p:transition>
 </p:sld>
 </file>
 
@@ -6767,6 +8258,9 @@
   <p:clrMapOvr>
     <a:masterClrMapping/>
   </p:clrMapOvr>
+  <p:transition spd="med" advClick="1">
+    <p:fade/>
+  </p:transition>
 </p:sld>
 </file>
 
@@ -6794,354 +8288,47 @@
           <a:chExt cx="0" cy="0"/>
         </a:xfrm>
       </p:grpSpPr>
-      <p:sp>
-        <p:nvSpPr>
-          <p:cNvPr id="2" name="Text 0"/>
-          <p:cNvSpPr/>
-          <p:nvPr/>
-        </p:nvSpPr>
-        <p:spPr>
-          <a:xfrm>
-            <a:off x="566928" y="475488"/>
-            <a:ext cx="11027664" cy="566928"/>
-          </a:xfrm>
-          <a:prstGeom prst="rect">
-            <a:avLst/>
-          </a:prstGeom>
-          <a:noFill/>
-          <a:ln/>
-        </p:spPr>
-        <p:txBody>
-          <a:bodyPr wrap="square" lIns="0" tIns="0" rIns="0" bIns="0" rtlCol="0" anchor="ctr"/>
-          <a:lstStyle/>
-          <a:p>
-            <a:pPr indent="0" marL="0">
-              <a:buNone/>
-            </a:pPr>
-            <a:r>
-              <a:rPr lang="en-US" sz="3400" b="1" dirty="0">
-                <a:solidFill>
-                  <a:srgbClr val="FFFFFF"/>
-                </a:solidFill>
-                <a:latin typeface="Arial" pitchFamily="34" charset="0"/>
-                <a:ea typeface="Arial" pitchFamily="34" charset="-122"/>
-                <a:cs typeface="Arial" pitchFamily="34" charset="-120"/>
-              </a:rPr>
-              <a:t>Gross margin</a:t>
-            </a:r>
-            <a:endParaRPr lang="en-US" sz="3400" dirty="0"/>
-          </a:p>
-        </p:txBody>
-      </p:sp>
-      <p:sp>
-        <p:nvSpPr>
-          <p:cNvPr id="3" name="Text 1"/>
-          <p:cNvSpPr/>
-          <p:nvPr/>
-        </p:nvSpPr>
-        <p:spPr>
-          <a:xfrm>
-            <a:off x="566928" y="1060704"/>
-            <a:ext cx="11027664" cy="365760"/>
-          </a:xfrm>
-          <a:prstGeom prst="rect">
-            <a:avLst/>
-          </a:prstGeom>
-          <a:noFill/>
-          <a:ln/>
-        </p:spPr>
-        <p:txBody>
-          <a:bodyPr wrap="square" lIns="0" tIns="0" rIns="0" bIns="0" rtlCol="0" anchor="ctr"/>
-          <a:lstStyle/>
-          <a:p>
-            <a:pPr indent="0" marL="0">
-              <a:buNone/>
-            </a:pPr>
-            <a:r>
-              <a:rPr lang="en-US" sz="1500" dirty="0">
-                <a:solidFill>
-                  <a:srgbClr val="8B95A9"/>
-                </a:solidFill>
-                <a:latin typeface="Calibri" pitchFamily="34" charset="0"/>
-                <a:ea typeface="Calibri" pitchFamily="34" charset="-122"/>
-                <a:cs typeface="Calibri" pitchFamily="34" charset="-120"/>
-              </a:rPr>
-              <a:t>Non-GAAP, by quarter — the part that turned revenue into profit</a:t>
-            </a:r>
-            <a:endParaRPr lang="en-US" sz="1500" dirty="0"/>
-          </a:p>
-        </p:txBody>
-      </p:sp>
-      <p:graphicFrame>
-        <p:nvGraphicFramePr>
-          <p:cNvPr id="4" name="Chart 0" descr=""/>
-          <p:cNvGraphicFramePr/>
-          <p:nvPr/>
-        </p:nvGraphicFramePr>
-        <p:xfrm>
-          <a:off x="566928" y="1600200"/>
-          <a:ext cx="7406640" cy="4160520"/>
-        </p:xfrm>
-        <a:graphic xmlns:a="http://schemas.openxmlformats.org/drawingml/2006/main">
-          <a:graphicData uri="http://schemas.openxmlformats.org/drawingml/2006/chart">
-            <c:chart xmlns:c="http://schemas.openxmlformats.org/drawingml/2006/chart" r:id="rId1"/>
-          </a:graphicData>
-        </a:graphic>
-      </p:graphicFrame>
-      <p:sp>
-        <p:nvSpPr>
-          <p:cNvPr id="5" name="Shape 2"/>
-          <p:cNvSpPr/>
-          <p:nvPr/>
-        </p:nvSpPr>
-        <p:spPr>
-          <a:xfrm>
-            <a:off x="8275320" y="1737360"/>
-            <a:ext cx="3319272" cy="1371600"/>
-          </a:xfrm>
-          <a:prstGeom prst="roundRect">
-            <a:avLst>
-              <a:gd name="adj" fmla="val 8000"/>
-            </a:avLst>
-          </a:prstGeom>
-          <a:solidFill>
-            <a:srgbClr val="151C2A"/>
-          </a:solidFill>
-          <a:ln w="12700">
-            <a:solidFill>
-              <a:srgbClr val="151C2A"/>
-            </a:solidFill>
-            <a:prstDash val="solid"/>
-          </a:ln>
-        </p:spPr>
-      </p:sp>
-      <p:sp>
-        <p:nvSpPr>
-          <p:cNvPr id="6" name="Text 3"/>
-          <p:cNvSpPr/>
-          <p:nvPr/>
-        </p:nvSpPr>
-        <p:spPr>
-          <a:xfrm>
-            <a:off x="8494776" y="1883664"/>
-            <a:ext cx="2880360" cy="630936"/>
-          </a:xfrm>
-          <a:prstGeom prst="rect">
-            <a:avLst/>
-          </a:prstGeom>
-          <a:noFill/>
-          <a:ln/>
-        </p:spPr>
-        <p:txBody>
-          <a:bodyPr wrap="square" lIns="0" tIns="0" rIns="0" bIns="0" rtlCol="0" anchor="ctr"/>
-          <a:lstStyle/>
-          <a:p>
-            <a:pPr indent="0" marL="0">
-              <a:buNone/>
-            </a:pPr>
-            <a:r>
-              <a:rPr lang="en-US" sz="4000" b="1" dirty="0">
-                <a:solidFill>
-                  <a:srgbClr val="0D9488"/>
-                </a:solidFill>
-                <a:latin typeface="Arial" pitchFamily="34" charset="0"/>
-                <a:ea typeface="Arial" pitchFamily="34" charset="-122"/>
-                <a:cs typeface="Arial" pitchFamily="34" charset="-120"/>
-              </a:rPr>
-              <a:t>+54.7</a:t>
-            </a:r>
-            <a:endParaRPr lang="en-US" sz="4000" dirty="0"/>
-          </a:p>
-        </p:txBody>
-      </p:sp>
-      <p:sp>
-        <p:nvSpPr>
-          <p:cNvPr id="7" name="Text 4"/>
-          <p:cNvSpPr/>
-          <p:nvPr/>
-        </p:nvSpPr>
-        <p:spPr>
-          <a:xfrm>
-            <a:off x="8494776" y="2615184"/>
-            <a:ext cx="2880360" cy="438912"/>
-          </a:xfrm>
-          <a:prstGeom prst="rect">
-            <a:avLst/>
-          </a:prstGeom>
-          <a:noFill/>
-          <a:ln/>
-        </p:spPr>
-        <p:txBody>
-          <a:bodyPr wrap="square" lIns="0" tIns="0" rIns="0" bIns="0" rtlCol="0" anchor="t"/>
-          <a:lstStyle/>
-          <a:p>
-            <a:pPr indent="0" marL="0">
-              <a:buNone/>
-            </a:pPr>
-            <a:r>
-              <a:rPr lang="en-US" sz="1200" dirty="0">
-                <a:solidFill>
-                  <a:srgbClr val="8B95A9"/>
-                </a:solidFill>
-                <a:latin typeface="Calibri" pitchFamily="34" charset="0"/>
-                <a:ea typeface="Calibri" pitchFamily="34" charset="-122"/>
-                <a:cs typeface="Calibri" pitchFamily="34" charset="-120"/>
-              </a:rPr>
-              <a:t>Percentage points added across FY2026</a:t>
-            </a:r>
-            <a:endParaRPr lang="en-US" sz="1200" dirty="0"/>
-          </a:p>
-        </p:txBody>
-      </p:sp>
-      <p:sp>
-        <p:nvSpPr>
-          <p:cNvPr id="8" name="Shape 5"/>
-          <p:cNvSpPr/>
-          <p:nvPr/>
-        </p:nvSpPr>
-        <p:spPr>
-          <a:xfrm>
-            <a:off x="8275320" y="3291840"/>
-            <a:ext cx="3319272" cy="2468880"/>
-          </a:xfrm>
-          <a:prstGeom prst="roundRect">
-            <a:avLst>
-              <a:gd name="adj" fmla="val 4444"/>
-            </a:avLst>
-          </a:prstGeom>
-          <a:solidFill>
-            <a:srgbClr val="1C2536"/>
-          </a:solidFill>
-          <a:ln w="12700">
-            <a:solidFill>
-              <a:srgbClr val="1C2536"/>
-            </a:solidFill>
-            <a:prstDash val="solid"/>
-          </a:ln>
-        </p:spPr>
-      </p:sp>
-      <p:sp>
-        <p:nvSpPr>
-          <p:cNvPr id="9" name="Text 6"/>
-          <p:cNvSpPr/>
-          <p:nvPr/>
-        </p:nvSpPr>
-        <p:spPr>
-          <a:xfrm>
-            <a:off x="8513064" y="3520440"/>
-            <a:ext cx="2843784" cy="365760"/>
-          </a:xfrm>
-          <a:prstGeom prst="rect">
-            <a:avLst/>
-          </a:prstGeom>
-          <a:noFill/>
-          <a:ln/>
-        </p:spPr>
-        <p:txBody>
-          <a:bodyPr wrap="square" lIns="0" tIns="0" rIns="0" bIns="0" rtlCol="0" anchor="t"/>
-          <a:lstStyle/>
-          <a:p>
-            <a:pPr indent="0" marL="0">
-              <a:buNone/>
-            </a:pPr>
-            <a:r>
-              <a:rPr lang="en-US" sz="1600" b="1" dirty="0">
-                <a:solidFill>
-                  <a:srgbClr val="FFFFFF"/>
-                </a:solidFill>
-                <a:latin typeface="Arial" pitchFamily="34" charset="0"/>
-                <a:ea typeface="Arial" pitchFamily="34" charset="-122"/>
-                <a:cs typeface="Arial" pitchFamily="34" charset="-120"/>
-              </a:rPr>
-              <a:t>Why it matters</a:t>
-            </a:r>
-            <a:endParaRPr lang="en-US" sz="1600" dirty="0"/>
-          </a:p>
-        </p:txBody>
-      </p:sp>
-      <p:sp>
-        <p:nvSpPr>
-          <p:cNvPr id="10" name="Text 7"/>
-          <p:cNvSpPr/>
-          <p:nvPr/>
-        </p:nvSpPr>
-        <p:spPr>
-          <a:xfrm>
-            <a:off x="8513064" y="3977640"/>
-            <a:ext cx="2843784" cy="1554480"/>
-          </a:xfrm>
-          <a:prstGeom prst="rect">
-            <a:avLst/>
-          </a:prstGeom>
-          <a:noFill/>
-          <a:ln/>
-        </p:spPr>
-        <p:txBody>
-          <a:bodyPr wrap="square" lIns="0" tIns="0" rIns="0" bIns="0" rtlCol="0" anchor="t"/>
-          <a:lstStyle/>
-          <a:p>
-            <a:pPr indent="0" marL="0">
-              <a:buNone/>
-            </a:pPr>
-            <a:r>
-              <a:rPr lang="en-US" sz="1300" dirty="0">
-                <a:solidFill>
-                  <a:srgbClr val="E8ECF4"/>
-                </a:solidFill>
-                <a:latin typeface="Calibri" pitchFamily="34" charset="0"/>
-                <a:ea typeface="Calibri" pitchFamily="34" charset="-122"/>
-                <a:cs typeface="Calibri" pitchFamily="34" charset="-120"/>
-              </a:rPr>
-              <a:t>Revenue roughly quadrupled. Profit did far more than that, because each extra dollar of revenue arrived at a much higher margin than the one before it.</a:t>
-            </a:r>
-            <a:endParaRPr lang="en-US" sz="1300" dirty="0"/>
-          </a:p>
-        </p:txBody>
-      </p:sp>
-      <p:sp>
-        <p:nvSpPr>
-          <p:cNvPr id="11" name="Text 8"/>
-          <p:cNvSpPr/>
-          <p:nvPr/>
-        </p:nvSpPr>
-        <p:spPr>
-          <a:xfrm>
-            <a:off x="566928" y="6382512"/>
-            <a:ext cx="11027664" cy="274320"/>
-          </a:xfrm>
-          <a:prstGeom prst="rect">
-            <a:avLst/>
-          </a:prstGeom>
-          <a:noFill/>
-          <a:ln/>
-        </p:spPr>
-        <p:txBody>
-          <a:bodyPr wrap="square" lIns="0" tIns="0" rIns="0" bIns="0" rtlCol="0" anchor="ctr"/>
-          <a:lstStyle/>
-          <a:p>
-            <a:pPr indent="0" marL="0">
-              <a:buNone/>
-            </a:pPr>
-            <a:r>
-              <a:rPr lang="en-US" sz="950" dirty="0">
-                <a:solidFill>
-                  <a:srgbClr val="5B657A"/>
-                </a:solidFill>
-                <a:latin typeface="Calibri" pitchFamily="34" charset="0"/>
-                <a:ea typeface="Calibri" pitchFamily="34" charset="-122"/>
-                <a:cs typeface="Calibri" pitchFamily="34" charset="-120"/>
-              </a:rPr>
-              <a:t>Non-GAAP gross margin as reported each quarter. Q4 FY2026: 84.6%.</a:t>
-            </a:r>
-            <a:endParaRPr lang="en-US" sz="950" dirty="0"/>
-          </a:p>
-        </p:txBody>
-      </p:sp>
+      <p:pic>
+        <p:nvPicPr>
+          <p:cNvPr id="3" name="Media 0">
+            <a:hlinkClick r:id="" action="ppaction://media"/>
+          </p:cNvPr>
+          <p:cNvPicPr>
+            <a:picLocks noChangeAspect="1"/>
+          </p:cNvPicPr>
+          <p:nvPr>
+            <a:videoFile r:link="rId1"/>
+            <p:extLst>
+              <p:ext uri="{DAA4B4D4-6D71-4841-9C94-3DE7FCFB9230}">
+                <p14:media xmlns:p14="http://schemas.microsoft.com/office/powerpoint/2010/main" r:embed="rId2"/>
+              </p:ext>
+            </p:extLst>
+          </p:nvPr>
+        </p:nvPicPr>
+        <p:blipFill>
+          <a:blip r:embed="rId3"/>
+          <a:stretch>
+            <a:fillRect/>
+          </a:stretch>
+        </p:blipFill>
+        <p:spPr>
+          <a:xfrm>
+            <a:off x="0" y="0"/>
+            <a:ext cx="12191970" cy="6858000"/>
+          </a:xfrm>
+          <a:prstGeom prst="rect">
+            <a:avLst/>
+          </a:prstGeom>
+        </p:spPr>
+      </p:pic>
     </p:spTree>
   </p:cSld>
   <p:clrMapOvr>
     <a:masterClrMapping/>
   </p:clrMapOvr>
+  <p:transition spd="med" advClick="1">
+    <p:fade/>
+  </p:transition>
 </p:sld>
 </file>
 
@@ -7202,7 +8389,7 @@
                 <a:ea typeface="Arial" pitchFamily="34" charset="-122"/>
                 <a:cs typeface="Arial" pitchFamily="34" charset="-120"/>
               </a:rPr>
-              <a:t>Earnings per share</a:t>
+              <a:t>Gross margin</a:t>
             </a:r>
             <a:endParaRPr lang="en-US" sz="3400" dirty="0"/>
           </a:p>
@@ -7241,7 +8428,7 @@
                 <a:ea typeface="Calibri" pitchFamily="34" charset="-122"/>
                 <a:cs typeface="Calibri" pitchFamily="34" charset="-120"/>
               </a:rPr>
-              <a:t>GAAP diluted, by quarter</a:t>
+              <a:t>Non-GAAP, by quarter — the part that turned revenue into profit</a:t>
             </a:r>
             <a:endParaRPr lang="en-US" sz="1500" dirty="0"/>
           </a:p>
@@ -7317,13 +8504,13 @@
             <a:r>
               <a:rPr lang="en-US" sz="4000" b="1" dirty="0">
                 <a:solidFill>
-                  <a:srgbClr val="3B82F6"/>
+                  <a:srgbClr val="0D9488"/>
                 </a:solidFill>
                 <a:latin typeface="Arial" pitchFamily="34" charset="0"/>
                 <a:ea typeface="Arial" pitchFamily="34" charset="-122"/>
                 <a:cs typeface="Arial" pitchFamily="34" charset="-120"/>
               </a:rPr>
-              <a:t>$73.76</a:t>
+              <a:t>+54.7</a:t>
             </a:r>
             <a:endParaRPr lang="en-US" sz="4000" dirty="0"/>
           </a:p>
@@ -7362,7 +8549,7 @@
                 <a:ea typeface="Calibri" pitchFamily="34" charset="-122"/>
                 <a:cs typeface="Calibri" pitchFamily="34" charset="-120"/>
               </a:rPr>
-              <a:t>FY2026 GAAP diluted EPS</a:t>
+              <a:t>Percentage points added across FY2026</a:t>
             </a:r>
             <a:endParaRPr lang="en-US" sz="1200" dirty="0"/>
           </a:p>
@@ -7377,19 +8564,19 @@
         <p:spPr>
           <a:xfrm>
             <a:off x="8275320" y="3291840"/>
-            <a:ext cx="3319272" cy="1170432"/>
+            <a:ext cx="3319272" cy="2468880"/>
           </a:xfrm>
           <a:prstGeom prst="roundRect">
             <a:avLst>
-              <a:gd name="adj" fmla="val 9375"/>
+              <a:gd name="adj" fmla="val 4444"/>
             </a:avLst>
           </a:prstGeom>
           <a:solidFill>
-            <a:srgbClr val="151C2A"/>
+            <a:srgbClr val="1C2536"/>
           </a:solidFill>
           <a:ln w="12700">
             <a:solidFill>
-              <a:srgbClr val="151C2A"/>
+              <a:srgbClr val="1C2536"/>
             </a:solidFill>
             <a:prstDash val="solid"/>
           </a:ln>
@@ -7403,34 +8590,34 @@
         </p:nvSpPr>
         <p:spPr>
           <a:xfrm>
-            <a:off x="8494776" y="3438144"/>
-            <a:ext cx="2880360" cy="538399"/>
-          </a:xfrm>
-          <a:prstGeom prst="rect">
-            <a:avLst/>
-          </a:prstGeom>
-          <a:noFill/>
-          <a:ln/>
-        </p:spPr>
-        <p:txBody>
-          <a:bodyPr wrap="square" lIns="0" tIns="0" rIns="0" bIns="0" rtlCol="0" anchor="ctr"/>
-          <a:lstStyle/>
-          <a:p>
-            <a:pPr indent="0" marL="0">
-              <a:buNone/>
-            </a:pPr>
-            <a:r>
-              <a:rPr lang="en-US" sz="3000" b="1" dirty="0">
-                <a:solidFill>
-                  <a:srgbClr val="8B95A9"/>
+            <a:off x="8513064" y="3520440"/>
+            <a:ext cx="2843784" cy="365760"/>
+          </a:xfrm>
+          <a:prstGeom prst="rect">
+            <a:avLst/>
+          </a:prstGeom>
+          <a:noFill/>
+          <a:ln/>
+        </p:spPr>
+        <p:txBody>
+          <a:bodyPr wrap="square" lIns="0" tIns="0" rIns="0" bIns="0" rtlCol="0" anchor="t"/>
+          <a:lstStyle/>
+          <a:p>
+            <a:pPr indent="0" marL="0">
+              <a:buNone/>
+            </a:pPr>
+            <a:r>
+              <a:rPr lang="en-US" sz="1600" b="1" dirty="0">
+                <a:solidFill>
+                  <a:srgbClr val="FFFFFF"/>
                 </a:solidFill>
                 <a:latin typeface="Arial" pitchFamily="34" charset="0"/>
                 <a:ea typeface="Arial" pitchFamily="34" charset="-122"/>
                 <a:cs typeface="Arial" pitchFamily="34" charset="-120"/>
               </a:rPr>
-              <a:t>$0.75</a:t>
-            </a:r>
-            <a:endParaRPr lang="en-US" sz="3000" dirty="0"/>
+              <a:t>Why it matters</a:t>
+            </a:r>
+            <a:endParaRPr lang="en-US" sz="1600" dirty="0"/>
           </a:p>
         </p:txBody>
       </p:sp>
@@ -7442,8 +8629,8 @@
         </p:nvSpPr>
         <p:spPr>
           <a:xfrm>
-            <a:off x="8494776" y="4040916"/>
-            <a:ext cx="2880360" cy="374538"/>
+            <a:off x="8513064" y="3977640"/>
+            <a:ext cx="2843784" cy="1554480"/>
           </a:xfrm>
           <a:prstGeom prst="rect">
             <a:avLst/>
@@ -7459,57 +8646,30 @@
               <a:buNone/>
             </a:pPr>
             <a:r>
-              <a:rPr lang="en-US" sz="1200" dirty="0">
-                <a:solidFill>
-                  <a:srgbClr val="8B95A9"/>
+              <a:rPr lang="en-US" sz="1300" dirty="0">
+                <a:solidFill>
+                  <a:srgbClr val="E8ECF4"/>
                 </a:solidFill>
                 <a:latin typeface="Calibri" pitchFamily="34" charset="0"/>
                 <a:ea typeface="Calibri" pitchFamily="34" charset="-122"/>
                 <a:cs typeface="Calibri" pitchFamily="34" charset="-120"/>
               </a:rPr>
-              <a:t>Q1 FY2026 — where the year started</a:t>
-            </a:r>
-            <a:endParaRPr lang="en-US" sz="1200" dirty="0"/>
-          </a:p>
-        </p:txBody>
-      </p:sp>
-      <p:sp>
-        <p:nvSpPr>
-          <p:cNvPr id="11" name="Shape 8"/>
-          <p:cNvSpPr/>
-          <p:nvPr/>
-        </p:nvSpPr>
-        <p:spPr>
-          <a:xfrm>
-            <a:off x="8275320" y="4590288"/>
-            <a:ext cx="3319272" cy="1170432"/>
-          </a:xfrm>
-          <a:prstGeom prst="roundRect">
-            <a:avLst>
-              <a:gd name="adj" fmla="val 9375"/>
-            </a:avLst>
-          </a:prstGeom>
-          <a:solidFill>
-            <a:srgbClr val="151C2A"/>
-          </a:solidFill>
-          <a:ln w="12700">
-            <a:solidFill>
-              <a:srgbClr val="151C2A"/>
-            </a:solidFill>
-            <a:prstDash val="solid"/>
-          </a:ln>
-        </p:spPr>
-      </p:sp>
-      <p:sp>
-        <p:nvSpPr>
-          <p:cNvPr id="12" name="Text 9"/>
-          <p:cNvSpPr/>
-          <p:nvPr/>
-        </p:nvSpPr>
-        <p:spPr>
-          <a:xfrm>
-            <a:off x="8494776" y="4736592"/>
-            <a:ext cx="2880360" cy="538399"/>
+              <a:t>Revenue roughly quadrupled. Profit did far more than that, because each extra dollar of revenue arrived at a much higher margin than the one before it.</a:t>
+            </a:r>
+            <a:endParaRPr lang="en-US" sz="1300" dirty="0"/>
+          </a:p>
+        </p:txBody>
+      </p:sp>
+      <p:sp>
+        <p:nvSpPr>
+          <p:cNvPr id="11" name="Text 8"/>
+          <p:cNvSpPr/>
+          <p:nvPr/>
+        </p:nvSpPr>
+        <p:spPr>
+          <a:xfrm>
+            <a:off x="566928" y="6382512"/>
+            <a:ext cx="11027664" cy="274320"/>
           </a:xfrm>
           <a:prstGeom prst="rect">
             <a:avLst/>
@@ -7525,93 +8685,15 @@
               <a:buNone/>
             </a:pPr>
             <a:r>
-              <a:rPr lang="en-US" sz="3000" b="1" dirty="0">
-                <a:solidFill>
-                  <a:srgbClr val="4ADE80"/>
-                </a:solidFill>
-                <a:latin typeface="Arial" pitchFamily="34" charset="0"/>
-                <a:ea typeface="Arial" pitchFamily="34" charset="-122"/>
-                <a:cs typeface="Arial" pitchFamily="34" charset="-120"/>
-              </a:rPr>
-              <a:t>$43.97</a:t>
-            </a:r>
-            <a:endParaRPr lang="en-US" sz="3000" dirty="0"/>
-          </a:p>
-        </p:txBody>
-      </p:sp>
-      <p:sp>
-        <p:nvSpPr>
-          <p:cNvPr id="13" name="Text 10"/>
-          <p:cNvSpPr/>
-          <p:nvPr/>
-        </p:nvSpPr>
-        <p:spPr>
-          <a:xfrm>
-            <a:off x="8494776" y="5339364"/>
-            <a:ext cx="2880360" cy="374538"/>
-          </a:xfrm>
-          <a:prstGeom prst="rect">
-            <a:avLst/>
-          </a:prstGeom>
-          <a:noFill/>
-          <a:ln/>
-        </p:spPr>
-        <p:txBody>
-          <a:bodyPr wrap="square" lIns="0" tIns="0" rIns="0" bIns="0" rtlCol="0" anchor="t"/>
-          <a:lstStyle/>
-          <a:p>
-            <a:pPr indent="0" marL="0">
-              <a:buNone/>
-            </a:pPr>
-            <a:r>
-              <a:rPr lang="en-US" sz="1200" dirty="0">
-                <a:solidFill>
-                  <a:srgbClr val="8B95A9"/>
+              <a:rPr lang="en-US" sz="950" dirty="0">
+                <a:solidFill>
+                  <a:srgbClr val="5B657A"/>
                 </a:solidFill>
                 <a:latin typeface="Calibri" pitchFamily="34" charset="0"/>
                 <a:ea typeface="Calibri" pitchFamily="34" charset="-122"/>
                 <a:cs typeface="Calibri" pitchFamily="34" charset="-120"/>
               </a:rPr>
-              <a:t>Q4 FY2026 — where it finished</a:t>
-            </a:r>
-            <a:endParaRPr lang="en-US" sz="1200" dirty="0"/>
-          </a:p>
-        </p:txBody>
-      </p:sp>
-      <p:sp>
-        <p:nvSpPr>
-          <p:cNvPr id="14" name="Text 11"/>
-          <p:cNvSpPr/>
-          <p:nvPr/>
-        </p:nvSpPr>
-        <p:spPr>
-          <a:xfrm>
-            <a:off x="566928" y="6382512"/>
-            <a:ext cx="11027664" cy="274320"/>
-          </a:xfrm>
-          <a:prstGeom prst="rect">
-            <a:avLst/>
-          </a:prstGeom>
-          <a:noFill/>
-          <a:ln/>
-        </p:spPr>
-        <p:txBody>
-          <a:bodyPr wrap="square" lIns="0" tIns="0" rIns="0" bIns="0" rtlCol="0" anchor="ctr"/>
-          <a:lstStyle/>
-          <a:p>
-            <a:pPr indent="0" marL="0">
-              <a:buNone/>
-            </a:pPr>
-            <a:r>
-              <a:rPr lang="en-US" sz="950" dirty="0">
-                <a:solidFill>
-                  <a:srgbClr val="5B657A"/>
-                </a:solidFill>
-                <a:latin typeface="Calibri" pitchFamily="34" charset="0"/>
-                <a:ea typeface="Calibri" pitchFamily="34" charset="-122"/>
-                <a:cs typeface="Calibri" pitchFamily="34" charset="-120"/>
-              </a:rPr>
-              <a:t>GAAP diluted EPS. Q4 non-GAAP EPS was $39.25, against a consensus near $33.38.</a:t>
+              <a:t>Non-GAAP gross margin as reported each quarter. Q4 FY2026: 84.6%.</a:t>
             </a:r>
             <a:endParaRPr lang="en-US" sz="950" dirty="0"/>
           </a:p>
@@ -7622,6 +8704,9 @@
   <p:clrMapOvr>
     <a:masterClrMapping/>
   </p:clrMapOvr>
+  <p:transition spd="med" advClick="1">
+    <p:fade/>
+  </p:transition>
 </p:sld>
 </file>
 
@@ -7649,498 +8734,47 @@
           <a:chExt cx="0" cy="0"/>
         </a:xfrm>
       </p:grpSpPr>
-      <p:sp>
-        <p:nvSpPr>
-          <p:cNvPr id="2" name="Text 0"/>
-          <p:cNvSpPr/>
-          <p:nvPr/>
-        </p:nvSpPr>
-        <p:spPr>
-          <a:xfrm>
-            <a:off x="566928" y="475488"/>
-            <a:ext cx="11027664" cy="566928"/>
-          </a:xfrm>
-          <a:prstGeom prst="rect">
-            <a:avLst/>
-          </a:prstGeom>
-          <a:noFill/>
-          <a:ln/>
-        </p:spPr>
-        <p:txBody>
-          <a:bodyPr wrap="square" lIns="0" tIns="0" rIns="0" bIns="0" rtlCol="0" anchor="ctr"/>
-          <a:lstStyle/>
-          <a:p>
-            <a:pPr indent="0" marL="0">
-              <a:buNone/>
-            </a:pPr>
-            <a:r>
-              <a:rPr lang="en-US" sz="3400" b="1" dirty="0">
-                <a:solidFill>
-                  <a:srgbClr val="FFFFFF"/>
-                </a:solidFill>
-                <a:latin typeface="Arial" pitchFamily="34" charset="0"/>
-                <a:ea typeface="Arial" pitchFamily="34" charset="-122"/>
-                <a:cs typeface="Arial" pitchFamily="34" charset="-120"/>
-              </a:rPr>
-              <a:t>Where the revenue comes from</a:t>
-            </a:r>
-            <a:endParaRPr lang="en-US" sz="3400" dirty="0"/>
-          </a:p>
-        </p:txBody>
-      </p:sp>
-      <p:sp>
-        <p:nvSpPr>
-          <p:cNvPr id="3" name="Text 1"/>
-          <p:cNvSpPr/>
-          <p:nvPr/>
-        </p:nvSpPr>
-        <p:spPr>
-          <a:xfrm>
-            <a:off x="566928" y="1060704"/>
-            <a:ext cx="11027664" cy="365760"/>
-          </a:xfrm>
-          <a:prstGeom prst="rect">
-            <a:avLst/>
-          </a:prstGeom>
-          <a:noFill/>
-          <a:ln/>
-        </p:spPr>
-        <p:txBody>
-          <a:bodyPr wrap="square" lIns="0" tIns="0" rIns="0" bIns="0" rtlCol="0" anchor="ctr"/>
-          <a:lstStyle/>
-          <a:p>
-            <a:pPr indent="0" marL="0">
-              <a:buNone/>
-            </a:pPr>
-            <a:r>
-              <a:rPr lang="en-US" sz="1500" dirty="0">
-                <a:solidFill>
-                  <a:srgbClr val="8B95A9"/>
-                </a:solidFill>
-                <a:latin typeface="Calibri" pitchFamily="34" charset="0"/>
-                <a:ea typeface="Calibri" pitchFamily="34" charset="-122"/>
-                <a:cs typeface="Calibri" pitchFamily="34" charset="-120"/>
-              </a:rPr>
-              <a:t>FY2026 by segment — and what changed</a:t>
-            </a:r>
-            <a:endParaRPr lang="en-US" sz="1500" dirty="0"/>
-          </a:p>
-        </p:txBody>
-      </p:sp>
-      <p:graphicFrame>
-        <p:nvGraphicFramePr>
-          <p:cNvPr id="4" name="Chart 0" descr=""/>
-          <p:cNvGraphicFramePr/>
-          <p:nvPr/>
-        </p:nvGraphicFramePr>
-        <p:xfrm>
-          <a:off x="566928" y="1691640"/>
-          <a:ext cx="6949440" cy="3200400"/>
-        </p:xfrm>
-        <a:graphic xmlns:a="http://schemas.openxmlformats.org/drawingml/2006/main">
-          <a:graphicData uri="http://schemas.openxmlformats.org/drawingml/2006/chart">
-            <c:chart xmlns:c="http://schemas.openxmlformats.org/drawingml/2006/chart" r:id="rId1"/>
-          </a:graphicData>
-        </a:graphic>
-      </p:graphicFrame>
-      <p:sp>
-        <p:nvSpPr>
-          <p:cNvPr id="5" name="Shape 2"/>
-          <p:cNvSpPr/>
-          <p:nvPr/>
-        </p:nvSpPr>
-        <p:spPr>
-          <a:xfrm>
-            <a:off x="7882128" y="1691640"/>
-            <a:ext cx="3712464" cy="1463040"/>
-          </a:xfrm>
-          <a:prstGeom prst="roundRect">
-            <a:avLst>
-              <a:gd name="adj" fmla="val 7500"/>
-            </a:avLst>
-          </a:prstGeom>
-          <a:solidFill>
-            <a:srgbClr val="151C2A"/>
-          </a:solidFill>
-          <a:ln w="12700">
-            <a:solidFill>
-              <a:srgbClr val="151C2A"/>
-            </a:solidFill>
-            <a:prstDash val="solid"/>
-          </a:ln>
-        </p:spPr>
-      </p:sp>
-      <p:sp>
-        <p:nvSpPr>
-          <p:cNvPr id="6" name="Text 3"/>
-          <p:cNvSpPr/>
-          <p:nvPr/>
-        </p:nvSpPr>
-        <p:spPr>
-          <a:xfrm>
-            <a:off x="8101584" y="1837944"/>
-            <a:ext cx="3273552" cy="672998"/>
-          </a:xfrm>
-          <a:prstGeom prst="rect">
-            <a:avLst/>
-          </a:prstGeom>
-          <a:noFill/>
-          <a:ln/>
-        </p:spPr>
-        <p:txBody>
-          <a:bodyPr wrap="square" lIns="0" tIns="0" rIns="0" bIns="0" rtlCol="0" anchor="ctr"/>
-          <a:lstStyle/>
-          <a:p>
-            <a:pPr indent="0" marL="0">
-              <a:buNone/>
-            </a:pPr>
-            <a:r>
-              <a:rPr lang="en-US" sz="4000" b="1" dirty="0">
-                <a:solidFill>
-                  <a:srgbClr val="3B82F6"/>
-                </a:solidFill>
-                <a:latin typeface="Arial" pitchFamily="34" charset="0"/>
-                <a:ea typeface="Arial" pitchFamily="34" charset="-122"/>
-                <a:cs typeface="Arial" pitchFamily="34" charset="-120"/>
-              </a:rPr>
-              <a:t>+437%</a:t>
-            </a:r>
-            <a:endParaRPr lang="en-US" sz="4000" dirty="0"/>
-          </a:p>
-        </p:txBody>
-      </p:sp>
-      <p:sp>
-        <p:nvSpPr>
-          <p:cNvPr id="7" name="Text 4"/>
-          <p:cNvSpPr/>
-          <p:nvPr/>
-        </p:nvSpPr>
-        <p:spPr>
-          <a:xfrm>
-            <a:off x="8101584" y="2627986"/>
-            <a:ext cx="3273552" cy="468173"/>
-          </a:xfrm>
-          <a:prstGeom prst="rect">
-            <a:avLst/>
-          </a:prstGeom>
-          <a:noFill/>
-          <a:ln/>
-        </p:spPr>
-        <p:txBody>
-          <a:bodyPr wrap="square" lIns="0" tIns="0" rIns="0" bIns="0" rtlCol="0" anchor="t"/>
-          <a:lstStyle/>
-          <a:p>
-            <a:pPr indent="0" marL="0">
-              <a:buNone/>
-            </a:pPr>
-            <a:r>
-              <a:rPr lang="en-US" sz="1200" dirty="0">
-                <a:solidFill>
-                  <a:srgbClr val="8B95A9"/>
-                </a:solidFill>
-                <a:latin typeface="Calibri" pitchFamily="34" charset="0"/>
-                <a:ea typeface="Calibri" pitchFamily="34" charset="-122"/>
-                <a:cs typeface="Calibri" pitchFamily="34" charset="-120"/>
-              </a:rPr>
-              <a:t>Datacenter revenue, year over year</a:t>
-            </a:r>
-            <a:endParaRPr lang="en-US" sz="1200" dirty="0"/>
-          </a:p>
-        </p:txBody>
-      </p:sp>
-      <p:sp>
-        <p:nvSpPr>
-          <p:cNvPr id="8" name="Shape 5"/>
-          <p:cNvSpPr/>
-          <p:nvPr/>
-        </p:nvSpPr>
-        <p:spPr>
-          <a:xfrm>
-            <a:off x="7882128" y="3310128"/>
-            <a:ext cx="3712464" cy="1463040"/>
-          </a:xfrm>
-          <a:prstGeom prst="roundRect">
-            <a:avLst>
-              <a:gd name="adj" fmla="val 7500"/>
-            </a:avLst>
-          </a:prstGeom>
-          <a:solidFill>
-            <a:srgbClr val="151C2A"/>
-          </a:solidFill>
-          <a:ln w="12700">
-            <a:solidFill>
-              <a:srgbClr val="151C2A"/>
-            </a:solidFill>
-            <a:prstDash val="solid"/>
-          </a:ln>
-        </p:spPr>
-      </p:sp>
-      <p:sp>
-        <p:nvSpPr>
-          <p:cNvPr id="9" name="Text 6"/>
-          <p:cNvSpPr/>
-          <p:nvPr/>
-        </p:nvSpPr>
-        <p:spPr>
-          <a:xfrm>
-            <a:off x="8101584" y="3456432"/>
-            <a:ext cx="3273552" cy="672998"/>
-          </a:xfrm>
-          <a:prstGeom prst="rect">
-            <a:avLst/>
-          </a:prstGeom>
-          <a:noFill/>
-          <a:ln/>
-        </p:spPr>
-        <p:txBody>
-          <a:bodyPr wrap="square" lIns="0" tIns="0" rIns="0" bIns="0" rtlCol="0" anchor="ctr"/>
-          <a:lstStyle/>
-          <a:p>
-            <a:pPr indent="0" marL="0">
-              <a:buNone/>
-            </a:pPr>
-            <a:r>
-              <a:rPr lang="en-US" sz="2600" b="1" dirty="0">
-                <a:solidFill>
-                  <a:srgbClr val="3B82F6"/>
-                </a:solidFill>
-                <a:latin typeface="Arial" pitchFamily="34" charset="0"/>
-                <a:ea typeface="Arial" pitchFamily="34" charset="-122"/>
-                <a:cs typeface="Arial" pitchFamily="34" charset="-120"/>
-              </a:rPr>
-              <a:t>12% → 38%</a:t>
-            </a:r>
-            <a:endParaRPr lang="en-US" sz="2600" dirty="0"/>
-          </a:p>
-        </p:txBody>
-      </p:sp>
-      <p:sp>
-        <p:nvSpPr>
-          <p:cNvPr id="10" name="Text 7"/>
-          <p:cNvSpPr/>
-          <p:nvPr/>
-        </p:nvSpPr>
-        <p:spPr>
-          <a:xfrm>
-            <a:off x="8101584" y="4246474"/>
-            <a:ext cx="3273552" cy="468173"/>
-          </a:xfrm>
-          <a:prstGeom prst="rect">
-            <a:avLst/>
-          </a:prstGeom>
-          <a:noFill/>
-          <a:ln/>
-        </p:spPr>
-        <p:txBody>
-          <a:bodyPr wrap="square" lIns="0" tIns="0" rIns="0" bIns="0" rtlCol="0" anchor="t"/>
-          <a:lstStyle/>
-          <a:p>
-            <a:pPr indent="0" marL="0">
-              <a:buNone/>
-            </a:pPr>
-            <a:r>
-              <a:rPr lang="en-US" sz="1200" dirty="0">
-                <a:solidFill>
-                  <a:srgbClr val="8B95A9"/>
-                </a:solidFill>
-                <a:latin typeface="Calibri" pitchFamily="34" charset="0"/>
-                <a:ea typeface="Calibri" pitchFamily="34" charset="-122"/>
-                <a:cs typeface="Calibri" pitchFamily="34" charset="-120"/>
-              </a:rPr>
-              <a:t>Datacenter share of the portfolio, in one year</a:t>
-            </a:r>
-            <a:endParaRPr lang="en-US" sz="1200" dirty="0"/>
-          </a:p>
-        </p:txBody>
-      </p:sp>
-      <p:sp>
-        <p:nvSpPr>
-          <p:cNvPr id="11" name="Shape 8"/>
-          <p:cNvSpPr/>
-          <p:nvPr/>
-        </p:nvSpPr>
-        <p:spPr>
-          <a:xfrm>
-            <a:off x="7882128" y="4928616"/>
-            <a:ext cx="3712464" cy="1005840"/>
-          </a:xfrm>
-          <a:prstGeom prst="roundRect">
-            <a:avLst>
-              <a:gd name="adj" fmla="val 10909"/>
-            </a:avLst>
-          </a:prstGeom>
-          <a:solidFill>
-            <a:srgbClr val="151C2A"/>
-          </a:solidFill>
-          <a:ln w="12700">
-            <a:solidFill>
-              <a:srgbClr val="151C2A"/>
-            </a:solidFill>
-            <a:prstDash val="solid"/>
-          </a:ln>
-        </p:spPr>
-      </p:sp>
-      <p:sp>
-        <p:nvSpPr>
-          <p:cNvPr id="12" name="Text 9"/>
-          <p:cNvSpPr/>
-          <p:nvPr/>
-        </p:nvSpPr>
-        <p:spPr>
-          <a:xfrm>
-            <a:off x="8101584" y="5074920"/>
-            <a:ext cx="3273552" cy="462686"/>
-          </a:xfrm>
-          <a:prstGeom prst="rect">
-            <a:avLst/>
-          </a:prstGeom>
-          <a:noFill/>
-          <a:ln/>
-        </p:spPr>
-        <p:txBody>
-          <a:bodyPr wrap="square" lIns="0" tIns="0" rIns="0" bIns="0" rtlCol="0" anchor="ctr"/>
-          <a:lstStyle/>
-          <a:p>
-            <a:pPr indent="0" marL="0">
-              <a:buNone/>
-            </a:pPr>
-            <a:r>
-              <a:rPr lang="en-US" sz="2400" b="1" dirty="0">
-                <a:solidFill>
-                  <a:srgbClr val="EA580C"/>
-                </a:solidFill>
-                <a:latin typeface="Arial" pitchFamily="34" charset="0"/>
-                <a:ea typeface="Arial" pitchFamily="34" charset="-122"/>
-                <a:cs typeface="Arial" pitchFamily="34" charset="-120"/>
-              </a:rPr>
-              <a:t>−32%</a:t>
-            </a:r>
-            <a:endParaRPr lang="en-US" sz="2400" dirty="0"/>
-          </a:p>
-        </p:txBody>
-      </p:sp>
-      <p:sp>
-        <p:nvSpPr>
-          <p:cNvPr id="13" name="Text 10"/>
-          <p:cNvSpPr/>
-          <p:nvPr/>
-        </p:nvSpPr>
-        <p:spPr>
-          <a:xfrm>
-            <a:off x="8101584" y="5572354"/>
-            <a:ext cx="3273552" cy="321869"/>
-          </a:xfrm>
-          <a:prstGeom prst="rect">
-            <a:avLst/>
-          </a:prstGeom>
-          <a:noFill/>
-          <a:ln/>
-        </p:spPr>
-        <p:txBody>
-          <a:bodyPr wrap="square" lIns="0" tIns="0" rIns="0" bIns="0" rtlCol="0" anchor="t"/>
-          <a:lstStyle/>
-          <a:p>
-            <a:pPr indent="0" marL="0">
-              <a:buNone/>
-            </a:pPr>
-            <a:r>
-              <a:rPr lang="en-US" sz="1200" dirty="0">
-                <a:solidFill>
-                  <a:srgbClr val="8B95A9"/>
-                </a:solidFill>
-                <a:latin typeface="Calibri" pitchFamily="34" charset="0"/>
-                <a:ea typeface="Calibri" pitchFamily="34" charset="-122"/>
-                <a:cs typeface="Calibri" pitchFamily="34" charset="-120"/>
-              </a:rPr>
-              <a:t>Consumer revenue, Q4 sequentially</a:t>
-            </a:r>
-            <a:endParaRPr lang="en-US" sz="1200" dirty="0"/>
-          </a:p>
-        </p:txBody>
-      </p:sp>
-      <p:sp>
-        <p:nvSpPr>
-          <p:cNvPr id="14" name="Text 11"/>
-          <p:cNvSpPr/>
-          <p:nvPr/>
-        </p:nvSpPr>
-        <p:spPr>
-          <a:xfrm>
-            <a:off x="566928" y="5074920"/>
-            <a:ext cx="6949440" cy="777240"/>
-          </a:xfrm>
-          <a:prstGeom prst="rect">
-            <a:avLst/>
-          </a:prstGeom>
-          <a:noFill/>
-          <a:ln/>
-        </p:spPr>
-        <p:txBody>
-          <a:bodyPr wrap="square" lIns="0" tIns="0" rIns="0" bIns="0" rtlCol="0" anchor="ctr"/>
-          <a:lstStyle/>
-          <a:p>
-            <a:pPr indent="0" marL="0">
-              <a:buNone/>
-            </a:pPr>
-            <a:r>
-              <a:rPr lang="en-US" sz="1300" dirty="0">
-                <a:solidFill>
-                  <a:srgbClr val="E8ECF4"/>
-                </a:solidFill>
-                <a:latin typeface="Calibri" pitchFamily="34" charset="0"/>
-                <a:ea typeface="Calibri" pitchFamily="34" charset="-122"/>
-                <a:cs typeface="Calibri" pitchFamily="34" charset="-120"/>
-              </a:rPr>
-              <a:t>Edge is still the largest segment. Datacenter is the one that re-rated the company — and Consumer is shrinking as capacity is pointed at higher-value customers.</a:t>
-            </a:r>
-            <a:endParaRPr lang="en-US" sz="1300" dirty="0"/>
-          </a:p>
-        </p:txBody>
-      </p:sp>
-      <p:sp>
-        <p:nvSpPr>
-          <p:cNvPr id="15" name="Text 12"/>
-          <p:cNvSpPr/>
-          <p:nvPr/>
-        </p:nvSpPr>
-        <p:spPr>
-          <a:xfrm>
-            <a:off x="566928" y="6382512"/>
-            <a:ext cx="11027664" cy="274320"/>
-          </a:xfrm>
-          <a:prstGeom prst="rect">
-            <a:avLst/>
-          </a:prstGeom>
-          <a:noFill/>
-          <a:ln/>
-        </p:spPr>
-        <p:txBody>
-          <a:bodyPr wrap="square" lIns="0" tIns="0" rIns="0" bIns="0" rtlCol="0" anchor="ctr"/>
-          <a:lstStyle/>
-          <a:p>
-            <a:pPr indent="0" marL="0">
-              <a:buNone/>
-            </a:pPr>
-            <a:r>
-              <a:rPr lang="en-US" sz="950" dirty="0">
-                <a:solidFill>
-                  <a:srgbClr val="5B657A"/>
-                </a:solidFill>
-                <a:latin typeface="Calibri" pitchFamily="34" charset="0"/>
-                <a:ea typeface="Calibri" pitchFamily="34" charset="-122"/>
-                <a:cs typeface="Calibri" pitchFamily="34" charset="-120"/>
-              </a:rPr>
-              <a:t>FY2026 segment revenue. The three segments sum to the reported $20.25B total.</a:t>
-            </a:r>
-            <a:endParaRPr lang="en-US" sz="950" dirty="0"/>
-          </a:p>
-        </p:txBody>
-      </p:sp>
+      <p:pic>
+        <p:nvPicPr>
+          <p:cNvPr id="3" name="Media 0">
+            <a:hlinkClick r:id="" action="ppaction://media"/>
+          </p:cNvPr>
+          <p:cNvPicPr>
+            <a:picLocks noChangeAspect="1"/>
+          </p:cNvPicPr>
+          <p:nvPr>
+            <a:videoFile r:link="rId1"/>
+            <p:extLst>
+              <p:ext uri="{DAA4B4D4-6D71-4841-9C94-3DE7FCFB9230}">
+                <p14:media xmlns:p14="http://schemas.microsoft.com/office/powerpoint/2010/main" r:embed="rId2"/>
+              </p:ext>
+            </p:extLst>
+          </p:nvPr>
+        </p:nvPicPr>
+        <p:blipFill>
+          <a:blip r:embed="rId3"/>
+          <a:stretch>
+            <a:fillRect/>
+          </a:stretch>
+        </p:blipFill>
+        <p:spPr>
+          <a:xfrm>
+            <a:off x="0" y="0"/>
+            <a:ext cx="12191970" cy="6858000"/>
+          </a:xfrm>
+          <a:prstGeom prst="rect">
+            <a:avLst/>
+          </a:prstGeom>
+        </p:spPr>
+      </p:pic>
     </p:spTree>
   </p:cSld>
   <p:clrMapOvr>
     <a:masterClrMapping/>
   </p:clrMapOvr>
+  <p:transition spd="med" advClick="1">
+    <p:fade/>
+  </p:transition>
 </p:sld>
 </file>
 
@@ -8201,7 +8835,7 @@
                 <a:ea typeface="Arial" pitchFamily="34" charset="-122"/>
                 <a:cs typeface="Arial" pitchFamily="34" charset="-120"/>
               </a:rPr>
-              <a:t>Why the numbers moved</a:t>
+              <a:t>Earnings per share</a:t>
             </a:r>
             <a:endParaRPr lang="en-US" sz="3400" dirty="0"/>
           </a:p>
@@ -8240,26 +8874,42 @@
                 <a:ea typeface="Calibri" pitchFamily="34" charset="-122"/>
                 <a:cs typeface="Calibri" pitchFamily="34" charset="-120"/>
               </a:rPr>
-              <a:t>Three things behind the re-rating</a:t>
+              <a:t>GAAP diluted, by quarter</a:t>
             </a:r>
             <a:endParaRPr lang="en-US" sz="1500" dirty="0"/>
           </a:p>
         </p:txBody>
       </p:sp>
-      <p:sp>
-        <p:nvSpPr>
-          <p:cNvPr id="4" name="Shape 2"/>
-          <p:cNvSpPr/>
-          <p:nvPr/>
-        </p:nvSpPr>
-        <p:spPr>
-          <a:xfrm>
-            <a:off x="566928" y="1810512"/>
-            <a:ext cx="3480816" cy="3877056"/>
+      <p:graphicFrame>
+        <p:nvGraphicFramePr>
+          <p:cNvPr id="4" name="Chart 0" descr=""/>
+          <p:cNvGraphicFramePr/>
+          <p:nvPr/>
+        </p:nvGraphicFramePr>
+        <p:xfrm>
+          <a:off x="566928" y="1600200"/>
+          <a:ext cx="7406640" cy="4160520"/>
+        </p:xfrm>
+        <a:graphic xmlns:a="http://schemas.openxmlformats.org/drawingml/2006/main">
+          <a:graphicData uri="http://schemas.openxmlformats.org/drawingml/2006/chart">
+            <c:chart xmlns:c="http://schemas.openxmlformats.org/drawingml/2006/chart" r:id="rId1"/>
+          </a:graphicData>
+        </a:graphic>
+      </p:graphicFrame>
+      <p:sp>
+        <p:nvSpPr>
+          <p:cNvPr id="5" name="Shape 2"/>
+          <p:cNvSpPr/>
+          <p:nvPr/>
+        </p:nvSpPr>
+        <p:spPr>
+          <a:xfrm>
+            <a:off x="8275320" y="1737360"/>
+            <a:ext cx="3319272" cy="1371600"/>
           </a:xfrm>
           <a:prstGeom prst="roundRect">
             <a:avLst>
-              <a:gd name="adj" fmla="val 3152"/>
+              <a:gd name="adj" fmla="val 8000"/>
             </a:avLst>
           </a:prstGeom>
           <a:solidFill>
@@ -8275,39 +8925,14 @@
       </p:sp>
       <p:sp>
         <p:nvSpPr>
-          <p:cNvPr id="5" name="Shape 3"/>
-          <p:cNvSpPr/>
-          <p:nvPr/>
-        </p:nvSpPr>
-        <p:spPr>
-          <a:xfrm>
-            <a:off x="859536" y="2103120"/>
-            <a:ext cx="566928" cy="566928"/>
-          </a:xfrm>
-          <a:prstGeom prst="ellipse">
-            <a:avLst/>
-          </a:prstGeom>
-          <a:solidFill>
-            <a:srgbClr val="3B82F6"/>
-          </a:solidFill>
-          <a:ln w="12700">
-            <a:solidFill>
-              <a:srgbClr val="3B82F6"/>
-            </a:solidFill>
-            <a:prstDash val="solid"/>
-          </a:ln>
-        </p:spPr>
-      </p:sp>
-      <p:sp>
-        <p:nvSpPr>
-          <p:cNvPr id="6" name="Text 4"/>
-          <p:cNvSpPr/>
-          <p:nvPr/>
-        </p:nvSpPr>
-        <p:spPr>
-          <a:xfrm>
-            <a:off x="859536" y="2103120"/>
-            <a:ext cx="566928" cy="566928"/>
+          <p:cNvPr id="6" name="Text 3"/>
+          <p:cNvSpPr/>
+          <p:nvPr/>
+        </p:nvSpPr>
+        <p:spPr>
+          <a:xfrm>
+            <a:off x="8494776" y="1883664"/>
+            <a:ext cx="2880360" cy="630936"/>
           </a:xfrm>
           <a:prstGeom prst="rect">
             <a:avLst/>
@@ -8319,34 +8944,34 @@
           <a:bodyPr wrap="square" lIns="0" tIns="0" rIns="0" bIns="0" rtlCol="0" anchor="ctr"/>
           <a:lstStyle/>
           <a:p>
-            <a:pPr algn="ctr" indent="0" marL="0">
-              <a:buNone/>
-            </a:pPr>
-            <a:r>
-              <a:rPr lang="en-US" sz="2000" b="1" dirty="0">
-                <a:solidFill>
-                  <a:srgbClr val="FFFFFF"/>
+            <a:pPr indent="0" marL="0">
+              <a:buNone/>
+            </a:pPr>
+            <a:r>
+              <a:rPr lang="en-US" sz="4000" b="1" dirty="0">
+                <a:solidFill>
+                  <a:srgbClr val="3B82F6"/>
                 </a:solidFill>
                 <a:latin typeface="Arial" pitchFamily="34" charset="0"/>
                 <a:ea typeface="Arial" pitchFamily="34" charset="-122"/>
                 <a:cs typeface="Arial" pitchFamily="34" charset="-120"/>
               </a:rPr>
-              <a:t>1</a:t>
-            </a:r>
-            <a:endParaRPr lang="en-US" sz="2000" dirty="0"/>
-          </a:p>
-        </p:txBody>
-      </p:sp>
-      <p:sp>
-        <p:nvSpPr>
-          <p:cNvPr id="7" name="Text 5"/>
-          <p:cNvSpPr/>
-          <p:nvPr/>
-        </p:nvSpPr>
-        <p:spPr>
-          <a:xfrm>
-            <a:off x="859536" y="2871216"/>
-            <a:ext cx="2895600" cy="731520"/>
+              <a:t>$73.76</a:t>
+            </a:r>
+            <a:endParaRPr lang="en-US" sz="4000" dirty="0"/>
+          </a:p>
+        </p:txBody>
+      </p:sp>
+      <p:sp>
+        <p:nvSpPr>
+          <p:cNvPr id="7" name="Text 4"/>
+          <p:cNvSpPr/>
+          <p:nvPr/>
+        </p:nvSpPr>
+        <p:spPr>
+          <a:xfrm>
+            <a:off x="8494776" y="2615184"/>
+            <a:ext cx="2880360" cy="438912"/>
           </a:xfrm>
           <a:prstGeom prst="rect">
             <a:avLst/>
@@ -8362,76 +8987,34 @@
               <a:buNone/>
             </a:pPr>
             <a:r>
-              <a:rPr lang="en-US" sz="1700" b="1" dirty="0">
-                <a:solidFill>
-                  <a:srgbClr val="FFFFFF"/>
-                </a:solidFill>
-                <a:latin typeface="Arial" pitchFamily="34" charset="0"/>
-                <a:ea typeface="Arial" pitchFamily="34" charset="-122"/>
-                <a:cs typeface="Arial" pitchFamily="34" charset="-120"/>
-              </a:rPr>
-              <a:t>AI data centre demand</a:t>
-            </a:r>
-            <a:endParaRPr lang="en-US" sz="1700" dirty="0"/>
-          </a:p>
-        </p:txBody>
-      </p:sp>
-      <p:sp>
-        <p:nvSpPr>
-          <p:cNvPr id="8" name="Text 6"/>
-          <p:cNvSpPr/>
-          <p:nvPr/>
-        </p:nvSpPr>
-        <p:spPr>
-          <a:xfrm>
-            <a:off x="859536" y="3675888"/>
-            <a:ext cx="2895600" cy="1828800"/>
-          </a:xfrm>
-          <a:prstGeom prst="rect">
-            <a:avLst/>
-          </a:prstGeom>
-          <a:noFill/>
-          <a:ln/>
-        </p:spPr>
-        <p:txBody>
-          <a:bodyPr wrap="square" lIns="0" tIns="0" rIns="0" bIns="0" rtlCol="0" anchor="t"/>
-          <a:lstStyle/>
-          <a:p>
-            <a:pPr indent="0" marL="0">
-              <a:lnSpc>
-                <a:spcPts val="1700"/>
-              </a:lnSpc>
-              <a:buNone/>
-            </a:pPr>
-            <a:r>
-              <a:rPr lang="en-US" sz="1250" dirty="0">
-                <a:solidFill>
-                  <a:srgbClr val="E8ECF4"/>
+              <a:rPr lang="en-US" sz="1200" dirty="0">
+                <a:solidFill>
+                  <a:srgbClr val="8B95A9"/>
                 </a:solidFill>
                 <a:latin typeface="Calibri" pitchFamily="34" charset="0"/>
                 <a:ea typeface="Calibri" pitchFamily="34" charset="-122"/>
                 <a:cs typeface="Calibri" pitchFamily="34" charset="-120"/>
               </a:rPr>
-              <a:t>Enterprise AI storage capacity sold out under long-term agreements, with multi-year customer commitments behind it rather than spot orders.</a:t>
-            </a:r>
-            <a:endParaRPr lang="en-US" sz="1250" dirty="0"/>
-          </a:p>
-        </p:txBody>
-      </p:sp>
-      <p:sp>
-        <p:nvSpPr>
-          <p:cNvPr id="9" name="Shape 7"/>
-          <p:cNvSpPr/>
-          <p:nvPr/>
-        </p:nvSpPr>
-        <p:spPr>
-          <a:xfrm>
-            <a:off x="4340352" y="1810512"/>
-            <a:ext cx="3480816" cy="3877056"/>
+              <a:t>FY2026 GAAP diluted EPS</a:t>
+            </a:r>
+            <a:endParaRPr lang="en-US" sz="1200" dirty="0"/>
+          </a:p>
+        </p:txBody>
+      </p:sp>
+      <p:sp>
+        <p:nvSpPr>
+          <p:cNvPr id="8" name="Shape 5"/>
+          <p:cNvSpPr/>
+          <p:nvPr/>
+        </p:nvSpPr>
+        <p:spPr>
+          <a:xfrm>
+            <a:off x="8275320" y="3291840"/>
+            <a:ext cx="3319272" cy="1170432"/>
           </a:xfrm>
           <a:prstGeom prst="roundRect">
             <a:avLst>
-              <a:gd name="adj" fmla="val 3152"/>
+              <a:gd name="adj" fmla="val 9375"/>
             </a:avLst>
           </a:prstGeom>
           <a:solidFill>
@@ -8447,39 +9030,14 @@
       </p:sp>
       <p:sp>
         <p:nvSpPr>
-          <p:cNvPr id="10" name="Shape 8"/>
-          <p:cNvSpPr/>
-          <p:nvPr/>
-        </p:nvSpPr>
-        <p:spPr>
-          <a:xfrm>
-            <a:off x="4632960" y="2103120"/>
-            <a:ext cx="566928" cy="566928"/>
-          </a:xfrm>
-          <a:prstGeom prst="ellipse">
-            <a:avLst/>
-          </a:prstGeom>
-          <a:solidFill>
-            <a:srgbClr val="0D9488"/>
-          </a:solidFill>
-          <a:ln w="12700">
-            <a:solidFill>
-              <a:srgbClr val="0D9488"/>
-            </a:solidFill>
-            <a:prstDash val="solid"/>
-          </a:ln>
-        </p:spPr>
-      </p:sp>
-      <p:sp>
-        <p:nvSpPr>
-          <p:cNvPr id="11" name="Text 9"/>
-          <p:cNvSpPr/>
-          <p:nvPr/>
-        </p:nvSpPr>
-        <p:spPr>
-          <a:xfrm>
-            <a:off x="4632960" y="2103120"/>
-            <a:ext cx="566928" cy="566928"/>
+          <p:cNvPr id="9" name="Text 6"/>
+          <p:cNvSpPr/>
+          <p:nvPr/>
+        </p:nvSpPr>
+        <p:spPr>
+          <a:xfrm>
+            <a:off x="8494776" y="3438144"/>
+            <a:ext cx="2880360" cy="538399"/>
           </a:xfrm>
           <a:prstGeom prst="rect">
             <a:avLst/>
@@ -8491,34 +9049,34 @@
           <a:bodyPr wrap="square" lIns="0" tIns="0" rIns="0" bIns="0" rtlCol="0" anchor="ctr"/>
           <a:lstStyle/>
           <a:p>
-            <a:pPr algn="ctr" indent="0" marL="0">
-              <a:buNone/>
-            </a:pPr>
-            <a:r>
-              <a:rPr lang="en-US" sz="2000" b="1" dirty="0">
-                <a:solidFill>
-                  <a:srgbClr val="FFFFFF"/>
+            <a:pPr indent="0" marL="0">
+              <a:buNone/>
+            </a:pPr>
+            <a:r>
+              <a:rPr lang="en-US" sz="3000" b="1" dirty="0">
+                <a:solidFill>
+                  <a:srgbClr val="8B95A9"/>
                 </a:solidFill>
                 <a:latin typeface="Arial" pitchFamily="34" charset="0"/>
                 <a:ea typeface="Arial" pitchFamily="34" charset="-122"/>
                 <a:cs typeface="Arial" pitchFamily="34" charset="-120"/>
               </a:rPr>
-              <a:t>2</a:t>
-            </a:r>
-            <a:endParaRPr lang="en-US" sz="2000" dirty="0"/>
-          </a:p>
-        </p:txBody>
-      </p:sp>
-      <p:sp>
-        <p:nvSpPr>
-          <p:cNvPr id="12" name="Text 10"/>
-          <p:cNvSpPr/>
-          <p:nvPr/>
-        </p:nvSpPr>
-        <p:spPr>
-          <a:xfrm>
-            <a:off x="4632960" y="2871216"/>
-            <a:ext cx="2895600" cy="731520"/>
+              <a:t>$0.75</a:t>
+            </a:r>
+            <a:endParaRPr lang="en-US" sz="3000" dirty="0"/>
+          </a:p>
+        </p:txBody>
+      </p:sp>
+      <p:sp>
+        <p:nvSpPr>
+          <p:cNvPr id="10" name="Text 7"/>
+          <p:cNvSpPr/>
+          <p:nvPr/>
+        </p:nvSpPr>
+        <p:spPr>
+          <a:xfrm>
+            <a:off x="8494776" y="4040916"/>
+            <a:ext cx="2880360" cy="374538"/>
           </a:xfrm>
           <a:prstGeom prst="rect">
             <a:avLst/>
@@ -8534,76 +9092,34 @@
               <a:buNone/>
             </a:pPr>
             <a:r>
-              <a:rPr lang="en-US" sz="1700" b="1" dirty="0">
-                <a:solidFill>
-                  <a:srgbClr val="FFFFFF"/>
-                </a:solidFill>
-                <a:latin typeface="Arial" pitchFamily="34" charset="0"/>
-                <a:ea typeface="Arial" pitchFamily="34" charset="-122"/>
-                <a:cs typeface="Arial" pitchFamily="34" charset="-120"/>
-              </a:rPr>
-              <a:t>BiCS10, the tenth-generation NAND</a:t>
-            </a:r>
-            <a:endParaRPr lang="en-US" sz="1700" dirty="0"/>
-          </a:p>
-        </p:txBody>
-      </p:sp>
-      <p:sp>
-        <p:nvSpPr>
-          <p:cNvPr id="13" name="Text 11"/>
-          <p:cNvSpPr/>
-          <p:nvPr/>
-        </p:nvSpPr>
-        <p:spPr>
-          <a:xfrm>
-            <a:off x="4632960" y="3675888"/>
-            <a:ext cx="2895600" cy="1828800"/>
-          </a:xfrm>
-          <a:prstGeom prst="rect">
-            <a:avLst/>
-          </a:prstGeom>
-          <a:noFill/>
-          <a:ln/>
-        </p:spPr>
-        <p:txBody>
-          <a:bodyPr wrap="square" lIns="0" tIns="0" rIns="0" bIns="0" rtlCol="0" anchor="t"/>
-          <a:lstStyle/>
-          <a:p>
-            <a:pPr indent="0" marL="0">
-              <a:lnSpc>
-                <a:spcPts val="1700"/>
-              </a:lnSpc>
-              <a:buNone/>
-            </a:pPr>
-            <a:r>
-              <a:rPr lang="en-US" sz="1250" dirty="0">
-                <a:solidFill>
-                  <a:srgbClr val="E8ECF4"/>
+              <a:rPr lang="en-US" sz="1200" dirty="0">
+                <a:solidFill>
+                  <a:srgbClr val="8B95A9"/>
                 </a:solidFill>
                 <a:latin typeface="Calibri" pitchFamily="34" charset="0"/>
                 <a:ea typeface="Calibri" pitchFamily="34" charset="-122"/>
                 <a:cs typeface="Calibri" pitchFamily="34" charset="-120"/>
               </a:rPr>
-              <a:t>1Tb TLC sampling at more than 29 Gb/mm², a 59% improvement in bit density — more capacity from the same wafer.</a:t>
-            </a:r>
-            <a:endParaRPr lang="en-US" sz="1250" dirty="0"/>
-          </a:p>
-        </p:txBody>
-      </p:sp>
-      <p:sp>
-        <p:nvSpPr>
-          <p:cNvPr id="14" name="Shape 12"/>
-          <p:cNvSpPr/>
-          <p:nvPr/>
-        </p:nvSpPr>
-        <p:spPr>
-          <a:xfrm>
-            <a:off x="8113776" y="1810512"/>
-            <a:ext cx="3480816" cy="3877056"/>
+              <a:t>Q1 FY2026 — where the year started</a:t>
+            </a:r>
+            <a:endParaRPr lang="en-US" sz="1200" dirty="0"/>
+          </a:p>
+        </p:txBody>
+      </p:sp>
+      <p:sp>
+        <p:nvSpPr>
+          <p:cNvPr id="11" name="Shape 8"/>
+          <p:cNvSpPr/>
+          <p:nvPr/>
+        </p:nvSpPr>
+        <p:spPr>
+          <a:xfrm>
+            <a:off x="8275320" y="4590288"/>
+            <a:ext cx="3319272" cy="1170432"/>
           </a:xfrm>
           <a:prstGeom prst="roundRect">
             <a:avLst>
-              <a:gd name="adj" fmla="val 3152"/>
+              <a:gd name="adj" fmla="val 9375"/>
             </a:avLst>
           </a:prstGeom>
           <a:solidFill>
@@ -8619,39 +9135,14 @@
       </p:sp>
       <p:sp>
         <p:nvSpPr>
-          <p:cNvPr id="15" name="Shape 13"/>
-          <p:cNvSpPr/>
-          <p:nvPr/>
-        </p:nvSpPr>
-        <p:spPr>
-          <a:xfrm>
-            <a:off x="8406384" y="2103120"/>
-            <a:ext cx="566928" cy="566928"/>
-          </a:xfrm>
-          <a:prstGeom prst="ellipse">
-            <a:avLst/>
-          </a:prstGeom>
-          <a:solidFill>
-            <a:srgbClr val="EA580C"/>
-          </a:solidFill>
-          <a:ln w="12700">
-            <a:solidFill>
-              <a:srgbClr val="EA580C"/>
-            </a:solidFill>
-            <a:prstDash val="solid"/>
-          </a:ln>
-        </p:spPr>
-      </p:sp>
-      <p:sp>
-        <p:nvSpPr>
-          <p:cNvPr id="16" name="Text 14"/>
-          <p:cNvSpPr/>
-          <p:nvPr/>
-        </p:nvSpPr>
-        <p:spPr>
-          <a:xfrm>
-            <a:off x="8406384" y="2103120"/>
-            <a:ext cx="566928" cy="566928"/>
+          <p:cNvPr id="12" name="Text 9"/>
+          <p:cNvSpPr/>
+          <p:nvPr/>
+        </p:nvSpPr>
+        <p:spPr>
+          <a:xfrm>
+            <a:off x="8494776" y="4736592"/>
+            <a:ext cx="2880360" cy="538399"/>
           </a:xfrm>
           <a:prstGeom prst="rect">
             <a:avLst/>
@@ -8663,34 +9154,34 @@
           <a:bodyPr wrap="square" lIns="0" tIns="0" rIns="0" bIns="0" rtlCol="0" anchor="ctr"/>
           <a:lstStyle/>
           <a:p>
-            <a:pPr algn="ctr" indent="0" marL="0">
-              <a:buNone/>
-            </a:pPr>
-            <a:r>
-              <a:rPr lang="en-US" sz="2000" b="1" dirty="0">
-                <a:solidFill>
-                  <a:srgbClr val="FFFFFF"/>
+            <a:pPr indent="0" marL="0">
+              <a:buNone/>
+            </a:pPr>
+            <a:r>
+              <a:rPr lang="en-US" sz="3000" b="1" dirty="0">
+                <a:solidFill>
+                  <a:srgbClr val="4ADE80"/>
                 </a:solidFill>
                 <a:latin typeface="Arial" pitchFamily="34" charset="0"/>
                 <a:ea typeface="Arial" pitchFamily="34" charset="-122"/>
                 <a:cs typeface="Arial" pitchFamily="34" charset="-120"/>
               </a:rPr>
-              <a:t>3</a:t>
-            </a:r>
-            <a:endParaRPr lang="en-US" sz="2000" dirty="0"/>
-          </a:p>
-        </p:txBody>
-      </p:sp>
-      <p:sp>
-        <p:nvSpPr>
-          <p:cNvPr id="17" name="Text 15"/>
-          <p:cNvSpPr/>
-          <p:nvPr/>
-        </p:nvSpPr>
-        <p:spPr>
-          <a:xfrm>
-            <a:off x="8406384" y="2871216"/>
-            <a:ext cx="2895600" cy="731520"/>
+              <a:t>$43.97</a:t>
+            </a:r>
+            <a:endParaRPr lang="en-US" sz="3000" dirty="0"/>
+          </a:p>
+        </p:txBody>
+      </p:sp>
+      <p:sp>
+        <p:nvSpPr>
+          <p:cNvPr id="13" name="Text 10"/>
+          <p:cNvSpPr/>
+          <p:nvPr/>
+        </p:nvSpPr>
+        <p:spPr>
+          <a:xfrm>
+            <a:off x="8494776" y="5339364"/>
+            <a:ext cx="2880360" cy="374538"/>
           </a:xfrm>
           <a:prstGeom prst="rect">
             <a:avLst/>
@@ -8706,65 +9197,23 @@
               <a:buNone/>
             </a:pPr>
             <a:r>
-              <a:rPr lang="en-US" sz="1700" b="1" dirty="0">
-                <a:solidFill>
-                  <a:srgbClr val="FFFFFF"/>
-                </a:solidFill>
-                <a:latin typeface="Arial" pitchFamily="34" charset="0"/>
-                <a:ea typeface="Arial" pitchFamily="34" charset="-122"/>
-                <a:cs typeface="Arial" pitchFamily="34" charset="-120"/>
-              </a:rPr>
-              <a:t>High Bandwidth Flash, with SK hynix</a:t>
-            </a:r>
-            <a:endParaRPr lang="en-US" sz="1700" dirty="0"/>
-          </a:p>
-        </p:txBody>
-      </p:sp>
-      <p:sp>
-        <p:nvSpPr>
-          <p:cNvPr id="18" name="Text 16"/>
-          <p:cNvSpPr/>
-          <p:nvPr/>
-        </p:nvSpPr>
-        <p:spPr>
-          <a:xfrm>
-            <a:off x="8406384" y="3675888"/>
-            <a:ext cx="2895600" cy="1828800"/>
-          </a:xfrm>
-          <a:prstGeom prst="rect">
-            <a:avLst/>
-          </a:prstGeom>
-          <a:noFill/>
-          <a:ln/>
-        </p:spPr>
-        <p:txBody>
-          <a:bodyPr wrap="square" lIns="0" tIns="0" rIns="0" bIns="0" rtlCol="0" anchor="t"/>
-          <a:lstStyle/>
-          <a:p>
-            <a:pPr indent="0" marL="0">
-              <a:lnSpc>
-                <a:spcPts val="1700"/>
-              </a:lnSpc>
-              <a:buNone/>
-            </a:pPr>
-            <a:r>
-              <a:rPr lang="en-US" sz="1250" dirty="0">
-                <a:solidFill>
-                  <a:srgbClr val="E8ECF4"/>
+              <a:rPr lang="en-US" sz="1200" dirty="0">
+                <a:solidFill>
+                  <a:srgbClr val="8B95A9"/>
                 </a:solidFill>
                 <a:latin typeface="Calibri" pitchFamily="34" charset="0"/>
                 <a:ea typeface="Calibri" pitchFamily="34" charset="-122"/>
                 <a:cs typeface="Calibri" pitchFamily="34" charset="-120"/>
               </a:rPr>
-              <a:t>First OCP technical specification published August 2026: up to 512GB per stack and up to 3TB/s, aimed at the AI inference bottleneck.</a:t>
-            </a:r>
-            <a:endParaRPr lang="en-US" sz="1250" dirty="0"/>
-          </a:p>
-        </p:txBody>
-      </p:sp>
-      <p:sp>
-        <p:nvSpPr>
-          <p:cNvPr id="19" name="Text 17"/>
+              <a:t>Q4 FY2026 — where it finished</a:t>
+            </a:r>
+            <a:endParaRPr lang="en-US" sz="1200" dirty="0"/>
+          </a:p>
+        </p:txBody>
+      </p:sp>
+      <p:sp>
+        <p:nvSpPr>
+          <p:cNvPr id="14" name="Text 11"/>
           <p:cNvSpPr/>
           <p:nvPr/>
         </p:nvSpPr>
@@ -8795,7 +9244,7 @@
                 <a:ea typeface="Calibri" pitchFamily="34" charset="-122"/>
                 <a:cs typeface="Calibri" pitchFamily="34" charset="-120"/>
               </a:rPr>
-              <a:t>Sandisk product announcements and FY2026 results commentary.</a:t>
+              <a:t>GAAP diluted EPS. Q4 non-GAAP EPS was $39.25, against a consensus near $33.38.</a:t>
             </a:r>
             <a:endParaRPr lang="en-US" sz="950" dirty="0"/>
           </a:p>
@@ -8806,6 +9255,9 @@
   <p:clrMapOvr>
     <a:masterClrMapping/>
   </p:clrMapOvr>
+  <p:transition spd="med" advClick="1">
+    <p:fade/>
+  </p:transition>
 </p:sld>
 </file>
 
@@ -8866,7 +9318,7 @@
                 <a:ea typeface="Arial" pitchFamily="34" charset="-122"/>
                 <a:cs typeface="Arial" pitchFamily="34" charset="-120"/>
               </a:rPr>
-              <a:t>What management guided to</a:t>
+              <a:t>Where the revenue comes from</a:t>
             </a:r>
             <a:endParaRPr lang="en-US" sz="3400" dirty="0"/>
           </a:p>
@@ -8905,26 +9357,42 @@
                 <a:ea typeface="Calibri" pitchFamily="34" charset="-122"/>
                 <a:cs typeface="Calibri" pitchFamily="34" charset="-120"/>
               </a:rPr>
-              <a:t>First quarter of fiscal 2027</a:t>
+              <a:t>FY2026 by segment — and what changed</a:t>
             </a:r>
             <a:endParaRPr lang="en-US" sz="1500" dirty="0"/>
           </a:p>
         </p:txBody>
       </p:sp>
-      <p:sp>
-        <p:nvSpPr>
-          <p:cNvPr id="4" name="Shape 2"/>
-          <p:cNvSpPr/>
-          <p:nvPr/>
-        </p:nvSpPr>
-        <p:spPr>
-          <a:xfrm>
-            <a:off x="566928" y="1874520"/>
-            <a:ext cx="5394960" cy="1874520"/>
+      <p:graphicFrame>
+        <p:nvGraphicFramePr>
+          <p:cNvPr id="4" name="Chart 0" descr=""/>
+          <p:cNvGraphicFramePr/>
+          <p:nvPr/>
+        </p:nvGraphicFramePr>
+        <p:xfrm>
+          <a:off x="566928" y="1691640"/>
+          <a:ext cx="6949440" cy="3200400"/>
+        </p:xfrm>
+        <a:graphic xmlns:a="http://schemas.openxmlformats.org/drawingml/2006/main">
+          <a:graphicData uri="http://schemas.openxmlformats.org/drawingml/2006/chart">
+            <c:chart xmlns:c="http://schemas.openxmlformats.org/drawingml/2006/chart" r:id="rId1"/>
+          </a:graphicData>
+        </a:graphic>
+      </p:graphicFrame>
+      <p:sp>
+        <p:nvSpPr>
+          <p:cNvPr id="5" name="Shape 2"/>
+          <p:cNvSpPr/>
+          <p:nvPr/>
+        </p:nvSpPr>
+        <p:spPr>
+          <a:xfrm>
+            <a:off x="7882128" y="1691640"/>
+            <a:ext cx="3712464" cy="1463040"/>
           </a:xfrm>
           <a:prstGeom prst="roundRect">
             <a:avLst>
-              <a:gd name="adj" fmla="val 5854"/>
+              <a:gd name="adj" fmla="val 7500"/>
             </a:avLst>
           </a:prstGeom>
           <a:solidFill>
@@ -8940,14 +9408,14 @@
       </p:sp>
       <p:sp>
         <p:nvSpPr>
-          <p:cNvPr id="5" name="Text 3"/>
-          <p:cNvSpPr/>
-          <p:nvPr/>
-        </p:nvSpPr>
-        <p:spPr>
-          <a:xfrm>
-            <a:off x="786384" y="2020824"/>
-            <a:ext cx="4956048" cy="862279"/>
+          <p:cNvPr id="6" name="Text 3"/>
+          <p:cNvSpPr/>
+          <p:nvPr/>
+        </p:nvSpPr>
+        <p:spPr>
+          <a:xfrm>
+            <a:off x="8101584" y="1837944"/>
+            <a:ext cx="3273552" cy="672998"/>
           </a:xfrm>
           <a:prstGeom prst="rect">
             <a:avLst/>
@@ -8963,7 +9431,7 @@
               <a:buNone/>
             </a:pPr>
             <a:r>
-              <a:rPr lang="en-US" sz="3800" b="1" dirty="0">
+              <a:rPr lang="en-US" sz="4000" b="1" dirty="0">
                 <a:solidFill>
                   <a:srgbClr val="3B82F6"/>
                 </a:solidFill>
@@ -8971,22 +9439,22 @@
                 <a:ea typeface="Arial" pitchFamily="34" charset="-122"/>
                 <a:cs typeface="Arial" pitchFamily="34" charset="-120"/>
               </a:rPr>
-              <a:t>$10.30–10.80B</a:t>
-            </a:r>
-            <a:endParaRPr lang="en-US" sz="3800" dirty="0"/>
-          </a:p>
-        </p:txBody>
-      </p:sp>
-      <p:sp>
-        <p:nvSpPr>
-          <p:cNvPr id="6" name="Text 4"/>
-          <p:cNvSpPr/>
-          <p:nvPr/>
-        </p:nvSpPr>
-        <p:spPr>
-          <a:xfrm>
-            <a:off x="786384" y="3074213"/>
-            <a:ext cx="4956048" cy="599846"/>
+              <a:t>+437%</a:t>
+            </a:r>
+            <a:endParaRPr lang="en-US" sz="4000" dirty="0"/>
+          </a:p>
+        </p:txBody>
+      </p:sp>
+      <p:sp>
+        <p:nvSpPr>
+          <p:cNvPr id="7" name="Text 4"/>
+          <p:cNvSpPr/>
+          <p:nvPr/>
+        </p:nvSpPr>
+        <p:spPr>
+          <a:xfrm>
+            <a:off x="8101584" y="2627986"/>
+            <a:ext cx="3273552" cy="468173"/>
           </a:xfrm>
           <a:prstGeom prst="rect">
             <a:avLst/>
@@ -9010,7 +9478,7 @@
                 <a:ea typeface="Calibri" pitchFamily="34" charset="-122"/>
                 <a:cs typeface="Calibri" pitchFamily="34" charset="-120"/>
               </a:rPr>
-              <a:t>Q1 FY2027 revenue guidance</a:t>
+              <a:t>Datacenter revenue, year over year</a:t>
             </a:r>
             <a:endParaRPr lang="en-US" sz="1200" dirty="0"/>
           </a:p>
@@ -9018,18 +9486,18 @@
       </p:sp>
       <p:sp>
         <p:nvSpPr>
-          <p:cNvPr id="7" name="Shape 5"/>
-          <p:cNvSpPr/>
-          <p:nvPr/>
-        </p:nvSpPr>
-        <p:spPr>
-          <a:xfrm>
-            <a:off x="6291072" y="1874520"/>
-            <a:ext cx="5394960" cy="1874520"/>
+          <p:cNvPr id="8" name="Shape 5"/>
+          <p:cNvSpPr/>
+          <p:nvPr/>
+        </p:nvSpPr>
+        <p:spPr>
+          <a:xfrm>
+            <a:off x="7882128" y="3310128"/>
+            <a:ext cx="3712464" cy="1463040"/>
           </a:xfrm>
           <a:prstGeom prst="roundRect">
             <a:avLst>
-              <a:gd name="adj" fmla="val 5854"/>
+              <a:gd name="adj" fmla="val 7500"/>
             </a:avLst>
           </a:prstGeom>
           <a:solidFill>
@@ -9045,14 +9513,14 @@
       </p:sp>
       <p:sp>
         <p:nvSpPr>
-          <p:cNvPr id="8" name="Text 6"/>
-          <p:cNvSpPr/>
-          <p:nvPr/>
-        </p:nvSpPr>
-        <p:spPr>
-          <a:xfrm>
-            <a:off x="6510528" y="2020824"/>
-            <a:ext cx="4956048" cy="862279"/>
+          <p:cNvPr id="9" name="Text 6"/>
+          <p:cNvSpPr/>
+          <p:nvPr/>
+        </p:nvSpPr>
+        <p:spPr>
+          <a:xfrm>
+            <a:off x="8101584" y="3456432"/>
+            <a:ext cx="3273552" cy="672998"/>
           </a:xfrm>
           <a:prstGeom prst="rect">
             <a:avLst/>
@@ -9068,30 +9536,30 @@
               <a:buNone/>
             </a:pPr>
             <a:r>
-              <a:rPr lang="en-US" sz="3800" b="1" dirty="0">
-                <a:solidFill>
-                  <a:srgbClr val="4ADE80"/>
+              <a:rPr lang="en-US" sz="2600" b="1" dirty="0">
+                <a:solidFill>
+                  <a:srgbClr val="3B82F6"/>
                 </a:solidFill>
                 <a:latin typeface="Arial" pitchFamily="34" charset="0"/>
                 <a:ea typeface="Arial" pitchFamily="34" charset="-122"/>
                 <a:cs typeface="Arial" pitchFamily="34" charset="-120"/>
               </a:rPr>
-              <a:t>$44.00–46.00</a:t>
-            </a:r>
-            <a:endParaRPr lang="en-US" sz="3800" dirty="0"/>
-          </a:p>
-        </p:txBody>
-      </p:sp>
-      <p:sp>
-        <p:nvSpPr>
-          <p:cNvPr id="9" name="Text 7"/>
-          <p:cNvSpPr/>
-          <p:nvPr/>
-        </p:nvSpPr>
-        <p:spPr>
-          <a:xfrm>
-            <a:off x="6510528" y="3074213"/>
-            <a:ext cx="4956048" cy="599846"/>
+              <a:t>12% → 38%</a:t>
+            </a:r>
+            <a:endParaRPr lang="en-US" sz="2600" dirty="0"/>
+          </a:p>
+        </p:txBody>
+      </p:sp>
+      <p:sp>
+        <p:nvSpPr>
+          <p:cNvPr id="10" name="Text 7"/>
+          <p:cNvSpPr/>
+          <p:nvPr/>
+        </p:nvSpPr>
+        <p:spPr>
+          <a:xfrm>
+            <a:off x="8101584" y="4246474"/>
+            <a:ext cx="3273552" cy="468173"/>
           </a:xfrm>
           <a:prstGeom prst="rect">
             <a:avLst/>
@@ -9115,7 +9583,7 @@
                 <a:ea typeface="Calibri" pitchFamily="34" charset="-122"/>
                 <a:cs typeface="Calibri" pitchFamily="34" charset="-120"/>
               </a:rPr>
-              <a:t>Q1 FY2027 non-GAAP diluted EPS guidance</a:t>
+              <a:t>Datacenter share of the portfolio, in one year</a:t>
             </a:r>
             <a:endParaRPr lang="en-US" sz="1200" dirty="0"/>
           </a:p>
@@ -9123,26 +9591,26 @@
       </p:sp>
       <p:sp>
         <p:nvSpPr>
-          <p:cNvPr id="10" name="Shape 8"/>
-          <p:cNvSpPr/>
-          <p:nvPr/>
-        </p:nvSpPr>
-        <p:spPr>
-          <a:xfrm>
-            <a:off x="566928" y="4041648"/>
-            <a:ext cx="11027664" cy="1572768"/>
+          <p:cNvPr id="11" name="Shape 8"/>
+          <p:cNvSpPr/>
+          <p:nvPr/>
+        </p:nvSpPr>
+        <p:spPr>
+          <a:xfrm>
+            <a:off x="7882128" y="4928616"/>
+            <a:ext cx="3712464" cy="1005840"/>
           </a:xfrm>
           <a:prstGeom prst="roundRect">
             <a:avLst>
-              <a:gd name="adj" fmla="val 6977"/>
+              <a:gd name="adj" fmla="val 10909"/>
             </a:avLst>
           </a:prstGeom>
           <a:solidFill>
-            <a:srgbClr val="1C2536"/>
+            <a:srgbClr val="151C2A"/>
           </a:solidFill>
           <a:ln w="12700">
             <a:solidFill>
-              <a:srgbClr val="1C2536"/>
+              <a:srgbClr val="151C2A"/>
             </a:solidFill>
             <a:prstDash val="solid"/>
           </a:ln>
@@ -9150,53 +9618,53 @@
       </p:sp>
       <p:sp>
         <p:nvSpPr>
-          <p:cNvPr id="11" name="Text 9"/>
-          <p:cNvSpPr/>
-          <p:nvPr/>
-        </p:nvSpPr>
-        <p:spPr>
-          <a:xfrm>
-            <a:off x="896112" y="4224528"/>
-            <a:ext cx="10369296" cy="365760"/>
-          </a:xfrm>
-          <a:prstGeom prst="rect">
-            <a:avLst/>
-          </a:prstGeom>
-          <a:noFill/>
-          <a:ln/>
-        </p:spPr>
-        <p:txBody>
-          <a:bodyPr wrap="square" lIns="0" tIns="0" rIns="0" bIns="0" rtlCol="0" anchor="t"/>
-          <a:lstStyle/>
-          <a:p>
-            <a:pPr indent="0" marL="0">
-              <a:buNone/>
-            </a:pPr>
-            <a:r>
-              <a:rPr lang="en-US" sz="1500" b="1" dirty="0">
-                <a:solidFill>
-                  <a:srgbClr val="FFFFFF"/>
+          <p:cNvPr id="12" name="Text 9"/>
+          <p:cNvSpPr/>
+          <p:nvPr/>
+        </p:nvSpPr>
+        <p:spPr>
+          <a:xfrm>
+            <a:off x="8101584" y="5074920"/>
+            <a:ext cx="3273552" cy="462686"/>
+          </a:xfrm>
+          <a:prstGeom prst="rect">
+            <a:avLst/>
+          </a:prstGeom>
+          <a:noFill/>
+          <a:ln/>
+        </p:spPr>
+        <p:txBody>
+          <a:bodyPr wrap="square" lIns="0" tIns="0" rIns="0" bIns="0" rtlCol="0" anchor="ctr"/>
+          <a:lstStyle/>
+          <a:p>
+            <a:pPr indent="0" marL="0">
+              <a:buNone/>
+            </a:pPr>
+            <a:r>
+              <a:rPr lang="en-US" sz="2400" b="1" dirty="0">
+                <a:solidFill>
+                  <a:srgbClr val="EA580C"/>
                 </a:solidFill>
                 <a:latin typeface="Arial" pitchFamily="34" charset="0"/>
                 <a:ea typeface="Arial" pitchFamily="34" charset="-122"/>
                 <a:cs typeface="Arial" pitchFamily="34" charset="-120"/>
               </a:rPr>
-              <a:t>The comparison that makes it land</a:t>
-            </a:r>
-            <a:endParaRPr lang="en-US" sz="1500" dirty="0"/>
-          </a:p>
-        </p:txBody>
-      </p:sp>
-      <p:sp>
-        <p:nvSpPr>
-          <p:cNvPr id="12" name="Text 10"/>
-          <p:cNvSpPr/>
-          <p:nvPr/>
-        </p:nvSpPr>
-        <p:spPr>
-          <a:xfrm>
-            <a:off x="896112" y="4645152"/>
-            <a:ext cx="10369296" cy="868680"/>
+              <a:t>−32%</a:t>
+            </a:r>
+            <a:endParaRPr lang="en-US" sz="2400" dirty="0"/>
+          </a:p>
+        </p:txBody>
+      </p:sp>
+      <p:sp>
+        <p:nvSpPr>
+          <p:cNvPr id="13" name="Text 10"/>
+          <p:cNvSpPr/>
+          <p:nvPr/>
+        </p:nvSpPr>
+        <p:spPr>
+          <a:xfrm>
+            <a:off x="8101584" y="5572354"/>
+            <a:ext cx="3273552" cy="321869"/>
           </a:xfrm>
           <a:prstGeom prst="rect">
             <a:avLst/>
@@ -9212,30 +9680,30 @@
               <a:buNone/>
             </a:pPr>
             <a:r>
-              <a:rPr lang="en-US" sz="1450" dirty="0">
-                <a:solidFill>
-                  <a:srgbClr val="E8ECF4"/>
+              <a:rPr lang="en-US" sz="1200" dirty="0">
+                <a:solidFill>
+                  <a:srgbClr val="8B95A9"/>
                 </a:solidFill>
                 <a:latin typeface="Calibri" pitchFamily="34" charset="0"/>
                 <a:ea typeface="Calibri" pitchFamily="34" charset="-122"/>
                 <a:cs typeface="Calibri" pitchFamily="34" charset="-120"/>
               </a:rPr>
-              <a:t>A year earlier, Q1 FY2026 brought in $2.31B and earned $1.22 a share on a non-GAAP basis. The guided quarter is roughly four and a half times the revenue — and more than thirty times the earnings.</a:t>
-            </a:r>
-            <a:endParaRPr lang="en-US" sz="1450" dirty="0"/>
-          </a:p>
-        </p:txBody>
-      </p:sp>
-      <p:sp>
-        <p:nvSpPr>
-          <p:cNvPr id="13" name="Text 11"/>
-          <p:cNvSpPr/>
-          <p:nvPr/>
-        </p:nvSpPr>
-        <p:spPr>
-          <a:xfrm>
-            <a:off x="566928" y="6382512"/>
-            <a:ext cx="11027664" cy="274320"/>
+              <a:t>Consumer revenue, Q4 sequentially</a:t>
+            </a:r>
+            <a:endParaRPr lang="en-US" sz="1200" dirty="0"/>
+          </a:p>
+        </p:txBody>
+      </p:sp>
+      <p:sp>
+        <p:nvSpPr>
+          <p:cNvPr id="14" name="Text 11"/>
+          <p:cNvSpPr/>
+          <p:nvPr/>
+        </p:nvSpPr>
+        <p:spPr>
+          <a:xfrm>
+            <a:off x="566928" y="5074920"/>
+            <a:ext cx="6949440" cy="777240"/>
           </a:xfrm>
           <a:prstGeom prst="rect">
             <a:avLst/>
@@ -9251,15 +9719,54 @@
               <a:buNone/>
             </a:pPr>
             <a:r>
-              <a:rPr lang="en-US" sz="950" dirty="0">
-                <a:solidFill>
-                  <a:srgbClr val="5B657A"/>
+              <a:rPr lang="en-US" sz="1300" dirty="0">
+                <a:solidFill>
+                  <a:srgbClr val="E8ECF4"/>
                 </a:solidFill>
                 <a:latin typeface="Calibri" pitchFamily="34" charset="0"/>
                 <a:ea typeface="Calibri" pitchFamily="34" charset="-122"/>
                 <a:cs typeface="Calibri" pitchFamily="34" charset="-120"/>
               </a:rPr>
-              <a:t>Guidance issued with Q4 FY2026 results, 5 August 2026. Guidance is management's estimate, not a result.</a:t>
+              <a:t>Edge is still the largest segment. Datacenter is the one that re-rated the company — and Consumer is shrinking as capacity is pointed at higher-value customers.</a:t>
+            </a:r>
+            <a:endParaRPr lang="en-US" sz="1300" dirty="0"/>
+          </a:p>
+        </p:txBody>
+      </p:sp>
+      <p:sp>
+        <p:nvSpPr>
+          <p:cNvPr id="15" name="Text 12"/>
+          <p:cNvSpPr/>
+          <p:nvPr/>
+        </p:nvSpPr>
+        <p:spPr>
+          <a:xfrm>
+            <a:off x="566928" y="6382512"/>
+            <a:ext cx="11027664" cy="274320"/>
+          </a:xfrm>
+          <a:prstGeom prst="rect">
+            <a:avLst/>
+          </a:prstGeom>
+          <a:noFill/>
+          <a:ln/>
+        </p:spPr>
+        <p:txBody>
+          <a:bodyPr wrap="square" lIns="0" tIns="0" rIns="0" bIns="0" rtlCol="0" anchor="ctr"/>
+          <a:lstStyle/>
+          <a:p>
+            <a:pPr indent="0" marL="0">
+              <a:buNone/>
+            </a:pPr>
+            <a:r>
+              <a:rPr lang="en-US" sz="950" dirty="0">
+                <a:solidFill>
+                  <a:srgbClr val="5B657A"/>
+                </a:solidFill>
+                <a:latin typeface="Calibri" pitchFamily="34" charset="0"/>
+                <a:ea typeface="Calibri" pitchFamily="34" charset="-122"/>
+                <a:cs typeface="Calibri" pitchFamily="34" charset="-120"/>
+              </a:rPr>
+              <a:t>FY2026 segment revenue. The three segments sum to the reported $20.25B total.</a:t>
             </a:r>
             <a:endParaRPr lang="en-US" sz="950" dirty="0"/>
           </a:p>
@@ -9270,6 +9777,9 @@
   <p:clrMapOvr>
     <a:masterClrMapping/>
   </p:clrMapOvr>
+  <p:transition spd="med" advClick="1">
+    <p:fade/>
+  </p:transition>
 </p:sld>
 </file>
 

--- a/sandisk/SanDisk-SNDK-FY2026.pptx
+++ b/sandisk/SanDisk-SNDK-FY2026.pptx
@@ -3587,6 +3587,71 @@
   <p:transition spd="med" advClick="1">
     <p:fade/>
   </p:transition>
+  <p:timing>
+    <p:tnLst>
+      <p:par>
+        <p:cTn id="1" dur="indefinite" restart="never" nodeType="tmRoot">
+          <p:childTnLst>
+            <p:seq concurrent="1" nextAc="seek">
+              <p:cTn id="2" dur="indefinite" nodeType="mainSeq">
+                <p:childTnLst>
+                  <p:par>
+                    <p:cTn id="3" fill="hold">
+                      <p:stCondLst>
+                        <p:cond delay="0"/>
+                      </p:stCondLst>
+                      <p:childTnLst>
+                        <p:par>
+                          <p:cTn id="4" fill="hold">
+                            <p:stCondLst>
+                              <p:cond delay="0"/>
+                            </p:stCondLst>
+                            <p:childTnLst>
+                              <p:par>
+                                <p:cTn id="5" presetID="1" presetClass="mediacall" presetSubtype="0" fill="hold" nodeType="afterEffect">
+                                  <p:stCondLst>
+                                    <p:cond delay="0"/>
+                                  </p:stCondLst>
+                                  <p:childTnLst>
+                                    <p:cmd type="call" cmd="playFrom(0.0)">
+                                      <p:cBhvr>
+                                        <p:cTn id="6" dur="10000" fill="hold"/>
+                                        <p:tgtEl>
+                                          <p:spTgt spid="3"/>
+                                        </p:tgtEl>
+                                      </p:cBhvr>
+                                    </p:cmd>
+                                  </p:childTnLst>
+                                </p:cTn>
+                              </p:par>
+                            </p:childTnLst>
+                          </p:cTn>
+                        </p:par>
+                      </p:childTnLst>
+                    </p:cTn>
+                  </p:par>
+                </p:childTnLst>
+              </p:cTn>
+              <p:prevCondLst>
+                <p:cond evt="onPrev" delay="0">
+                  <p:tgtEl>
+                    <p:sldTgt/>
+                  </p:tgtEl>
+                </p:cond>
+              </p:prevCondLst>
+              <p:nextCondLst>
+                <p:cond evt="onNext" delay="0">
+                  <p:tgtEl>
+                    <p:sldTgt/>
+                  </p:tgtEl>
+                </p:cond>
+              </p:nextCondLst>
+            </p:seq>
+          </p:childTnLst>
+        </p:cTn>
+      </p:par>
+    </p:tnLst>
+  </p:timing>
 </p:sld>
 </file>
 
@@ -8329,6 +8394,71 @@
   <p:transition spd="med" advClick="1">
     <p:fade/>
   </p:transition>
+  <p:timing>
+    <p:tnLst>
+      <p:par>
+        <p:cTn id="1" dur="indefinite" restart="never" nodeType="tmRoot">
+          <p:childTnLst>
+            <p:seq concurrent="1" nextAc="seek">
+              <p:cTn id="2" dur="indefinite" nodeType="mainSeq">
+                <p:childTnLst>
+                  <p:par>
+                    <p:cTn id="3" fill="hold">
+                      <p:stCondLst>
+                        <p:cond delay="0"/>
+                      </p:stCondLst>
+                      <p:childTnLst>
+                        <p:par>
+                          <p:cTn id="4" fill="hold">
+                            <p:stCondLst>
+                              <p:cond delay="0"/>
+                            </p:stCondLst>
+                            <p:childTnLst>
+                              <p:par>
+                                <p:cTn id="5" presetID="1" presetClass="mediacall" presetSubtype="0" fill="hold" nodeType="afterEffect">
+                                  <p:stCondLst>
+                                    <p:cond delay="0"/>
+                                  </p:stCondLst>
+                                  <p:childTnLst>
+                                    <p:cmd type="call" cmd="playFrom(0.0)">
+                                      <p:cBhvr>
+                                        <p:cTn id="6" dur="10000" fill="hold"/>
+                                        <p:tgtEl>
+                                          <p:spTgt spid="3"/>
+                                        </p:tgtEl>
+                                      </p:cBhvr>
+                                    </p:cmd>
+                                  </p:childTnLst>
+                                </p:cTn>
+                              </p:par>
+                            </p:childTnLst>
+                          </p:cTn>
+                        </p:par>
+                      </p:childTnLst>
+                    </p:cTn>
+                  </p:par>
+                </p:childTnLst>
+              </p:cTn>
+              <p:prevCondLst>
+                <p:cond evt="onPrev" delay="0">
+                  <p:tgtEl>
+                    <p:sldTgt/>
+                  </p:tgtEl>
+                </p:cond>
+              </p:prevCondLst>
+              <p:nextCondLst>
+                <p:cond evt="onNext" delay="0">
+                  <p:tgtEl>
+                    <p:sldTgt/>
+                  </p:tgtEl>
+                </p:cond>
+              </p:nextCondLst>
+            </p:seq>
+          </p:childTnLst>
+        </p:cTn>
+      </p:par>
+    </p:tnLst>
+  </p:timing>
 </p:sld>
 </file>
 
@@ -8775,6 +8905,71 @@
   <p:transition spd="med" advClick="1">
     <p:fade/>
   </p:transition>
+  <p:timing>
+    <p:tnLst>
+      <p:par>
+        <p:cTn id="1" dur="indefinite" restart="never" nodeType="tmRoot">
+          <p:childTnLst>
+            <p:seq concurrent="1" nextAc="seek">
+              <p:cTn id="2" dur="indefinite" nodeType="mainSeq">
+                <p:childTnLst>
+                  <p:par>
+                    <p:cTn id="3" fill="hold">
+                      <p:stCondLst>
+                        <p:cond delay="0"/>
+                      </p:stCondLst>
+                      <p:childTnLst>
+                        <p:par>
+                          <p:cTn id="4" fill="hold">
+                            <p:stCondLst>
+                              <p:cond delay="0"/>
+                            </p:stCondLst>
+                            <p:childTnLst>
+                              <p:par>
+                                <p:cTn id="5" presetID="1" presetClass="mediacall" presetSubtype="0" fill="hold" nodeType="afterEffect">
+                                  <p:stCondLst>
+                                    <p:cond delay="0"/>
+                                  </p:stCondLst>
+                                  <p:childTnLst>
+                                    <p:cmd type="call" cmd="playFrom(0.0)">
+                                      <p:cBhvr>
+                                        <p:cTn id="6" dur="10000" fill="hold"/>
+                                        <p:tgtEl>
+                                          <p:spTgt spid="3"/>
+                                        </p:tgtEl>
+                                      </p:cBhvr>
+                                    </p:cmd>
+                                  </p:childTnLst>
+                                </p:cTn>
+                              </p:par>
+                            </p:childTnLst>
+                          </p:cTn>
+                        </p:par>
+                      </p:childTnLst>
+                    </p:cTn>
+                  </p:par>
+                </p:childTnLst>
+              </p:cTn>
+              <p:prevCondLst>
+                <p:cond evt="onPrev" delay="0">
+                  <p:tgtEl>
+                    <p:sldTgt/>
+                  </p:tgtEl>
+                </p:cond>
+              </p:prevCondLst>
+              <p:nextCondLst>
+                <p:cond evt="onNext" delay="0">
+                  <p:tgtEl>
+                    <p:sldTgt/>
+                  </p:tgtEl>
+                </p:cond>
+              </p:nextCondLst>
+            </p:seq>
+          </p:childTnLst>
+        </p:cTn>
+      </p:par>
+    </p:tnLst>
+  </p:timing>
 </p:sld>
 </file>
 
